--- a/20260912_pccp/20260812_topic#2/[20260812] PCCP Topic#2.pptx
+++ b/20260912_pccp/20260812_topic#2/[20260812] PCCP Topic#2.pptx
@@ -5,24 +5,27 @@
     <p:sldMasterId id="2147483648" r:id="rId4"/>
   </p:sldMasterIdLst>
   <p:notesMasterIdLst>
-    <p:notesMasterId r:id="rId17"/>
+    <p:notesMasterId r:id="rId20"/>
   </p:notesMasterIdLst>
   <p:handoutMasterIdLst>
-    <p:handoutMasterId r:id="rId18"/>
+    <p:handoutMasterId r:id="rId21"/>
   </p:handoutMasterIdLst>
   <p:sldIdLst>
     <p:sldId id="256" r:id="rId5"/>
     <p:sldId id="3857" r:id="rId6"/>
     <p:sldId id="263" r:id="rId7"/>
-    <p:sldId id="268" r:id="rId8"/>
-    <p:sldId id="3848" r:id="rId9"/>
-    <p:sldId id="3866" r:id="rId10"/>
-    <p:sldId id="3870" r:id="rId11"/>
-    <p:sldId id="3850" r:id="rId12"/>
-    <p:sldId id="3871" r:id="rId13"/>
-    <p:sldId id="3872" r:id="rId14"/>
-    <p:sldId id="3873" r:id="rId15"/>
-    <p:sldId id="3847" r:id="rId16"/>
+    <p:sldId id="3848" r:id="rId8"/>
+    <p:sldId id="3874" r:id="rId9"/>
+    <p:sldId id="268" r:id="rId10"/>
+    <p:sldId id="3866" r:id="rId11"/>
+    <p:sldId id="3870" r:id="rId12"/>
+    <p:sldId id="3850" r:id="rId13"/>
+    <p:sldId id="3871" r:id="rId14"/>
+    <p:sldId id="3876" r:id="rId15"/>
+    <p:sldId id="3872" r:id="rId16"/>
+    <p:sldId id="3873" r:id="rId17"/>
+    <p:sldId id="3847" r:id="rId18"/>
+    <p:sldId id="3877" r:id="rId19"/>
   </p:sldIdLst>
   <p:sldSz cx="12192000" cy="6858000"/>
   <p:notesSz cx="6858000" cy="9144000"/>
@@ -165,7 +168,7 @@
           <p:cNvPr id="2" name="Header Placeholder 1">
             <a:extLst>
               <a:ext uri="{FF2B5EF4-FFF2-40B4-BE49-F238E27FC236}">
-                <a16:creationId xmlns="" xmlns:a16="http://schemas.microsoft.com/office/drawing/2014/main" id="{3976AB79-C677-3DB7-78CF-9305D5861483}"/>
+                <a16:creationId xmlns:a16="http://schemas.microsoft.com/office/drawing/2014/main" id="{3976AB79-C677-3DB7-78CF-9305D5861483}"/>
               </a:ext>
             </a:extLst>
           </p:cNvPr>
@@ -202,7 +205,7 @@
           <p:cNvPr id="3" name="Date Placeholder 2">
             <a:extLst>
               <a:ext uri="{FF2B5EF4-FFF2-40B4-BE49-F238E27FC236}">
-                <a16:creationId xmlns="" xmlns:a16="http://schemas.microsoft.com/office/drawing/2014/main" id="{113AB137-CEA6-0244-F12B-1ECC21172D00}"/>
+                <a16:creationId xmlns:a16="http://schemas.microsoft.com/office/drawing/2014/main" id="{113AB137-CEA6-0244-F12B-1ECC21172D00}"/>
               </a:ext>
             </a:extLst>
           </p:cNvPr>
@@ -232,7 +235,7 @@
           <a:p>
             <a:fld id="{0DC994AA-C437-4EF4-8BEF-0B832D7FA420}" type="datetimeFigureOut">
               <a:rPr lang="en-US" smtClean="0"/>
-              <a:t>09/08/2026</a:t>
+              <a:t>8/12/2026</a:t>
             </a:fld>
             <a:endParaRPr lang="en-US" dirty="0"/>
           </a:p>
@@ -243,7 +246,7 @@
           <p:cNvPr id="4" name="Footer Placeholder 3">
             <a:extLst>
               <a:ext uri="{FF2B5EF4-FFF2-40B4-BE49-F238E27FC236}">
-                <a16:creationId xmlns="" xmlns:a16="http://schemas.microsoft.com/office/drawing/2014/main" id="{0868EC96-C6CC-F2AF-D90F-143F4D20A07A}"/>
+                <a16:creationId xmlns:a16="http://schemas.microsoft.com/office/drawing/2014/main" id="{0868EC96-C6CC-F2AF-D90F-143F4D20A07A}"/>
               </a:ext>
             </a:extLst>
           </p:cNvPr>
@@ -280,7 +283,7 @@
           <p:cNvPr id="5" name="Slide Number Placeholder 4">
             <a:extLst>
               <a:ext uri="{FF2B5EF4-FFF2-40B4-BE49-F238E27FC236}">
-                <a16:creationId xmlns="" xmlns:a16="http://schemas.microsoft.com/office/drawing/2014/main" id="{94F8EC8D-EF88-0275-F75C-A789924433BA}"/>
+                <a16:creationId xmlns:a16="http://schemas.microsoft.com/office/drawing/2014/main" id="{94F8EC8D-EF88-0275-F75C-A789924433BA}"/>
               </a:ext>
             </a:extLst>
           </p:cNvPr>
@@ -409,7 +412,7 @@
           <a:p>
             <a:fld id="{FB20CE03-6C3A-EB4D-A9B1-7EFD38B58412}" type="datetimeFigureOut">
               <a:rPr lang="en-US" smtClean="0"/>
-              <a:t>09/08/2026</a:t>
+              <a:t>8/12/2026</a:t>
             </a:fld>
             <a:endParaRPr lang="en-US" dirty="0"/>
           </a:p>
@@ -768,7 +771,7 @@
         <p:cNvPr id="1" name="">
           <a:extLst>
             <a:ext uri="{FF2B5EF4-FFF2-40B4-BE49-F238E27FC236}">
-              <a16:creationId xmlns="" xmlns:a16="http://schemas.microsoft.com/office/drawing/2014/main" id="{6B32189C-BC4E-5500-86EE-6F33019E92A6}"/>
+              <a16:creationId xmlns:a16="http://schemas.microsoft.com/office/drawing/2014/main" id="{6B32189C-BC4E-5500-86EE-6F33019E92A6}"/>
             </a:ext>
           </a:extLst>
         </p:cNvPr>
@@ -788,7 +791,7 @@
           <p:cNvPr id="2" name="Slide Image Placeholder 1">
             <a:extLst>
               <a:ext uri="{FF2B5EF4-FFF2-40B4-BE49-F238E27FC236}">
-                <a16:creationId xmlns="" xmlns:a16="http://schemas.microsoft.com/office/drawing/2014/main" id="{1BCAF856-45E6-AA74-4B04-8D18D162340A}"/>
+                <a16:creationId xmlns:a16="http://schemas.microsoft.com/office/drawing/2014/main" id="{1BCAF856-45E6-AA74-4B04-8D18D162340A}"/>
               </a:ext>
             </a:extLst>
           </p:cNvPr>
@@ -806,7 +809,7 @@
           <p:cNvPr id="3" name="Notes Placeholder 2">
             <a:extLst>
               <a:ext uri="{FF2B5EF4-FFF2-40B4-BE49-F238E27FC236}">
-                <a16:creationId xmlns="" xmlns:a16="http://schemas.microsoft.com/office/drawing/2014/main" id="{C7076D8F-EA67-2B0A-0300-EACF694BAF5D}"/>
+                <a16:creationId xmlns:a16="http://schemas.microsoft.com/office/drawing/2014/main" id="{C7076D8F-EA67-2B0A-0300-EACF694BAF5D}"/>
               </a:ext>
             </a:extLst>
           </p:cNvPr>
@@ -831,7 +834,7 @@
           <p:cNvPr id="4" name="Slide Number Placeholder 3">
             <a:extLst>
               <a:ext uri="{FF2B5EF4-FFF2-40B4-BE49-F238E27FC236}">
-                <a16:creationId xmlns="" xmlns:a16="http://schemas.microsoft.com/office/drawing/2014/main" id="{3D4B6CDA-AD1B-1F5D-777F-3DA3ABF5E925}"/>
+                <a16:creationId xmlns:a16="http://schemas.microsoft.com/office/drawing/2014/main" id="{3D4B6CDA-AD1B-1F5D-777F-3DA3ABF5E925}"/>
               </a:ext>
             </a:extLst>
           </p:cNvPr>
@@ -849,7 +852,7 @@
           <a:p>
             <a:fld id="{8B57D50D-BAA9-464B-B391-243138E078D8}" type="slidenum">
               <a:rPr lang="en-US" smtClean="0"/>
-              <a:t>10</a:t>
+              <a:t>12</a:t>
             </a:fld>
             <a:endParaRPr lang="en-US" dirty="0"/>
           </a:p>
@@ -876,7 +879,7 @@
         <p:cNvPr id="1" name="">
           <a:extLst>
             <a:ext uri="{FF2B5EF4-FFF2-40B4-BE49-F238E27FC236}">
-              <a16:creationId xmlns="" xmlns:a16="http://schemas.microsoft.com/office/drawing/2014/main" id="{6B32189C-BC4E-5500-86EE-6F33019E92A6}"/>
+              <a16:creationId xmlns:a16="http://schemas.microsoft.com/office/drawing/2014/main" id="{6B32189C-BC4E-5500-86EE-6F33019E92A6}"/>
             </a:ext>
           </a:extLst>
         </p:cNvPr>
@@ -896,7 +899,7 @@
           <p:cNvPr id="2" name="Slide Image Placeholder 1">
             <a:extLst>
               <a:ext uri="{FF2B5EF4-FFF2-40B4-BE49-F238E27FC236}">
-                <a16:creationId xmlns="" xmlns:a16="http://schemas.microsoft.com/office/drawing/2014/main" id="{1BCAF856-45E6-AA74-4B04-8D18D162340A}"/>
+                <a16:creationId xmlns:a16="http://schemas.microsoft.com/office/drawing/2014/main" id="{1BCAF856-45E6-AA74-4B04-8D18D162340A}"/>
               </a:ext>
             </a:extLst>
           </p:cNvPr>
@@ -914,7 +917,7 @@
           <p:cNvPr id="3" name="Notes Placeholder 2">
             <a:extLst>
               <a:ext uri="{FF2B5EF4-FFF2-40B4-BE49-F238E27FC236}">
-                <a16:creationId xmlns="" xmlns:a16="http://schemas.microsoft.com/office/drawing/2014/main" id="{C7076D8F-EA67-2B0A-0300-EACF694BAF5D}"/>
+                <a16:creationId xmlns:a16="http://schemas.microsoft.com/office/drawing/2014/main" id="{C7076D8F-EA67-2B0A-0300-EACF694BAF5D}"/>
               </a:ext>
             </a:extLst>
           </p:cNvPr>
@@ -939,7 +942,7 @@
           <p:cNvPr id="4" name="Slide Number Placeholder 3">
             <a:extLst>
               <a:ext uri="{FF2B5EF4-FFF2-40B4-BE49-F238E27FC236}">
-                <a16:creationId xmlns="" xmlns:a16="http://schemas.microsoft.com/office/drawing/2014/main" id="{3D4B6CDA-AD1B-1F5D-777F-3DA3ABF5E925}"/>
+                <a16:creationId xmlns:a16="http://schemas.microsoft.com/office/drawing/2014/main" id="{3D4B6CDA-AD1B-1F5D-777F-3DA3ABF5E925}"/>
               </a:ext>
             </a:extLst>
           </p:cNvPr>
@@ -957,7 +960,7 @@
           <a:p>
             <a:fld id="{8B57D50D-BAA9-464B-B391-243138E078D8}" type="slidenum">
               <a:rPr lang="en-US" smtClean="0"/>
-              <a:t>11</a:t>
+              <a:t>13</a:t>
             </a:fld>
             <a:endParaRPr lang="en-US" dirty="0"/>
           </a:p>
@@ -1041,7 +1044,7 @@
           <a:p>
             <a:fld id="{8B57D50D-BAA9-464B-B391-243138E078D8}" type="slidenum">
               <a:rPr lang="en-US" smtClean="0"/>
-              <a:t>12</a:t>
+              <a:t>14</a:t>
             </a:fld>
             <a:endParaRPr lang="en-US" dirty="0"/>
           </a:p>
@@ -1302,7 +1305,7 @@
     </p:spTree>
     <p:extLst>
       <p:ext uri="{BB962C8B-B14F-4D97-AF65-F5344CB8AC3E}">
-        <p14:creationId xmlns:p14="http://schemas.microsoft.com/office/powerpoint/2010/main" val="2316091678"/>
+        <p14:creationId xmlns:p14="http://schemas.microsoft.com/office/powerpoint/2010/main" val="737681818"/>
       </p:ext>
     </p:extLst>
   </p:cSld>
@@ -1377,7 +1380,7 @@
           <a:p>
             <a:fld id="{8B57D50D-BAA9-464B-B391-243138E078D8}" type="slidenum">
               <a:rPr lang="en-US" smtClean="0"/>
-              <a:t>5</a:t>
+              <a:t>6</a:t>
             </a:fld>
             <a:endParaRPr lang="en-US" dirty="0"/>
           </a:p>
@@ -1386,7 +1389,7 @@
     </p:spTree>
     <p:extLst>
       <p:ext uri="{BB962C8B-B14F-4D97-AF65-F5344CB8AC3E}">
-        <p14:creationId xmlns:p14="http://schemas.microsoft.com/office/powerpoint/2010/main" val="737681818"/>
+        <p14:creationId xmlns:p14="http://schemas.microsoft.com/office/powerpoint/2010/main" val="2316091678"/>
       </p:ext>
     </p:extLst>
   </p:cSld>
@@ -1404,7 +1407,7 @@
         <p:cNvPr id="1" name="">
           <a:extLst>
             <a:ext uri="{FF2B5EF4-FFF2-40B4-BE49-F238E27FC236}">
-              <a16:creationId xmlns="" xmlns:a16="http://schemas.microsoft.com/office/drawing/2014/main" id="{6B32189C-BC4E-5500-86EE-6F33019E92A6}"/>
+              <a16:creationId xmlns:a16="http://schemas.microsoft.com/office/drawing/2014/main" id="{6B32189C-BC4E-5500-86EE-6F33019E92A6}"/>
             </a:ext>
           </a:extLst>
         </p:cNvPr>
@@ -1424,7 +1427,7 @@
           <p:cNvPr id="2" name="Slide Image Placeholder 1">
             <a:extLst>
               <a:ext uri="{FF2B5EF4-FFF2-40B4-BE49-F238E27FC236}">
-                <a16:creationId xmlns="" xmlns:a16="http://schemas.microsoft.com/office/drawing/2014/main" id="{1BCAF856-45E6-AA74-4B04-8D18D162340A}"/>
+                <a16:creationId xmlns:a16="http://schemas.microsoft.com/office/drawing/2014/main" id="{1BCAF856-45E6-AA74-4B04-8D18D162340A}"/>
               </a:ext>
             </a:extLst>
           </p:cNvPr>
@@ -1442,7 +1445,7 @@
           <p:cNvPr id="3" name="Notes Placeholder 2">
             <a:extLst>
               <a:ext uri="{FF2B5EF4-FFF2-40B4-BE49-F238E27FC236}">
-                <a16:creationId xmlns="" xmlns:a16="http://schemas.microsoft.com/office/drawing/2014/main" id="{C7076D8F-EA67-2B0A-0300-EACF694BAF5D}"/>
+                <a16:creationId xmlns:a16="http://schemas.microsoft.com/office/drawing/2014/main" id="{C7076D8F-EA67-2B0A-0300-EACF694BAF5D}"/>
               </a:ext>
             </a:extLst>
           </p:cNvPr>
@@ -1467,7 +1470,7 @@
           <p:cNvPr id="4" name="Slide Number Placeholder 3">
             <a:extLst>
               <a:ext uri="{FF2B5EF4-FFF2-40B4-BE49-F238E27FC236}">
-                <a16:creationId xmlns="" xmlns:a16="http://schemas.microsoft.com/office/drawing/2014/main" id="{3D4B6CDA-AD1B-1F5D-777F-3DA3ABF5E925}"/>
+                <a16:creationId xmlns:a16="http://schemas.microsoft.com/office/drawing/2014/main" id="{3D4B6CDA-AD1B-1F5D-777F-3DA3ABF5E925}"/>
               </a:ext>
             </a:extLst>
           </p:cNvPr>
@@ -1485,7 +1488,7 @@
           <a:p>
             <a:fld id="{8B57D50D-BAA9-464B-B391-243138E078D8}" type="slidenum">
               <a:rPr lang="en-US" smtClean="0"/>
-              <a:t>6</a:t>
+              <a:t>7</a:t>
             </a:fld>
             <a:endParaRPr lang="en-US" dirty="0"/>
           </a:p>
@@ -1512,7 +1515,7 @@
         <p:cNvPr id="1" name="">
           <a:extLst>
             <a:ext uri="{FF2B5EF4-FFF2-40B4-BE49-F238E27FC236}">
-              <a16:creationId xmlns="" xmlns:a16="http://schemas.microsoft.com/office/drawing/2014/main" id="{6B32189C-BC4E-5500-86EE-6F33019E92A6}"/>
+              <a16:creationId xmlns:a16="http://schemas.microsoft.com/office/drawing/2014/main" id="{6B32189C-BC4E-5500-86EE-6F33019E92A6}"/>
             </a:ext>
           </a:extLst>
         </p:cNvPr>
@@ -1532,7 +1535,7 @@
           <p:cNvPr id="2" name="Slide Image Placeholder 1">
             <a:extLst>
               <a:ext uri="{FF2B5EF4-FFF2-40B4-BE49-F238E27FC236}">
-                <a16:creationId xmlns="" xmlns:a16="http://schemas.microsoft.com/office/drawing/2014/main" id="{1BCAF856-45E6-AA74-4B04-8D18D162340A}"/>
+                <a16:creationId xmlns:a16="http://schemas.microsoft.com/office/drawing/2014/main" id="{1BCAF856-45E6-AA74-4B04-8D18D162340A}"/>
               </a:ext>
             </a:extLst>
           </p:cNvPr>
@@ -1550,7 +1553,7 @@
           <p:cNvPr id="3" name="Notes Placeholder 2">
             <a:extLst>
               <a:ext uri="{FF2B5EF4-FFF2-40B4-BE49-F238E27FC236}">
-                <a16:creationId xmlns="" xmlns:a16="http://schemas.microsoft.com/office/drawing/2014/main" id="{C7076D8F-EA67-2B0A-0300-EACF694BAF5D}"/>
+                <a16:creationId xmlns:a16="http://schemas.microsoft.com/office/drawing/2014/main" id="{C7076D8F-EA67-2B0A-0300-EACF694BAF5D}"/>
               </a:ext>
             </a:extLst>
           </p:cNvPr>
@@ -1575,7 +1578,7 @@
           <p:cNvPr id="4" name="Slide Number Placeholder 3">
             <a:extLst>
               <a:ext uri="{FF2B5EF4-FFF2-40B4-BE49-F238E27FC236}">
-                <a16:creationId xmlns="" xmlns:a16="http://schemas.microsoft.com/office/drawing/2014/main" id="{3D4B6CDA-AD1B-1F5D-777F-3DA3ABF5E925}"/>
+                <a16:creationId xmlns:a16="http://schemas.microsoft.com/office/drawing/2014/main" id="{3D4B6CDA-AD1B-1F5D-777F-3DA3ABF5E925}"/>
               </a:ext>
             </a:extLst>
           </p:cNvPr>
@@ -1593,7 +1596,7 @@
           <a:p>
             <a:fld id="{8B57D50D-BAA9-464B-B391-243138E078D8}" type="slidenum">
               <a:rPr lang="en-US" smtClean="0"/>
-              <a:t>7</a:t>
+              <a:t>8</a:t>
             </a:fld>
             <a:endParaRPr lang="en-US" dirty="0"/>
           </a:p>
@@ -1677,7 +1680,7 @@
           <a:p>
             <a:fld id="{8B57D50D-BAA9-464B-B391-243138E078D8}" type="slidenum">
               <a:rPr lang="en-US" smtClean="0"/>
-              <a:t>8</a:t>
+              <a:t>9</a:t>
             </a:fld>
             <a:endParaRPr lang="en-US" dirty="0"/>
           </a:p>
@@ -1761,7 +1764,7 @@
           <a:p>
             <a:fld id="{8B57D50D-BAA9-464B-B391-243138E078D8}" type="slidenum">
               <a:rPr lang="en-US" smtClean="0"/>
-              <a:t>9</a:t>
+              <a:t>10</a:t>
             </a:fld>
             <a:endParaRPr lang="en-US" dirty="0"/>
           </a:p>
@@ -1802,10 +1805,10 @@
           <p:cNvPr id="2" name="Group 1">
             <a:extLst>
               <a:ext uri="{FF2B5EF4-FFF2-40B4-BE49-F238E27FC236}">
-                <a16:creationId xmlns="" xmlns:a16="http://schemas.microsoft.com/office/drawing/2014/main" id="{19429764-E305-A48D-5244-9BCD20902244}"/>
+                <a16:creationId xmlns:a16="http://schemas.microsoft.com/office/drawing/2014/main" id="{19429764-E305-A48D-5244-9BCD20902244}"/>
               </a:ext>
               <a:ext uri="{C183D7F6-B498-43B3-948B-1728B52AA6E4}">
-                <adec:decorative xmlns="" xmlns:adec="http://schemas.microsoft.com/office/drawing/2017/decorative" val="1"/>
+                <adec:decorative xmlns:adec="http://schemas.microsoft.com/office/drawing/2017/decorative" val="1"/>
               </a:ext>
             </a:extLst>
           </p:cNvPr>
@@ -1825,7 +1828,7 @@
             <p:cNvPr id="7" name="Freeform 13">
               <a:extLst>
                 <a:ext uri="{FF2B5EF4-FFF2-40B4-BE49-F238E27FC236}">
-                  <a16:creationId xmlns="" xmlns:a16="http://schemas.microsoft.com/office/drawing/2014/main" id="{45F65CE3-2411-E8E5-B72E-F5CBEC4DDC55}"/>
+                  <a16:creationId xmlns:a16="http://schemas.microsoft.com/office/drawing/2014/main" id="{45F65CE3-2411-E8E5-B72E-F5CBEC4DDC55}"/>
                 </a:ext>
               </a:extLst>
             </p:cNvPr>
@@ -1989,7 +1992,7 @@
             <p:cNvPr id="8" name="Straight Connector 7">
               <a:extLst>
                 <a:ext uri="{FF2B5EF4-FFF2-40B4-BE49-F238E27FC236}">
-                  <a16:creationId xmlns="" xmlns:a16="http://schemas.microsoft.com/office/drawing/2014/main" id="{3B6B51B3-AA6C-9C5E-7032-5AEA05D45908}"/>
+                  <a16:creationId xmlns:a16="http://schemas.microsoft.com/office/drawing/2014/main" id="{3B6B51B3-AA6C-9C5E-7032-5AEA05D45908}"/>
                 </a:ext>
               </a:extLst>
             </p:cNvPr>
@@ -2033,7 +2036,7 @@
             <p:cNvPr id="9" name="Freeform: Shape 13">
               <a:extLst>
                 <a:ext uri="{FF2B5EF4-FFF2-40B4-BE49-F238E27FC236}">
-                  <a16:creationId xmlns="" xmlns:a16="http://schemas.microsoft.com/office/drawing/2014/main" id="{4F28561D-5B3C-F08A-F7B5-48E6B74EAEBD}"/>
+                  <a16:creationId xmlns:a16="http://schemas.microsoft.com/office/drawing/2014/main" id="{4F28561D-5B3C-F08A-F7B5-48E6B74EAEBD}"/>
                 </a:ext>
               </a:extLst>
             </p:cNvPr>
@@ -2179,7 +2182,7 @@
             <p:cNvPr id="10" name="Freeform: Shape 15">
               <a:extLst>
                 <a:ext uri="{FF2B5EF4-FFF2-40B4-BE49-F238E27FC236}">
-                  <a16:creationId xmlns="" xmlns:a16="http://schemas.microsoft.com/office/drawing/2014/main" id="{7BD7FF70-44B7-E753-26CD-E228B56C2517}"/>
+                  <a16:creationId xmlns:a16="http://schemas.microsoft.com/office/drawing/2014/main" id="{7BD7FF70-44B7-E753-26CD-E228B56C2517}"/>
                 </a:ext>
               </a:extLst>
             </p:cNvPr>
@@ -2317,7 +2320,7 @@
             <p:cNvPr id="11" name="Oval 10">
               <a:extLst>
                 <a:ext uri="{FF2B5EF4-FFF2-40B4-BE49-F238E27FC236}">
-                  <a16:creationId xmlns="" xmlns:a16="http://schemas.microsoft.com/office/drawing/2014/main" id="{DF9EE857-93B9-ACF6-2AB4-2A29C4B94776}"/>
+                  <a16:creationId xmlns:a16="http://schemas.microsoft.com/office/drawing/2014/main" id="{DF9EE857-93B9-ACF6-2AB4-2A29C4B94776}"/>
                 </a:ext>
               </a:extLst>
             </p:cNvPr>
@@ -2398,7 +2401,7 @@
             <p:cNvPr id="12" name="Freeform: Shape 19">
               <a:extLst>
                 <a:ext uri="{FF2B5EF4-FFF2-40B4-BE49-F238E27FC236}">
-                  <a16:creationId xmlns="" xmlns:a16="http://schemas.microsoft.com/office/drawing/2014/main" id="{75030D84-5EEB-A095-3D43-0ED22BDB8406}"/>
+                  <a16:creationId xmlns:a16="http://schemas.microsoft.com/office/drawing/2014/main" id="{75030D84-5EEB-A095-3D43-0ED22BDB8406}"/>
                 </a:ext>
               </a:extLst>
             </p:cNvPr>
@@ -2568,7 +2571,7 @@
             <p:cNvPr id="13" name="Arc 12">
               <a:extLst>
                 <a:ext uri="{FF2B5EF4-FFF2-40B4-BE49-F238E27FC236}">
-                  <a16:creationId xmlns="" xmlns:a16="http://schemas.microsoft.com/office/drawing/2014/main" id="{26E6DE3E-6851-19AD-2E60-22F006238173}"/>
+                  <a16:creationId xmlns:a16="http://schemas.microsoft.com/office/drawing/2014/main" id="{26E6DE3E-6851-19AD-2E60-22F006238173}"/>
                 </a:ext>
               </a:extLst>
             </p:cNvPr>
@@ -2648,7 +2651,7 @@
           <p:cNvPr id="6" name="Title 1">
             <a:extLst>
               <a:ext uri="{FF2B5EF4-FFF2-40B4-BE49-F238E27FC236}">
-                <a16:creationId xmlns="" xmlns:a16="http://schemas.microsoft.com/office/drawing/2014/main" id="{2E8C189B-2E00-67DA-E342-3440F5EBB4CE}"/>
+                <a16:creationId xmlns:a16="http://schemas.microsoft.com/office/drawing/2014/main" id="{2E8C189B-2E00-67DA-E342-3440F5EBB4CE}"/>
               </a:ext>
             </a:extLst>
           </p:cNvPr>
@@ -2721,10 +2724,10 @@
           <p:cNvPr id="11" name="Rectangle 10">
             <a:extLst>
               <a:ext uri="{FF2B5EF4-FFF2-40B4-BE49-F238E27FC236}">
-                <a16:creationId xmlns="" xmlns:a16="http://schemas.microsoft.com/office/drawing/2014/main" id="{D9FE4C84-13A1-72EA-6541-7C8FDDEA71C0}"/>
+                <a16:creationId xmlns:a16="http://schemas.microsoft.com/office/drawing/2014/main" id="{D9FE4C84-13A1-72EA-6541-7C8FDDEA71C0}"/>
               </a:ext>
               <a:ext uri="{C183D7F6-B498-43B3-948B-1728B52AA6E4}">
-                <adec:decorative xmlns="" xmlns:adec="http://schemas.microsoft.com/office/drawing/2017/decorative" val="1"/>
+                <adec:decorative xmlns:adec="http://schemas.microsoft.com/office/drawing/2017/decorative" val="1"/>
               </a:ext>
             </a:extLst>
           </p:cNvPr>
@@ -2806,10 +2809,10 @@
           <p:cNvPr id="12" name="Arc 11">
             <a:extLst>
               <a:ext uri="{FF2B5EF4-FFF2-40B4-BE49-F238E27FC236}">
-                <a16:creationId xmlns="" xmlns:a16="http://schemas.microsoft.com/office/drawing/2014/main" id="{30468883-4E51-D3BD-E1C6-601ED9B6EF0E}"/>
+                <a16:creationId xmlns:a16="http://schemas.microsoft.com/office/drawing/2014/main" id="{30468883-4E51-D3BD-E1C6-601ED9B6EF0E}"/>
               </a:ext>
               <a:ext uri="{C183D7F6-B498-43B3-948B-1728B52AA6E4}">
-                <adec:decorative xmlns="" xmlns:adec="http://schemas.microsoft.com/office/drawing/2017/decorative" val="1"/>
+                <adec:decorative xmlns:adec="http://schemas.microsoft.com/office/drawing/2017/decorative" val="1"/>
               </a:ext>
             </a:extLst>
           </p:cNvPr>
@@ -2891,10 +2894,10 @@
           <p:cNvPr id="13" name="Freeform 9">
             <a:extLst>
               <a:ext uri="{FF2B5EF4-FFF2-40B4-BE49-F238E27FC236}">
-                <a16:creationId xmlns="" xmlns:a16="http://schemas.microsoft.com/office/drawing/2014/main" id="{111AEF3F-9A86-45CE-4817-E3E6863DC09A}"/>
+                <a16:creationId xmlns:a16="http://schemas.microsoft.com/office/drawing/2014/main" id="{111AEF3F-9A86-45CE-4817-E3E6863DC09A}"/>
               </a:ext>
               <a:ext uri="{C183D7F6-B498-43B3-948B-1728B52AA6E4}">
-                <adec:decorative xmlns="" xmlns:adec="http://schemas.microsoft.com/office/drawing/2017/decorative" val="1"/>
+                <adec:decorative xmlns:adec="http://schemas.microsoft.com/office/drawing/2017/decorative" val="1"/>
               </a:ext>
             </a:extLst>
           </p:cNvPr>
@@ -3011,7 +3014,7 @@
           <p:cNvPr id="2" name="Title 1">
             <a:extLst>
               <a:ext uri="{FF2B5EF4-FFF2-40B4-BE49-F238E27FC236}">
-                <a16:creationId xmlns="" xmlns:a16="http://schemas.microsoft.com/office/drawing/2014/main" id="{0C40C44A-93E6-6C58-5E88-AFDC594EC27A}"/>
+                <a16:creationId xmlns:a16="http://schemas.microsoft.com/office/drawing/2014/main" id="{0C40C44A-93E6-6C58-5E88-AFDC594EC27A}"/>
               </a:ext>
             </a:extLst>
           </p:cNvPr>
@@ -3045,7 +3048,7 @@
           <p:cNvPr id="9" name="Content Placeholder 2">
             <a:extLst>
               <a:ext uri="{FF2B5EF4-FFF2-40B4-BE49-F238E27FC236}">
-                <a16:creationId xmlns="" xmlns:a16="http://schemas.microsoft.com/office/drawing/2014/main" id="{F5A792C8-BB21-CDAF-668C-C1EFF45540C6}"/>
+                <a16:creationId xmlns:a16="http://schemas.microsoft.com/office/drawing/2014/main" id="{F5A792C8-BB21-CDAF-668C-C1EFF45540C6}"/>
               </a:ext>
             </a:extLst>
           </p:cNvPr>
@@ -3163,7 +3166,7 @@
           <p:cNvPr id="4" name="Content Placeholder 3">
             <a:extLst>
               <a:ext uri="{FF2B5EF4-FFF2-40B4-BE49-F238E27FC236}">
-                <a16:creationId xmlns="" xmlns:a16="http://schemas.microsoft.com/office/drawing/2014/main" id="{72DFB03A-367B-9ADA-8071-E22871EC115F}"/>
+                <a16:creationId xmlns:a16="http://schemas.microsoft.com/office/drawing/2014/main" id="{72DFB03A-367B-9ADA-8071-E22871EC115F}"/>
               </a:ext>
             </a:extLst>
           </p:cNvPr>
@@ -3294,7 +3297,7 @@
           <p:cNvPr id="5" name="Date Placeholder 4">
             <a:extLst>
               <a:ext uri="{FF2B5EF4-FFF2-40B4-BE49-F238E27FC236}">
-                <a16:creationId xmlns="" xmlns:a16="http://schemas.microsoft.com/office/drawing/2014/main" id="{C6CFCEB5-4092-FD13-478E-51CD74FDB82E}"/>
+                <a16:creationId xmlns:a16="http://schemas.microsoft.com/office/drawing/2014/main" id="{C6CFCEB5-4092-FD13-478E-51CD74FDB82E}"/>
               </a:ext>
             </a:extLst>
           </p:cNvPr>
@@ -3312,7 +3315,7 @@
           <a:p>
             <a:fld id="{D6D8061D-18C3-4F4F-85EF-561633F58754}" type="datetimeFigureOut">
               <a:rPr lang="en-US" smtClean="0"/>
-              <a:t>09/08/2026</a:t>
+              <a:t>8/12/2026</a:t>
             </a:fld>
             <a:endParaRPr lang="en-US" dirty="0"/>
           </a:p>
@@ -3323,7 +3326,7 @@
           <p:cNvPr id="6" name="Footer Placeholder 5">
             <a:extLst>
               <a:ext uri="{FF2B5EF4-FFF2-40B4-BE49-F238E27FC236}">
-                <a16:creationId xmlns="" xmlns:a16="http://schemas.microsoft.com/office/drawing/2014/main" id="{5D077A4D-E7C0-912D-293F-D93F0CB5CA49}"/>
+                <a16:creationId xmlns:a16="http://schemas.microsoft.com/office/drawing/2014/main" id="{5D077A4D-E7C0-912D-293F-D93F0CB5CA49}"/>
               </a:ext>
             </a:extLst>
           </p:cNvPr>
@@ -3348,7 +3351,7 @@
           <p:cNvPr id="7" name="Slide Number Placeholder 6">
             <a:extLst>
               <a:ext uri="{FF2B5EF4-FFF2-40B4-BE49-F238E27FC236}">
-                <a16:creationId xmlns="" xmlns:a16="http://schemas.microsoft.com/office/drawing/2014/main" id="{CA6AA9E1-334B-5F8F-8A92-67DD095F7838}"/>
+                <a16:creationId xmlns:a16="http://schemas.microsoft.com/office/drawing/2014/main" id="{CA6AA9E1-334B-5F8F-8A92-67DD095F7838}"/>
               </a:ext>
             </a:extLst>
           </p:cNvPr>
@@ -3407,7 +3410,7 @@
           <p:cNvPr id="2" name="Title 1">
             <a:extLst>
               <a:ext uri="{FF2B5EF4-FFF2-40B4-BE49-F238E27FC236}">
-                <a16:creationId xmlns="" xmlns:a16="http://schemas.microsoft.com/office/drawing/2014/main" id="{F657BD59-35CC-9BB3-8621-6FA3356F81AA}"/>
+                <a16:creationId xmlns:a16="http://schemas.microsoft.com/office/drawing/2014/main" id="{F657BD59-35CC-9BB3-8621-6FA3356F81AA}"/>
               </a:ext>
             </a:extLst>
           </p:cNvPr>
@@ -3437,7 +3440,7 @@
           <p:cNvPr id="4" name="Date Placeholder 3">
             <a:extLst>
               <a:ext uri="{FF2B5EF4-FFF2-40B4-BE49-F238E27FC236}">
-                <a16:creationId xmlns="" xmlns:a16="http://schemas.microsoft.com/office/drawing/2014/main" id="{8C56EB0F-63C8-5F75-A333-3413A9DC6F76}"/>
+                <a16:creationId xmlns:a16="http://schemas.microsoft.com/office/drawing/2014/main" id="{8C56EB0F-63C8-5F75-A333-3413A9DC6F76}"/>
               </a:ext>
             </a:extLst>
           </p:cNvPr>
@@ -3455,7 +3458,7 @@
           <a:p>
             <a:fld id="{D6D8061D-18C3-4F4F-85EF-561633F58754}" type="datetimeFigureOut">
               <a:rPr lang="en-US" smtClean="0"/>
-              <a:t>09/08/2026</a:t>
+              <a:t>8/12/2026</a:t>
             </a:fld>
             <a:endParaRPr lang="en-US" dirty="0"/>
           </a:p>
@@ -3466,7 +3469,7 @@
           <p:cNvPr id="5" name="Footer Placeholder 4">
             <a:extLst>
               <a:ext uri="{FF2B5EF4-FFF2-40B4-BE49-F238E27FC236}">
-                <a16:creationId xmlns="" xmlns:a16="http://schemas.microsoft.com/office/drawing/2014/main" id="{4D4DE333-25B4-E092-1CC4-C3D20BA25168}"/>
+                <a16:creationId xmlns:a16="http://schemas.microsoft.com/office/drawing/2014/main" id="{4D4DE333-25B4-E092-1CC4-C3D20BA25168}"/>
               </a:ext>
             </a:extLst>
           </p:cNvPr>
@@ -3491,7 +3494,7 @@
           <p:cNvPr id="6" name="Slide Number Placeholder 5">
             <a:extLst>
               <a:ext uri="{FF2B5EF4-FFF2-40B4-BE49-F238E27FC236}">
-                <a16:creationId xmlns="" xmlns:a16="http://schemas.microsoft.com/office/drawing/2014/main" id="{8F1AF200-E81F-A326-0EDB-4B93C71D9BF4}"/>
+                <a16:creationId xmlns:a16="http://schemas.microsoft.com/office/drawing/2014/main" id="{8F1AF200-E81F-A326-0EDB-4B93C71D9BF4}"/>
               </a:ext>
             </a:extLst>
           </p:cNvPr>
@@ -3520,7 +3523,7 @@
           <p:cNvPr id="8" name="Table Placeholder 7">
             <a:extLst>
               <a:ext uri="{FF2B5EF4-FFF2-40B4-BE49-F238E27FC236}">
-                <a16:creationId xmlns="" xmlns:a16="http://schemas.microsoft.com/office/drawing/2014/main" id="{0CEAFE70-86D3-8690-31CA-F9A1FBA494D0}"/>
+                <a16:creationId xmlns:a16="http://schemas.microsoft.com/office/drawing/2014/main" id="{0CEAFE70-86D3-8690-31CA-F9A1FBA494D0}"/>
               </a:ext>
             </a:extLst>
           </p:cNvPr>
@@ -3589,10 +3592,10 @@
           <p:cNvPr id="7" name="Group 6">
             <a:extLst>
               <a:ext uri="{FF2B5EF4-FFF2-40B4-BE49-F238E27FC236}">
-                <a16:creationId xmlns="" xmlns:a16="http://schemas.microsoft.com/office/drawing/2014/main" id="{D7B7232D-F1A6-B6C3-3BBF-E834CC7CDC8E}"/>
+                <a16:creationId xmlns:a16="http://schemas.microsoft.com/office/drawing/2014/main" id="{D7B7232D-F1A6-B6C3-3BBF-E834CC7CDC8E}"/>
               </a:ext>
               <a:ext uri="{C183D7F6-B498-43B3-948B-1728B52AA6E4}">
-                <adec:decorative xmlns="" xmlns:adec="http://schemas.microsoft.com/office/drawing/2017/decorative" val="1"/>
+                <adec:decorative xmlns:adec="http://schemas.microsoft.com/office/drawing/2017/decorative" val="1"/>
               </a:ext>
             </a:extLst>
           </p:cNvPr>
@@ -3612,7 +3615,7 @@
             <p:cNvPr id="8" name="Oval 7">
               <a:extLst>
                 <a:ext uri="{FF2B5EF4-FFF2-40B4-BE49-F238E27FC236}">
-                  <a16:creationId xmlns="" xmlns:a16="http://schemas.microsoft.com/office/drawing/2014/main" id="{0D306340-6BFD-FE3D-535B-B59C1C44EDDA}"/>
+                  <a16:creationId xmlns:a16="http://schemas.microsoft.com/office/drawing/2014/main" id="{0D306340-6BFD-FE3D-535B-B59C1C44EDDA}"/>
                 </a:ext>
               </a:extLst>
             </p:cNvPr>
@@ -3693,7 +3696,7 @@
             <p:cNvPr id="9" name="Freeform: Shape 11">
               <a:extLst>
                 <a:ext uri="{FF2B5EF4-FFF2-40B4-BE49-F238E27FC236}">
-                  <a16:creationId xmlns="" xmlns:a16="http://schemas.microsoft.com/office/drawing/2014/main" id="{338E6C4B-ABF3-8B7E-8DCF-A93F69C712B1}"/>
+                  <a16:creationId xmlns:a16="http://schemas.microsoft.com/office/drawing/2014/main" id="{338E6C4B-ABF3-8B7E-8DCF-A93F69C712B1}"/>
                 </a:ext>
               </a:extLst>
             </p:cNvPr>
@@ -3831,7 +3834,7 @@
             <p:cNvPr id="10" name="Freeform: Shape 13">
               <a:extLst>
                 <a:ext uri="{FF2B5EF4-FFF2-40B4-BE49-F238E27FC236}">
-                  <a16:creationId xmlns="" xmlns:a16="http://schemas.microsoft.com/office/drawing/2014/main" id="{6F90F99F-B12A-E8F9-5A86-D76B201D6308}"/>
+                  <a16:creationId xmlns:a16="http://schemas.microsoft.com/office/drawing/2014/main" id="{6F90F99F-B12A-E8F9-5A86-D76B201D6308}"/>
                 </a:ext>
               </a:extLst>
             </p:cNvPr>
@@ -3977,7 +3980,7 @@
             <p:cNvPr id="11" name="Freeform: Shape 15">
               <a:extLst>
                 <a:ext uri="{FF2B5EF4-FFF2-40B4-BE49-F238E27FC236}">
-                  <a16:creationId xmlns="" xmlns:a16="http://schemas.microsoft.com/office/drawing/2014/main" id="{BFA99EFE-81BC-95EA-FA61-B7199AD98A74}"/>
+                  <a16:creationId xmlns:a16="http://schemas.microsoft.com/office/drawing/2014/main" id="{BFA99EFE-81BC-95EA-FA61-B7199AD98A74}"/>
                 </a:ext>
               </a:extLst>
             </p:cNvPr>
@@ -4115,7 +4118,7 @@
             <p:cNvPr id="12" name="Freeform: Shape 17">
               <a:extLst>
                 <a:ext uri="{FF2B5EF4-FFF2-40B4-BE49-F238E27FC236}">
-                  <a16:creationId xmlns="" xmlns:a16="http://schemas.microsoft.com/office/drawing/2014/main" id="{DD9FC028-D877-28FE-C646-DBD85D932641}"/>
+                  <a16:creationId xmlns:a16="http://schemas.microsoft.com/office/drawing/2014/main" id="{DD9FC028-D877-28FE-C646-DBD85D932641}"/>
                 </a:ext>
               </a:extLst>
             </p:cNvPr>
@@ -4259,7 +4262,7 @@
             <p:cNvPr id="13" name="Freeform: Shape 21">
               <a:extLst>
                 <a:ext uri="{FF2B5EF4-FFF2-40B4-BE49-F238E27FC236}">
-                  <a16:creationId xmlns="" xmlns:a16="http://schemas.microsoft.com/office/drawing/2014/main" id="{AA0AFFE9-F0C2-BDA0-BF87-9977706AB6A8}"/>
+                  <a16:creationId xmlns:a16="http://schemas.microsoft.com/office/drawing/2014/main" id="{AA0AFFE9-F0C2-BDA0-BF87-9977706AB6A8}"/>
                 </a:ext>
               </a:extLst>
             </p:cNvPr>
@@ -4406,7 +4409,7 @@
           <p:cNvPr id="2" name="Title 1">
             <a:extLst>
               <a:ext uri="{FF2B5EF4-FFF2-40B4-BE49-F238E27FC236}">
-                <a16:creationId xmlns="" xmlns:a16="http://schemas.microsoft.com/office/drawing/2014/main" id="{F657BD59-35CC-9BB3-8621-6FA3356F81AA}"/>
+                <a16:creationId xmlns:a16="http://schemas.microsoft.com/office/drawing/2014/main" id="{F657BD59-35CC-9BB3-8621-6FA3356F81AA}"/>
               </a:ext>
             </a:extLst>
           </p:cNvPr>
@@ -4446,7 +4449,7 @@
           <p:cNvPr id="3" name="Content Placeholder 2">
             <a:extLst>
               <a:ext uri="{FF2B5EF4-FFF2-40B4-BE49-F238E27FC236}">
-                <a16:creationId xmlns="" xmlns:a16="http://schemas.microsoft.com/office/drawing/2014/main" id="{A772710C-A212-1B12-06CD-FA2A14F89D68}"/>
+                <a16:creationId xmlns:a16="http://schemas.microsoft.com/office/drawing/2014/main" id="{A772710C-A212-1B12-06CD-FA2A14F89D68}"/>
               </a:ext>
             </a:extLst>
           </p:cNvPr>
@@ -4577,7 +4580,7 @@
           <p:cNvPr id="4" name="Date Placeholder 3">
             <a:extLst>
               <a:ext uri="{FF2B5EF4-FFF2-40B4-BE49-F238E27FC236}">
-                <a16:creationId xmlns="" xmlns:a16="http://schemas.microsoft.com/office/drawing/2014/main" id="{8C56EB0F-63C8-5F75-A333-3413A9DC6F76}"/>
+                <a16:creationId xmlns:a16="http://schemas.microsoft.com/office/drawing/2014/main" id="{8C56EB0F-63C8-5F75-A333-3413A9DC6F76}"/>
               </a:ext>
             </a:extLst>
           </p:cNvPr>
@@ -4595,7 +4598,7 @@
           <a:p>
             <a:fld id="{D6D8061D-18C3-4F4F-85EF-561633F58754}" type="datetimeFigureOut">
               <a:rPr lang="en-US" smtClean="0"/>
-              <a:t>09/08/2026</a:t>
+              <a:t>8/12/2026</a:t>
             </a:fld>
             <a:endParaRPr lang="en-US" dirty="0"/>
           </a:p>
@@ -4606,7 +4609,7 @@
           <p:cNvPr id="5" name="Footer Placeholder 4">
             <a:extLst>
               <a:ext uri="{FF2B5EF4-FFF2-40B4-BE49-F238E27FC236}">
-                <a16:creationId xmlns="" xmlns:a16="http://schemas.microsoft.com/office/drawing/2014/main" id="{4D4DE333-25B4-E092-1CC4-C3D20BA25168}"/>
+                <a16:creationId xmlns:a16="http://schemas.microsoft.com/office/drawing/2014/main" id="{4D4DE333-25B4-E092-1CC4-C3D20BA25168}"/>
               </a:ext>
             </a:extLst>
           </p:cNvPr>
@@ -4631,7 +4634,7 @@
           <p:cNvPr id="6" name="Slide Number Placeholder 5">
             <a:extLst>
               <a:ext uri="{FF2B5EF4-FFF2-40B4-BE49-F238E27FC236}">
-                <a16:creationId xmlns="" xmlns:a16="http://schemas.microsoft.com/office/drawing/2014/main" id="{8F1AF200-E81F-A326-0EDB-4B93C71D9BF4}"/>
+                <a16:creationId xmlns:a16="http://schemas.microsoft.com/office/drawing/2014/main" id="{8F1AF200-E81F-A326-0EDB-4B93C71D9BF4}"/>
               </a:ext>
             </a:extLst>
           </p:cNvPr>
@@ -4690,10 +4693,10 @@
           <p:cNvPr id="7" name="Group 6">
             <a:extLst>
               <a:ext uri="{FF2B5EF4-FFF2-40B4-BE49-F238E27FC236}">
-                <a16:creationId xmlns="" xmlns:a16="http://schemas.microsoft.com/office/drawing/2014/main" id="{3E96D25F-53A2-6217-84B4-7EB874F0B372}"/>
+                <a16:creationId xmlns:a16="http://schemas.microsoft.com/office/drawing/2014/main" id="{3E96D25F-53A2-6217-84B4-7EB874F0B372}"/>
               </a:ext>
               <a:ext uri="{C183D7F6-B498-43B3-948B-1728B52AA6E4}">
-                <adec:decorative xmlns="" xmlns:adec="http://schemas.microsoft.com/office/drawing/2017/decorative" val="1"/>
+                <adec:decorative xmlns:adec="http://schemas.microsoft.com/office/drawing/2017/decorative" val="1"/>
               </a:ext>
             </a:extLst>
           </p:cNvPr>
@@ -4713,7 +4716,7 @@
             <p:cNvPr id="8" name="Oval 7">
               <a:extLst>
                 <a:ext uri="{FF2B5EF4-FFF2-40B4-BE49-F238E27FC236}">
-                  <a16:creationId xmlns="" xmlns:a16="http://schemas.microsoft.com/office/drawing/2014/main" id="{A50FA62D-C8AE-52B8-1712-6116756D1A83}"/>
+                  <a16:creationId xmlns:a16="http://schemas.microsoft.com/office/drawing/2014/main" id="{A50FA62D-C8AE-52B8-1712-6116756D1A83}"/>
                 </a:ext>
               </a:extLst>
             </p:cNvPr>
@@ -4794,7 +4797,7 @@
             <p:cNvPr id="9" name="Arc 8">
               <a:extLst>
                 <a:ext uri="{FF2B5EF4-FFF2-40B4-BE49-F238E27FC236}">
-                  <a16:creationId xmlns="" xmlns:a16="http://schemas.microsoft.com/office/drawing/2014/main" id="{1D2D6A01-57CF-3C0B-968C-E5A8FD352320}"/>
+                  <a16:creationId xmlns:a16="http://schemas.microsoft.com/office/drawing/2014/main" id="{1D2D6A01-57CF-3C0B-968C-E5A8FD352320}"/>
                 </a:ext>
               </a:extLst>
             </p:cNvPr>
@@ -4877,7 +4880,7 @@
             <p:cNvPr id="10" name="Oval 9">
               <a:extLst>
                 <a:ext uri="{FF2B5EF4-FFF2-40B4-BE49-F238E27FC236}">
-                  <a16:creationId xmlns="" xmlns:a16="http://schemas.microsoft.com/office/drawing/2014/main" id="{410BEFAA-C349-7DB1-1827-0FA48A430AD8}"/>
+                  <a16:creationId xmlns:a16="http://schemas.microsoft.com/office/drawing/2014/main" id="{410BEFAA-C349-7DB1-1827-0FA48A430AD8}"/>
                 </a:ext>
               </a:extLst>
             </p:cNvPr>
@@ -4959,7 +4962,7 @@
           <p:cNvPr id="2" name="Title 1">
             <a:extLst>
               <a:ext uri="{FF2B5EF4-FFF2-40B4-BE49-F238E27FC236}">
-                <a16:creationId xmlns="" xmlns:a16="http://schemas.microsoft.com/office/drawing/2014/main" id="{F657BD59-35CC-9BB3-8621-6FA3356F81AA}"/>
+                <a16:creationId xmlns:a16="http://schemas.microsoft.com/office/drawing/2014/main" id="{F657BD59-35CC-9BB3-8621-6FA3356F81AA}"/>
               </a:ext>
             </a:extLst>
           </p:cNvPr>
@@ -5002,7 +5005,7 @@
           <p:cNvPr id="3" name="Content Placeholder 2">
             <a:extLst>
               <a:ext uri="{FF2B5EF4-FFF2-40B4-BE49-F238E27FC236}">
-                <a16:creationId xmlns="" xmlns:a16="http://schemas.microsoft.com/office/drawing/2014/main" id="{A772710C-A212-1B12-06CD-FA2A14F89D68}"/>
+                <a16:creationId xmlns:a16="http://schemas.microsoft.com/office/drawing/2014/main" id="{A772710C-A212-1B12-06CD-FA2A14F89D68}"/>
               </a:ext>
             </a:extLst>
           </p:cNvPr>
@@ -5171,7 +5174,7 @@
           <p:cNvPr id="2" name="Picture Placeholder 1">
             <a:extLst>
               <a:ext uri="{FF2B5EF4-FFF2-40B4-BE49-F238E27FC236}">
-                <a16:creationId xmlns="" xmlns:a16="http://schemas.microsoft.com/office/drawing/2014/main" id="{9EF93C3C-09E9-6CD0-EF4B-6DE09539EE7A}"/>
+                <a16:creationId xmlns:a16="http://schemas.microsoft.com/office/drawing/2014/main" id="{9EF93C3C-09E9-6CD0-EF4B-6DE09539EE7A}"/>
               </a:ext>
             </a:extLst>
           </p:cNvPr>
@@ -5386,10 +5389,10 @@
           <p:cNvPr id="3" name="Arc 2">
             <a:extLst>
               <a:ext uri="{FF2B5EF4-FFF2-40B4-BE49-F238E27FC236}">
-                <a16:creationId xmlns="" xmlns:a16="http://schemas.microsoft.com/office/drawing/2014/main" id="{D5C3C4BD-DFDB-76B4-17CA-7DA4D1729FA1}"/>
+                <a16:creationId xmlns:a16="http://schemas.microsoft.com/office/drawing/2014/main" id="{D5C3C4BD-DFDB-76B4-17CA-7DA4D1729FA1}"/>
               </a:ext>
               <a:ext uri="{C183D7F6-B498-43B3-948B-1728B52AA6E4}">
-                <adec:decorative xmlns="" xmlns:adec="http://schemas.microsoft.com/office/drawing/2017/decorative" val="1"/>
+                <adec:decorative xmlns:adec="http://schemas.microsoft.com/office/drawing/2017/decorative" val="1"/>
               </a:ext>
             </a:extLst>
           </p:cNvPr>
@@ -5473,7 +5476,7 @@
           <p:cNvPr id="12" name="Title 11">
             <a:extLst>
               <a:ext uri="{FF2B5EF4-FFF2-40B4-BE49-F238E27FC236}">
-                <a16:creationId xmlns="" xmlns:a16="http://schemas.microsoft.com/office/drawing/2014/main" id="{2B04B61C-6467-D51D-0AF4-5C7D05F36CB5}"/>
+                <a16:creationId xmlns:a16="http://schemas.microsoft.com/office/drawing/2014/main" id="{2B04B61C-6467-D51D-0AF4-5C7D05F36CB5}"/>
               </a:ext>
             </a:extLst>
           </p:cNvPr>
@@ -5516,10 +5519,10 @@
           <p:cNvPr id="4" name="Freeform: Shape 3">
             <a:extLst>
               <a:ext uri="{FF2B5EF4-FFF2-40B4-BE49-F238E27FC236}">
-                <a16:creationId xmlns="" xmlns:a16="http://schemas.microsoft.com/office/drawing/2014/main" id="{47A19F4B-D154-3EB2-F86A-9A63283A3EA6}"/>
+                <a16:creationId xmlns:a16="http://schemas.microsoft.com/office/drawing/2014/main" id="{47A19F4B-D154-3EB2-F86A-9A63283A3EA6}"/>
               </a:ext>
               <a:ext uri="{C183D7F6-B498-43B3-948B-1728B52AA6E4}">
-                <adec:decorative xmlns="" xmlns:adec="http://schemas.microsoft.com/office/drawing/2017/decorative" val="1"/>
+                <adec:decorative xmlns:adec="http://schemas.microsoft.com/office/drawing/2017/decorative" val="1"/>
               </a:ext>
             </a:extLst>
           </p:cNvPr>
@@ -5725,7 +5728,7 @@
           <p:cNvPr id="2" name="Title 1">
             <a:extLst>
               <a:ext uri="{FF2B5EF4-FFF2-40B4-BE49-F238E27FC236}">
-                <a16:creationId xmlns="" xmlns:a16="http://schemas.microsoft.com/office/drawing/2014/main" id="{F657BD59-35CC-9BB3-8621-6FA3356F81AA}"/>
+                <a16:creationId xmlns:a16="http://schemas.microsoft.com/office/drawing/2014/main" id="{F657BD59-35CC-9BB3-8621-6FA3356F81AA}"/>
               </a:ext>
             </a:extLst>
           </p:cNvPr>
@@ -5760,7 +5763,7 @@
           <p:cNvPr id="13" name="Content Placeholder 12">
             <a:extLst>
               <a:ext uri="{FF2B5EF4-FFF2-40B4-BE49-F238E27FC236}">
-                <a16:creationId xmlns="" xmlns:a16="http://schemas.microsoft.com/office/drawing/2014/main" id="{E3FB7D8D-37C3-E089-EC02-FB49A13CBE1D}"/>
+                <a16:creationId xmlns:a16="http://schemas.microsoft.com/office/drawing/2014/main" id="{E3FB7D8D-37C3-E089-EC02-FB49A13CBE1D}"/>
               </a:ext>
             </a:extLst>
           </p:cNvPr>
@@ -5900,7 +5903,7 @@
           <p:cNvPr id="4" name="Date Placeholder 3">
             <a:extLst>
               <a:ext uri="{FF2B5EF4-FFF2-40B4-BE49-F238E27FC236}">
-                <a16:creationId xmlns="" xmlns:a16="http://schemas.microsoft.com/office/drawing/2014/main" id="{8C56EB0F-63C8-5F75-A333-3413A9DC6F76}"/>
+                <a16:creationId xmlns:a16="http://schemas.microsoft.com/office/drawing/2014/main" id="{8C56EB0F-63C8-5F75-A333-3413A9DC6F76}"/>
               </a:ext>
             </a:extLst>
           </p:cNvPr>
@@ -5918,7 +5921,7 @@
           <a:p>
             <a:fld id="{D6D8061D-18C3-4F4F-85EF-561633F58754}" type="datetimeFigureOut">
               <a:rPr lang="en-US" smtClean="0"/>
-              <a:t>09/08/2026</a:t>
+              <a:t>8/12/2026</a:t>
             </a:fld>
             <a:endParaRPr lang="en-US" dirty="0"/>
           </a:p>
@@ -5929,7 +5932,7 @@
           <p:cNvPr id="5" name="Footer Placeholder 4">
             <a:extLst>
               <a:ext uri="{FF2B5EF4-FFF2-40B4-BE49-F238E27FC236}">
-                <a16:creationId xmlns="" xmlns:a16="http://schemas.microsoft.com/office/drawing/2014/main" id="{4D4DE333-25B4-E092-1CC4-C3D20BA25168}"/>
+                <a16:creationId xmlns:a16="http://schemas.microsoft.com/office/drawing/2014/main" id="{4D4DE333-25B4-E092-1CC4-C3D20BA25168}"/>
               </a:ext>
             </a:extLst>
           </p:cNvPr>
@@ -5954,7 +5957,7 @@
           <p:cNvPr id="6" name="Slide Number Placeholder 5">
             <a:extLst>
               <a:ext uri="{FF2B5EF4-FFF2-40B4-BE49-F238E27FC236}">
-                <a16:creationId xmlns="" xmlns:a16="http://schemas.microsoft.com/office/drawing/2014/main" id="{8F1AF200-E81F-A326-0EDB-4B93C71D9BF4}"/>
+                <a16:creationId xmlns:a16="http://schemas.microsoft.com/office/drawing/2014/main" id="{8F1AF200-E81F-A326-0EDB-4B93C71D9BF4}"/>
               </a:ext>
             </a:extLst>
           </p:cNvPr>
@@ -5983,10 +5986,10 @@
           <p:cNvPr id="7" name="Freeform: Shape 14">
             <a:extLst>
               <a:ext uri="{FF2B5EF4-FFF2-40B4-BE49-F238E27FC236}">
-                <a16:creationId xmlns="" xmlns:a16="http://schemas.microsoft.com/office/drawing/2014/main" id="{438B6FA2-AF11-618E-2B1A-38BF083DF340}"/>
+                <a16:creationId xmlns:a16="http://schemas.microsoft.com/office/drawing/2014/main" id="{438B6FA2-AF11-618E-2B1A-38BF083DF340}"/>
               </a:ext>
               <a:ext uri="{C183D7F6-B498-43B3-948B-1728B52AA6E4}">
-                <adec:decorative xmlns="" xmlns:adec="http://schemas.microsoft.com/office/drawing/2017/decorative" val="1"/>
+                <adec:decorative xmlns:adec="http://schemas.microsoft.com/office/drawing/2017/decorative" val="1"/>
               </a:ext>
             </a:extLst>
           </p:cNvPr>
@@ -6132,10 +6135,10 @@
           <p:cNvPr id="8" name="Freeform: Shape 13">
             <a:extLst>
               <a:ext uri="{FF2B5EF4-FFF2-40B4-BE49-F238E27FC236}">
-                <a16:creationId xmlns="" xmlns:a16="http://schemas.microsoft.com/office/drawing/2014/main" id="{A269A8D8-A4AE-CEFF-E928-7DB1CFB3E401}"/>
+                <a16:creationId xmlns:a16="http://schemas.microsoft.com/office/drawing/2014/main" id="{A269A8D8-A4AE-CEFF-E928-7DB1CFB3E401}"/>
               </a:ext>
               <a:ext uri="{C183D7F6-B498-43B3-948B-1728B52AA6E4}">
-                <adec:decorative xmlns="" xmlns:adec="http://schemas.microsoft.com/office/drawing/2017/decorative" val="1"/>
+                <adec:decorative xmlns:adec="http://schemas.microsoft.com/office/drawing/2017/decorative" val="1"/>
               </a:ext>
             </a:extLst>
           </p:cNvPr>
@@ -6273,10 +6276,10 @@
           <p:cNvPr id="11" name="Freeform: Shape 19">
             <a:extLst>
               <a:ext uri="{FF2B5EF4-FFF2-40B4-BE49-F238E27FC236}">
-                <a16:creationId xmlns="" xmlns:a16="http://schemas.microsoft.com/office/drawing/2014/main" id="{15418837-E689-97BE-9FAD-FEDBD599EBAD}"/>
+                <a16:creationId xmlns:a16="http://schemas.microsoft.com/office/drawing/2014/main" id="{15418837-E689-97BE-9FAD-FEDBD599EBAD}"/>
               </a:ext>
               <a:ext uri="{C183D7F6-B498-43B3-948B-1728B52AA6E4}">
-                <adec:decorative xmlns="" xmlns:adec="http://schemas.microsoft.com/office/drawing/2017/decorative" val="1"/>
+                <adec:decorative xmlns:adec="http://schemas.microsoft.com/office/drawing/2017/decorative" val="1"/>
               </a:ext>
             </a:extLst>
           </p:cNvPr>
@@ -6476,10 +6479,10 @@
           <p:cNvPr id="7" name="Oval 6">
             <a:extLst>
               <a:ext uri="{FF2B5EF4-FFF2-40B4-BE49-F238E27FC236}">
-                <a16:creationId xmlns="" xmlns:a16="http://schemas.microsoft.com/office/drawing/2014/main" id="{7DF76A42-387B-8D66-1214-D40462070066}"/>
+                <a16:creationId xmlns:a16="http://schemas.microsoft.com/office/drawing/2014/main" id="{7DF76A42-387B-8D66-1214-D40462070066}"/>
               </a:ext>
               <a:ext uri="{C183D7F6-B498-43B3-948B-1728B52AA6E4}">
-                <adec:decorative xmlns="" xmlns:adec="http://schemas.microsoft.com/office/drawing/2017/decorative" val="1"/>
+                <adec:decorative xmlns:adec="http://schemas.microsoft.com/office/drawing/2017/decorative" val="1"/>
               </a:ext>
             </a:extLst>
           </p:cNvPr>
@@ -6560,10 +6563,10 @@
           <p:cNvPr id="8" name="Group 7">
             <a:extLst>
               <a:ext uri="{FF2B5EF4-FFF2-40B4-BE49-F238E27FC236}">
-                <a16:creationId xmlns="" xmlns:a16="http://schemas.microsoft.com/office/drawing/2014/main" id="{D2ACE818-46EF-547E-9315-A849483036BF}"/>
+                <a16:creationId xmlns:a16="http://schemas.microsoft.com/office/drawing/2014/main" id="{D2ACE818-46EF-547E-9315-A849483036BF}"/>
               </a:ext>
               <a:ext uri="{C183D7F6-B498-43B3-948B-1728B52AA6E4}">
-                <adec:decorative xmlns="" xmlns:adec="http://schemas.microsoft.com/office/drawing/2017/decorative" val="1"/>
+                <adec:decorative xmlns:adec="http://schemas.microsoft.com/office/drawing/2017/decorative" val="1"/>
               </a:ext>
             </a:extLst>
           </p:cNvPr>
@@ -6583,7 +6586,7 @@
             <p:cNvPr id="9" name="Oval 8">
               <a:extLst>
                 <a:ext uri="{FF2B5EF4-FFF2-40B4-BE49-F238E27FC236}">
-                  <a16:creationId xmlns="" xmlns:a16="http://schemas.microsoft.com/office/drawing/2014/main" id="{E9644D21-8793-9A96-F305-5D20EE342B26}"/>
+                  <a16:creationId xmlns:a16="http://schemas.microsoft.com/office/drawing/2014/main" id="{E9644D21-8793-9A96-F305-5D20EE342B26}"/>
                 </a:ext>
               </a:extLst>
             </p:cNvPr>
@@ -6664,7 +6667,7 @@
             <p:cNvPr id="10" name="Arc 9">
               <a:extLst>
                 <a:ext uri="{FF2B5EF4-FFF2-40B4-BE49-F238E27FC236}">
-                  <a16:creationId xmlns="" xmlns:a16="http://schemas.microsoft.com/office/drawing/2014/main" id="{DF8D7AEF-C845-09F0-F31C-20B32BBA1EBA}"/>
+                  <a16:creationId xmlns:a16="http://schemas.microsoft.com/office/drawing/2014/main" id="{DF8D7AEF-C845-09F0-F31C-20B32BBA1EBA}"/>
                 </a:ext>
               </a:extLst>
             </p:cNvPr>
@@ -6748,7 +6751,7 @@
             <p:cNvPr id="11" name="Oval 10">
               <a:extLst>
                 <a:ext uri="{FF2B5EF4-FFF2-40B4-BE49-F238E27FC236}">
-                  <a16:creationId xmlns="" xmlns:a16="http://schemas.microsoft.com/office/drawing/2014/main" id="{5F9D44CB-887B-C74D-3E96-5607E84DAEFF}"/>
+                  <a16:creationId xmlns:a16="http://schemas.microsoft.com/office/drawing/2014/main" id="{5F9D44CB-887B-C74D-3E96-5607E84DAEFF}"/>
                 </a:ext>
               </a:extLst>
             </p:cNvPr>
@@ -6830,10 +6833,10 @@
           <p:cNvPr id="14" name="Freeform: Shape 19">
             <a:extLst>
               <a:ext uri="{FF2B5EF4-FFF2-40B4-BE49-F238E27FC236}">
-                <a16:creationId xmlns="" xmlns:a16="http://schemas.microsoft.com/office/drawing/2014/main" id="{87D193F4-2337-0048-1BE7-C9A8154191F9}"/>
+                <a16:creationId xmlns:a16="http://schemas.microsoft.com/office/drawing/2014/main" id="{87D193F4-2337-0048-1BE7-C9A8154191F9}"/>
               </a:ext>
               <a:ext uri="{C183D7F6-B498-43B3-948B-1728B52AA6E4}">
-                <adec:decorative xmlns="" xmlns:adec="http://schemas.microsoft.com/office/drawing/2017/decorative" val="1"/>
+                <adec:decorative xmlns:adec="http://schemas.microsoft.com/office/drawing/2017/decorative" val="1"/>
               </a:ext>
             </a:extLst>
           </p:cNvPr>
@@ -7003,10 +7006,10 @@
           <p:cNvPr id="15" name="Straight Connector 14">
             <a:extLst>
               <a:ext uri="{FF2B5EF4-FFF2-40B4-BE49-F238E27FC236}">
-                <a16:creationId xmlns="" xmlns:a16="http://schemas.microsoft.com/office/drawing/2014/main" id="{45EE4510-BCBA-C39A-BEF1-A391A3304F88}"/>
+                <a16:creationId xmlns:a16="http://schemas.microsoft.com/office/drawing/2014/main" id="{45EE4510-BCBA-C39A-BEF1-A391A3304F88}"/>
               </a:ext>
               <a:ext uri="{C183D7F6-B498-43B3-948B-1728B52AA6E4}">
-                <adec:decorative xmlns="" xmlns:adec="http://schemas.microsoft.com/office/drawing/2017/decorative" val="1"/>
+                <adec:decorative xmlns:adec="http://schemas.microsoft.com/office/drawing/2017/decorative" val="1"/>
               </a:ext>
             </a:extLst>
           </p:cNvPr>
@@ -7050,7 +7053,7 @@
           <p:cNvPr id="2" name="Title 1">
             <a:extLst>
               <a:ext uri="{FF2B5EF4-FFF2-40B4-BE49-F238E27FC236}">
-                <a16:creationId xmlns="" xmlns:a16="http://schemas.microsoft.com/office/drawing/2014/main" id="{32772C41-A024-2F33-1F04-21E003FA7291}"/>
+                <a16:creationId xmlns:a16="http://schemas.microsoft.com/office/drawing/2014/main" id="{32772C41-A024-2F33-1F04-21E003FA7291}"/>
               </a:ext>
             </a:extLst>
           </p:cNvPr>
@@ -7090,7 +7093,7 @@
           <p:cNvPr id="3" name="Subtitle 2">
             <a:extLst>
               <a:ext uri="{FF2B5EF4-FFF2-40B4-BE49-F238E27FC236}">
-                <a16:creationId xmlns="" xmlns:a16="http://schemas.microsoft.com/office/drawing/2014/main" id="{473BC2DF-9C2A-052C-AD2C-0A8ABAA50374}"/>
+                <a16:creationId xmlns:a16="http://schemas.microsoft.com/office/drawing/2014/main" id="{473BC2DF-9C2A-052C-AD2C-0A8ABAA50374}"/>
               </a:ext>
             </a:extLst>
           </p:cNvPr>
@@ -7166,7 +7169,7 @@
           <p:cNvPr id="4" name="Date Placeholder 3">
             <a:extLst>
               <a:ext uri="{FF2B5EF4-FFF2-40B4-BE49-F238E27FC236}">
-                <a16:creationId xmlns="" xmlns:a16="http://schemas.microsoft.com/office/drawing/2014/main" id="{C0070940-5919-2C95-2278-32E50BF14DD1}"/>
+                <a16:creationId xmlns:a16="http://schemas.microsoft.com/office/drawing/2014/main" id="{C0070940-5919-2C95-2278-32E50BF14DD1}"/>
               </a:ext>
             </a:extLst>
           </p:cNvPr>
@@ -7184,7 +7187,7 @@
           <a:p>
             <a:fld id="{D6D8061D-18C3-4F4F-85EF-561633F58754}" type="datetimeFigureOut">
               <a:rPr lang="en-US" smtClean="0"/>
-              <a:t>09/08/2026</a:t>
+              <a:t>8/12/2026</a:t>
             </a:fld>
             <a:endParaRPr lang="en-US" dirty="0"/>
           </a:p>
@@ -7195,7 +7198,7 @@
           <p:cNvPr id="5" name="Footer Placeholder 4">
             <a:extLst>
               <a:ext uri="{FF2B5EF4-FFF2-40B4-BE49-F238E27FC236}">
-                <a16:creationId xmlns="" xmlns:a16="http://schemas.microsoft.com/office/drawing/2014/main" id="{1957D599-49CF-19FE-6D86-C5EDB765F413}"/>
+                <a16:creationId xmlns:a16="http://schemas.microsoft.com/office/drawing/2014/main" id="{1957D599-49CF-19FE-6D86-C5EDB765F413}"/>
               </a:ext>
             </a:extLst>
           </p:cNvPr>
@@ -7220,7 +7223,7 @@
           <p:cNvPr id="6" name="Slide Number Placeholder 5">
             <a:extLst>
               <a:ext uri="{FF2B5EF4-FFF2-40B4-BE49-F238E27FC236}">
-                <a16:creationId xmlns="" xmlns:a16="http://schemas.microsoft.com/office/drawing/2014/main" id="{28931DF1-1C8D-86B9-BFDD-098FFC00FDC2}"/>
+                <a16:creationId xmlns:a16="http://schemas.microsoft.com/office/drawing/2014/main" id="{28931DF1-1C8D-86B9-BFDD-098FFC00FDC2}"/>
               </a:ext>
             </a:extLst>
           </p:cNvPr>
@@ -7279,7 +7282,7 @@
           <p:cNvPr id="2" name="Title 1">
             <a:extLst>
               <a:ext uri="{FF2B5EF4-FFF2-40B4-BE49-F238E27FC236}">
-                <a16:creationId xmlns="" xmlns:a16="http://schemas.microsoft.com/office/drawing/2014/main" id="{0C40C44A-93E6-6C58-5E88-AFDC594EC27A}"/>
+                <a16:creationId xmlns:a16="http://schemas.microsoft.com/office/drawing/2014/main" id="{0C40C44A-93E6-6C58-5E88-AFDC594EC27A}"/>
               </a:ext>
             </a:extLst>
           </p:cNvPr>
@@ -7313,7 +7316,7 @@
           <p:cNvPr id="3" name="Content Placeholder 2">
             <a:extLst>
               <a:ext uri="{FF2B5EF4-FFF2-40B4-BE49-F238E27FC236}">
-                <a16:creationId xmlns="" xmlns:a16="http://schemas.microsoft.com/office/drawing/2014/main" id="{0C813049-5F46-053E-6279-8183259649A6}"/>
+                <a16:creationId xmlns:a16="http://schemas.microsoft.com/office/drawing/2014/main" id="{0C813049-5F46-053E-6279-8183259649A6}"/>
               </a:ext>
             </a:extLst>
           </p:cNvPr>
@@ -7444,7 +7447,7 @@
           <p:cNvPr id="15" name="Content Placeholder 2">
             <a:extLst>
               <a:ext uri="{FF2B5EF4-FFF2-40B4-BE49-F238E27FC236}">
-                <a16:creationId xmlns="" xmlns:a16="http://schemas.microsoft.com/office/drawing/2014/main" id="{5FB01ADF-164A-96FB-0129-C2A0F0ED0A85}"/>
+                <a16:creationId xmlns:a16="http://schemas.microsoft.com/office/drawing/2014/main" id="{5FB01ADF-164A-96FB-0129-C2A0F0ED0A85}"/>
               </a:ext>
             </a:extLst>
           </p:cNvPr>
@@ -7575,10 +7578,10 @@
           <p:cNvPr id="11" name="Group 10">
             <a:extLst>
               <a:ext uri="{FF2B5EF4-FFF2-40B4-BE49-F238E27FC236}">
-                <a16:creationId xmlns="" xmlns:a16="http://schemas.microsoft.com/office/drawing/2014/main" id="{C263F0DD-A38B-64B8-7412-087B487E6D47}"/>
+                <a16:creationId xmlns:a16="http://schemas.microsoft.com/office/drawing/2014/main" id="{C263F0DD-A38B-64B8-7412-087B487E6D47}"/>
               </a:ext>
               <a:ext uri="{C183D7F6-B498-43B3-948B-1728B52AA6E4}">
-                <adec:decorative xmlns="" xmlns:adec="http://schemas.microsoft.com/office/drawing/2017/decorative" val="1"/>
+                <adec:decorative xmlns:adec="http://schemas.microsoft.com/office/drawing/2017/decorative" val="1"/>
               </a:ext>
             </a:extLst>
           </p:cNvPr>
@@ -7598,7 +7601,7 @@
             <p:cNvPr id="12" name="Freeform: Shape 9">
               <a:extLst>
                 <a:ext uri="{FF2B5EF4-FFF2-40B4-BE49-F238E27FC236}">
-                  <a16:creationId xmlns="" xmlns:a16="http://schemas.microsoft.com/office/drawing/2014/main" id="{44CE2FB7-A856-E3C3-9798-73AAFB7901B8}"/>
+                  <a16:creationId xmlns:a16="http://schemas.microsoft.com/office/drawing/2014/main" id="{44CE2FB7-A856-E3C3-9798-73AAFB7901B8}"/>
                 </a:ext>
               </a:extLst>
             </p:cNvPr>
@@ -7736,7 +7739,7 @@
             <p:cNvPr id="13" name="Freeform: Shape 10">
               <a:extLst>
                 <a:ext uri="{FF2B5EF4-FFF2-40B4-BE49-F238E27FC236}">
-                  <a16:creationId xmlns="" xmlns:a16="http://schemas.microsoft.com/office/drawing/2014/main" id="{47ED62E5-894A-A8F9-A6DC-4A5C147CDE78}"/>
+                  <a16:creationId xmlns:a16="http://schemas.microsoft.com/office/drawing/2014/main" id="{47ED62E5-894A-A8F9-A6DC-4A5C147CDE78}"/>
                 </a:ext>
               </a:extLst>
             </p:cNvPr>
@@ -8092,7 +8095,7 @@
             <p:cNvPr id="14" name="Freeform: Shape 11">
               <a:extLst>
                 <a:ext uri="{FF2B5EF4-FFF2-40B4-BE49-F238E27FC236}">
-                  <a16:creationId xmlns="" xmlns:a16="http://schemas.microsoft.com/office/drawing/2014/main" id="{5C181CD4-C69B-2826-AF23-060D677248A9}"/>
+                  <a16:creationId xmlns:a16="http://schemas.microsoft.com/office/drawing/2014/main" id="{5C181CD4-C69B-2826-AF23-060D677248A9}"/>
                 </a:ext>
               </a:extLst>
             </p:cNvPr>
@@ -8231,7 +8234,7 @@
           <p:cNvPr id="5" name="Date Placeholder 4">
             <a:extLst>
               <a:ext uri="{FF2B5EF4-FFF2-40B4-BE49-F238E27FC236}">
-                <a16:creationId xmlns="" xmlns:a16="http://schemas.microsoft.com/office/drawing/2014/main" id="{C6CFCEB5-4092-FD13-478E-51CD74FDB82E}"/>
+                <a16:creationId xmlns:a16="http://schemas.microsoft.com/office/drawing/2014/main" id="{C6CFCEB5-4092-FD13-478E-51CD74FDB82E}"/>
               </a:ext>
             </a:extLst>
           </p:cNvPr>
@@ -8249,7 +8252,7 @@
           <a:p>
             <a:fld id="{D6D8061D-18C3-4F4F-85EF-561633F58754}" type="datetimeFigureOut">
               <a:rPr lang="en-US" smtClean="0"/>
-              <a:t>09/08/2026</a:t>
+              <a:t>8/12/2026</a:t>
             </a:fld>
             <a:endParaRPr lang="en-US" dirty="0"/>
           </a:p>
@@ -8260,7 +8263,7 @@
           <p:cNvPr id="6" name="Footer Placeholder 5">
             <a:extLst>
               <a:ext uri="{FF2B5EF4-FFF2-40B4-BE49-F238E27FC236}">
-                <a16:creationId xmlns="" xmlns:a16="http://schemas.microsoft.com/office/drawing/2014/main" id="{5D077A4D-E7C0-912D-293F-D93F0CB5CA49}"/>
+                <a16:creationId xmlns:a16="http://schemas.microsoft.com/office/drawing/2014/main" id="{5D077A4D-E7C0-912D-293F-D93F0CB5CA49}"/>
               </a:ext>
             </a:extLst>
           </p:cNvPr>
@@ -8285,7 +8288,7 @@
           <p:cNvPr id="7" name="Slide Number Placeholder 6">
             <a:extLst>
               <a:ext uri="{FF2B5EF4-FFF2-40B4-BE49-F238E27FC236}">
-                <a16:creationId xmlns="" xmlns:a16="http://schemas.microsoft.com/office/drawing/2014/main" id="{CA6AA9E1-334B-5F8F-8A92-67DD095F7838}"/>
+                <a16:creationId xmlns:a16="http://schemas.microsoft.com/office/drawing/2014/main" id="{CA6AA9E1-334B-5F8F-8A92-67DD095F7838}"/>
               </a:ext>
             </a:extLst>
           </p:cNvPr>
@@ -8344,7 +8347,7 @@
           <p:cNvPr id="2" name="Title 1">
             <a:extLst>
               <a:ext uri="{FF2B5EF4-FFF2-40B4-BE49-F238E27FC236}">
-                <a16:creationId xmlns="" xmlns:a16="http://schemas.microsoft.com/office/drawing/2014/main" id="{0C40C44A-93E6-6C58-5E88-AFDC594EC27A}"/>
+                <a16:creationId xmlns:a16="http://schemas.microsoft.com/office/drawing/2014/main" id="{0C40C44A-93E6-6C58-5E88-AFDC594EC27A}"/>
               </a:ext>
             </a:extLst>
           </p:cNvPr>
@@ -8374,7 +8377,7 @@
           <p:cNvPr id="11" name="Content Placeholder 2">
             <a:extLst>
               <a:ext uri="{FF2B5EF4-FFF2-40B4-BE49-F238E27FC236}">
-                <a16:creationId xmlns="" xmlns:a16="http://schemas.microsoft.com/office/drawing/2014/main" id="{60538251-2B75-FA20-0F29-FB58583E6125}"/>
+                <a16:creationId xmlns:a16="http://schemas.microsoft.com/office/drawing/2014/main" id="{60538251-2B75-FA20-0F29-FB58583E6125}"/>
               </a:ext>
             </a:extLst>
           </p:cNvPr>
@@ -8509,7 +8512,7 @@
           <p:cNvPr id="12" name="Content Placeholder 2">
             <a:extLst>
               <a:ext uri="{FF2B5EF4-FFF2-40B4-BE49-F238E27FC236}">
-                <a16:creationId xmlns="" xmlns:a16="http://schemas.microsoft.com/office/drawing/2014/main" id="{A06C49DD-8C29-93EA-04F4-22F84080DF5C}"/>
+                <a16:creationId xmlns:a16="http://schemas.microsoft.com/office/drawing/2014/main" id="{A06C49DD-8C29-93EA-04F4-22F84080DF5C}"/>
               </a:ext>
             </a:extLst>
           </p:cNvPr>
@@ -8640,7 +8643,7 @@
           <p:cNvPr id="5" name="Date Placeholder 4">
             <a:extLst>
               <a:ext uri="{FF2B5EF4-FFF2-40B4-BE49-F238E27FC236}">
-                <a16:creationId xmlns="" xmlns:a16="http://schemas.microsoft.com/office/drawing/2014/main" id="{C6CFCEB5-4092-FD13-478E-51CD74FDB82E}"/>
+                <a16:creationId xmlns:a16="http://schemas.microsoft.com/office/drawing/2014/main" id="{C6CFCEB5-4092-FD13-478E-51CD74FDB82E}"/>
               </a:ext>
             </a:extLst>
           </p:cNvPr>
@@ -8658,7 +8661,7 @@
           <a:p>
             <a:fld id="{D6D8061D-18C3-4F4F-85EF-561633F58754}" type="datetimeFigureOut">
               <a:rPr lang="en-US" smtClean="0"/>
-              <a:t>09/08/2026</a:t>
+              <a:t>8/12/2026</a:t>
             </a:fld>
             <a:endParaRPr lang="en-US" dirty="0"/>
           </a:p>
@@ -8669,7 +8672,7 @@
           <p:cNvPr id="6" name="Footer Placeholder 5">
             <a:extLst>
               <a:ext uri="{FF2B5EF4-FFF2-40B4-BE49-F238E27FC236}">
-                <a16:creationId xmlns="" xmlns:a16="http://schemas.microsoft.com/office/drawing/2014/main" id="{5D077A4D-E7C0-912D-293F-D93F0CB5CA49}"/>
+                <a16:creationId xmlns:a16="http://schemas.microsoft.com/office/drawing/2014/main" id="{5D077A4D-E7C0-912D-293F-D93F0CB5CA49}"/>
               </a:ext>
             </a:extLst>
           </p:cNvPr>
@@ -8694,7 +8697,7 @@
           <p:cNvPr id="7" name="Slide Number Placeholder 6">
             <a:extLst>
               <a:ext uri="{FF2B5EF4-FFF2-40B4-BE49-F238E27FC236}">
-                <a16:creationId xmlns="" xmlns:a16="http://schemas.microsoft.com/office/drawing/2014/main" id="{CA6AA9E1-334B-5F8F-8A92-67DD095F7838}"/>
+                <a16:creationId xmlns:a16="http://schemas.microsoft.com/office/drawing/2014/main" id="{CA6AA9E1-334B-5F8F-8A92-67DD095F7838}"/>
               </a:ext>
             </a:extLst>
           </p:cNvPr>
@@ -8723,10 +8726,10 @@
           <p:cNvPr id="8" name="Freeform: Shape 11">
             <a:extLst>
               <a:ext uri="{FF2B5EF4-FFF2-40B4-BE49-F238E27FC236}">
-                <a16:creationId xmlns="" xmlns:a16="http://schemas.microsoft.com/office/drawing/2014/main" id="{1E75594D-82D2-74F6-56EC-46FCD28CBE68}"/>
+                <a16:creationId xmlns:a16="http://schemas.microsoft.com/office/drawing/2014/main" id="{1E75594D-82D2-74F6-56EC-46FCD28CBE68}"/>
               </a:ext>
               <a:ext uri="{C183D7F6-B498-43B3-948B-1728B52AA6E4}">
-                <adec:decorative xmlns="" xmlns:adec="http://schemas.microsoft.com/office/drawing/2017/decorative" val="1"/>
+                <adec:decorative xmlns:adec="http://schemas.microsoft.com/office/drawing/2017/decorative" val="1"/>
               </a:ext>
             </a:extLst>
           </p:cNvPr>
@@ -8864,10 +8867,10 @@
           <p:cNvPr id="9" name="Freeform: Shape 13">
             <a:extLst>
               <a:ext uri="{FF2B5EF4-FFF2-40B4-BE49-F238E27FC236}">
-                <a16:creationId xmlns="" xmlns:a16="http://schemas.microsoft.com/office/drawing/2014/main" id="{FF4E0F5B-0892-2688-EFD3-284369DA50CD}"/>
+                <a16:creationId xmlns:a16="http://schemas.microsoft.com/office/drawing/2014/main" id="{FF4E0F5B-0892-2688-EFD3-284369DA50CD}"/>
               </a:ext>
               <a:ext uri="{C183D7F6-B498-43B3-948B-1728B52AA6E4}">
-                <adec:decorative xmlns="" xmlns:adec="http://schemas.microsoft.com/office/drawing/2017/decorative" val="1"/>
+                <adec:decorative xmlns:adec="http://schemas.microsoft.com/office/drawing/2017/decorative" val="1"/>
               </a:ext>
             </a:extLst>
           </p:cNvPr>
@@ -9013,10 +9016,10 @@
           <p:cNvPr id="10" name="Straight Connector 9">
             <a:extLst>
               <a:ext uri="{FF2B5EF4-FFF2-40B4-BE49-F238E27FC236}">
-                <a16:creationId xmlns="" xmlns:a16="http://schemas.microsoft.com/office/drawing/2014/main" id="{71D8715A-3067-732D-C410-868C7CCCF750}"/>
+                <a16:creationId xmlns:a16="http://schemas.microsoft.com/office/drawing/2014/main" id="{71D8715A-3067-732D-C410-868C7CCCF750}"/>
               </a:ext>
               <a:ext uri="{C183D7F6-B498-43B3-948B-1728B52AA6E4}">
-                <adec:decorative xmlns="" xmlns:adec="http://schemas.microsoft.com/office/drawing/2017/decorative" val="1"/>
+                <adec:decorative xmlns:adec="http://schemas.microsoft.com/office/drawing/2017/decorative" val="1"/>
               </a:ext>
             </a:extLst>
           </p:cNvPr>
@@ -9090,10 +9093,10 @@
           <p:cNvPr id="4" name="Group 3">
             <a:extLst>
               <a:ext uri="{FF2B5EF4-FFF2-40B4-BE49-F238E27FC236}">
-                <a16:creationId xmlns="" xmlns:a16="http://schemas.microsoft.com/office/drawing/2014/main" id="{5807BCF9-2F5B-200E-2E6C-E177DB56ECB0}"/>
+                <a16:creationId xmlns:a16="http://schemas.microsoft.com/office/drawing/2014/main" id="{5807BCF9-2F5B-200E-2E6C-E177DB56ECB0}"/>
               </a:ext>
               <a:ext uri="{C183D7F6-B498-43B3-948B-1728B52AA6E4}">
-                <adec:decorative xmlns="" xmlns:adec="http://schemas.microsoft.com/office/drawing/2017/decorative" val="1"/>
+                <adec:decorative xmlns:adec="http://schemas.microsoft.com/office/drawing/2017/decorative" val="1"/>
               </a:ext>
             </a:extLst>
           </p:cNvPr>
@@ -9113,7 +9116,7 @@
             <p:cNvPr id="9" name="Freeform: Shape 14">
               <a:extLst>
                 <a:ext uri="{FF2B5EF4-FFF2-40B4-BE49-F238E27FC236}">
-                  <a16:creationId xmlns="" xmlns:a16="http://schemas.microsoft.com/office/drawing/2014/main" id="{7A624B2B-50FD-9351-987F-2E5A5472CAB6}"/>
+                  <a16:creationId xmlns:a16="http://schemas.microsoft.com/office/drawing/2014/main" id="{7A624B2B-50FD-9351-987F-2E5A5472CAB6}"/>
                 </a:ext>
               </a:extLst>
             </p:cNvPr>
@@ -9259,7 +9262,7 @@
             <p:cNvPr id="10" name="Freeform: Shape 13">
               <a:extLst>
                 <a:ext uri="{FF2B5EF4-FFF2-40B4-BE49-F238E27FC236}">
-                  <a16:creationId xmlns="" xmlns:a16="http://schemas.microsoft.com/office/drawing/2014/main" id="{51E534EE-E0F1-2BD9-9A82-7656B90A2D9D}"/>
+                  <a16:creationId xmlns:a16="http://schemas.microsoft.com/office/drawing/2014/main" id="{51E534EE-E0F1-2BD9-9A82-7656B90A2D9D}"/>
                 </a:ext>
               </a:extLst>
             </p:cNvPr>
@@ -9398,7 +9401,7 @@
           <p:cNvPr id="2" name="Title 1">
             <a:extLst>
               <a:ext uri="{FF2B5EF4-FFF2-40B4-BE49-F238E27FC236}">
-                <a16:creationId xmlns="" xmlns:a16="http://schemas.microsoft.com/office/drawing/2014/main" id="{0C40C44A-93E6-6C58-5E88-AFDC594EC27A}"/>
+                <a16:creationId xmlns:a16="http://schemas.microsoft.com/office/drawing/2014/main" id="{0C40C44A-93E6-6C58-5E88-AFDC594EC27A}"/>
               </a:ext>
             </a:extLst>
           </p:cNvPr>
@@ -9434,7 +9437,7 @@
           <p:cNvPr id="3" name="Content Placeholder 2">
             <a:extLst>
               <a:ext uri="{FF2B5EF4-FFF2-40B4-BE49-F238E27FC236}">
-                <a16:creationId xmlns="" xmlns:a16="http://schemas.microsoft.com/office/drawing/2014/main" id="{0C813049-5F46-053E-6279-8183259649A6}"/>
+                <a16:creationId xmlns:a16="http://schemas.microsoft.com/office/drawing/2014/main" id="{0C813049-5F46-053E-6279-8183259649A6}"/>
               </a:ext>
             </a:extLst>
           </p:cNvPr>
@@ -9565,7 +9568,7 @@
           <p:cNvPr id="8" name="Picture Placeholder 7">
             <a:extLst>
               <a:ext uri="{FF2B5EF4-FFF2-40B4-BE49-F238E27FC236}">
-                <a16:creationId xmlns="" xmlns:a16="http://schemas.microsoft.com/office/drawing/2014/main" id="{BC013AD6-0EF3-2B25-DDBD-2DF706123AEE}"/>
+                <a16:creationId xmlns:a16="http://schemas.microsoft.com/office/drawing/2014/main" id="{BC013AD6-0EF3-2B25-DDBD-2DF706123AEE}"/>
               </a:ext>
             </a:extLst>
           </p:cNvPr>
@@ -9606,7 +9609,7 @@
           <p:cNvPr id="5" name="Date Placeholder 4">
             <a:extLst>
               <a:ext uri="{FF2B5EF4-FFF2-40B4-BE49-F238E27FC236}">
-                <a16:creationId xmlns="" xmlns:a16="http://schemas.microsoft.com/office/drawing/2014/main" id="{C6CFCEB5-4092-FD13-478E-51CD74FDB82E}"/>
+                <a16:creationId xmlns:a16="http://schemas.microsoft.com/office/drawing/2014/main" id="{C6CFCEB5-4092-FD13-478E-51CD74FDB82E}"/>
               </a:ext>
             </a:extLst>
           </p:cNvPr>
@@ -9624,7 +9627,7 @@
           <a:p>
             <a:fld id="{D6D8061D-18C3-4F4F-85EF-561633F58754}" type="datetimeFigureOut">
               <a:rPr lang="en-US" smtClean="0"/>
-              <a:t>09/08/2026</a:t>
+              <a:t>8/12/2026</a:t>
             </a:fld>
             <a:endParaRPr lang="en-US" dirty="0"/>
           </a:p>
@@ -9635,7 +9638,7 @@
           <p:cNvPr id="6" name="Footer Placeholder 5">
             <a:extLst>
               <a:ext uri="{FF2B5EF4-FFF2-40B4-BE49-F238E27FC236}">
-                <a16:creationId xmlns="" xmlns:a16="http://schemas.microsoft.com/office/drawing/2014/main" id="{5D077A4D-E7C0-912D-293F-D93F0CB5CA49}"/>
+                <a16:creationId xmlns:a16="http://schemas.microsoft.com/office/drawing/2014/main" id="{5D077A4D-E7C0-912D-293F-D93F0CB5CA49}"/>
               </a:ext>
             </a:extLst>
           </p:cNvPr>
@@ -9660,7 +9663,7 @@
           <p:cNvPr id="7" name="Slide Number Placeholder 6">
             <a:extLst>
               <a:ext uri="{FF2B5EF4-FFF2-40B4-BE49-F238E27FC236}">
-                <a16:creationId xmlns="" xmlns:a16="http://schemas.microsoft.com/office/drawing/2014/main" id="{CA6AA9E1-334B-5F8F-8A92-67DD095F7838}"/>
+                <a16:creationId xmlns:a16="http://schemas.microsoft.com/office/drawing/2014/main" id="{CA6AA9E1-334B-5F8F-8A92-67DD095F7838}"/>
               </a:ext>
             </a:extLst>
           </p:cNvPr>
@@ -9719,10 +9722,10 @@
           <p:cNvPr id="11" name="Group 10">
             <a:extLst>
               <a:ext uri="{FF2B5EF4-FFF2-40B4-BE49-F238E27FC236}">
-                <a16:creationId xmlns="" xmlns:a16="http://schemas.microsoft.com/office/drawing/2014/main" id="{521BD3DB-6F51-C1AE-FF0E-D0BDCB55F30B}"/>
+                <a16:creationId xmlns:a16="http://schemas.microsoft.com/office/drawing/2014/main" id="{521BD3DB-6F51-C1AE-FF0E-D0BDCB55F30B}"/>
               </a:ext>
               <a:ext uri="{C183D7F6-B498-43B3-948B-1728B52AA6E4}">
-                <adec:decorative xmlns="" xmlns:adec="http://schemas.microsoft.com/office/drawing/2017/decorative" val="1"/>
+                <adec:decorative xmlns:adec="http://schemas.microsoft.com/office/drawing/2017/decorative" val="1"/>
               </a:ext>
             </a:extLst>
           </p:cNvPr>
@@ -9742,7 +9745,7 @@
             <p:cNvPr id="12" name="Freeform: Shape 7">
               <a:extLst>
                 <a:ext uri="{FF2B5EF4-FFF2-40B4-BE49-F238E27FC236}">
-                  <a16:creationId xmlns="" xmlns:a16="http://schemas.microsoft.com/office/drawing/2014/main" id="{59903C17-0733-BE0C-7392-283FEC2E98B0}"/>
+                  <a16:creationId xmlns:a16="http://schemas.microsoft.com/office/drawing/2014/main" id="{59903C17-0733-BE0C-7392-283FEC2E98B0}"/>
                 </a:ext>
               </a:extLst>
             </p:cNvPr>
@@ -10098,7 +10101,7 @@
             <p:cNvPr id="13" name="Freeform: Shape 1">
               <a:extLst>
                 <a:ext uri="{FF2B5EF4-FFF2-40B4-BE49-F238E27FC236}">
-                  <a16:creationId xmlns="" xmlns:a16="http://schemas.microsoft.com/office/drawing/2014/main" id="{898A3450-9C87-13ED-79CC-F4F65D14FF72}"/>
+                  <a16:creationId xmlns:a16="http://schemas.microsoft.com/office/drawing/2014/main" id="{898A3450-9C87-13ED-79CC-F4F65D14FF72}"/>
                 </a:ext>
               </a:extLst>
             </p:cNvPr>
@@ -10237,7 +10240,7 @@
           <p:cNvPr id="2" name="Title 1">
             <a:extLst>
               <a:ext uri="{FF2B5EF4-FFF2-40B4-BE49-F238E27FC236}">
-                <a16:creationId xmlns="" xmlns:a16="http://schemas.microsoft.com/office/drawing/2014/main" id="{0C40C44A-93E6-6C58-5E88-AFDC594EC27A}"/>
+                <a16:creationId xmlns:a16="http://schemas.microsoft.com/office/drawing/2014/main" id="{0C40C44A-93E6-6C58-5E88-AFDC594EC27A}"/>
               </a:ext>
             </a:extLst>
           </p:cNvPr>
@@ -10271,7 +10274,7 @@
           <p:cNvPr id="3" name="Content Placeholder 2">
             <a:extLst>
               <a:ext uri="{FF2B5EF4-FFF2-40B4-BE49-F238E27FC236}">
-                <a16:creationId xmlns="" xmlns:a16="http://schemas.microsoft.com/office/drawing/2014/main" id="{0C813049-5F46-053E-6279-8183259649A6}"/>
+                <a16:creationId xmlns:a16="http://schemas.microsoft.com/office/drawing/2014/main" id="{0C813049-5F46-053E-6279-8183259649A6}"/>
               </a:ext>
             </a:extLst>
           </p:cNvPr>
@@ -10402,7 +10405,7 @@
           <p:cNvPr id="8" name="Table Placeholder 7">
             <a:extLst>
               <a:ext uri="{FF2B5EF4-FFF2-40B4-BE49-F238E27FC236}">
-                <a16:creationId xmlns="" xmlns:a16="http://schemas.microsoft.com/office/drawing/2014/main" id="{423FEB60-8FB5-7F10-EDD7-8AB4B3139EF6}"/>
+                <a16:creationId xmlns:a16="http://schemas.microsoft.com/office/drawing/2014/main" id="{423FEB60-8FB5-7F10-EDD7-8AB4B3139EF6}"/>
               </a:ext>
             </a:extLst>
           </p:cNvPr>
@@ -10442,7 +10445,7 @@
           <p:cNvPr id="5" name="Date Placeholder 4">
             <a:extLst>
               <a:ext uri="{FF2B5EF4-FFF2-40B4-BE49-F238E27FC236}">
-                <a16:creationId xmlns="" xmlns:a16="http://schemas.microsoft.com/office/drawing/2014/main" id="{C6CFCEB5-4092-FD13-478E-51CD74FDB82E}"/>
+                <a16:creationId xmlns:a16="http://schemas.microsoft.com/office/drawing/2014/main" id="{C6CFCEB5-4092-FD13-478E-51CD74FDB82E}"/>
               </a:ext>
             </a:extLst>
           </p:cNvPr>
@@ -10460,7 +10463,7 @@
           <a:p>
             <a:fld id="{D6D8061D-18C3-4F4F-85EF-561633F58754}" type="datetimeFigureOut">
               <a:rPr lang="en-US" smtClean="0"/>
-              <a:t>09/08/2026</a:t>
+              <a:t>8/12/2026</a:t>
             </a:fld>
             <a:endParaRPr lang="en-US" dirty="0"/>
           </a:p>
@@ -10471,7 +10474,7 @@
           <p:cNvPr id="6" name="Footer Placeholder 5">
             <a:extLst>
               <a:ext uri="{FF2B5EF4-FFF2-40B4-BE49-F238E27FC236}">
-                <a16:creationId xmlns="" xmlns:a16="http://schemas.microsoft.com/office/drawing/2014/main" id="{5D077A4D-E7C0-912D-293F-D93F0CB5CA49}"/>
+                <a16:creationId xmlns:a16="http://schemas.microsoft.com/office/drawing/2014/main" id="{5D077A4D-E7C0-912D-293F-D93F0CB5CA49}"/>
               </a:ext>
             </a:extLst>
           </p:cNvPr>
@@ -10496,7 +10499,7 @@
           <p:cNvPr id="7" name="Slide Number Placeholder 6">
             <a:extLst>
               <a:ext uri="{FF2B5EF4-FFF2-40B4-BE49-F238E27FC236}">
-                <a16:creationId xmlns="" xmlns:a16="http://schemas.microsoft.com/office/drawing/2014/main" id="{CA6AA9E1-334B-5F8F-8A92-67DD095F7838}"/>
+                <a16:creationId xmlns:a16="http://schemas.microsoft.com/office/drawing/2014/main" id="{CA6AA9E1-334B-5F8F-8A92-67DD095F7838}"/>
               </a:ext>
             </a:extLst>
           </p:cNvPr>
@@ -10560,7 +10563,7 @@
           <p:cNvPr id="2" name="Title Placeholder 1">
             <a:extLst>
               <a:ext uri="{FF2B5EF4-FFF2-40B4-BE49-F238E27FC236}">
-                <a16:creationId xmlns="" xmlns:a16="http://schemas.microsoft.com/office/drawing/2014/main" id="{4FD97564-C310-6E8C-8689-CE18881B4A17}"/>
+                <a16:creationId xmlns:a16="http://schemas.microsoft.com/office/drawing/2014/main" id="{4FD97564-C310-6E8C-8689-CE18881B4A17}"/>
               </a:ext>
             </a:extLst>
           </p:cNvPr>
@@ -10598,7 +10601,7 @@
           <p:cNvPr id="3" name="Text Placeholder 2">
             <a:extLst>
               <a:ext uri="{FF2B5EF4-FFF2-40B4-BE49-F238E27FC236}">
-                <a16:creationId xmlns="" xmlns:a16="http://schemas.microsoft.com/office/drawing/2014/main" id="{0FAD99FA-26D9-873B-BE7F-26FEC5C233A2}"/>
+                <a16:creationId xmlns:a16="http://schemas.microsoft.com/office/drawing/2014/main" id="{0FAD99FA-26D9-873B-BE7F-26FEC5C233A2}"/>
               </a:ext>
             </a:extLst>
           </p:cNvPr>
@@ -10665,7 +10668,7 @@
           <p:cNvPr id="4" name="Date Placeholder 3">
             <a:extLst>
               <a:ext uri="{FF2B5EF4-FFF2-40B4-BE49-F238E27FC236}">
-                <a16:creationId xmlns="" xmlns:a16="http://schemas.microsoft.com/office/drawing/2014/main" id="{C319819E-0266-97DD-DFD1-BAAA06AE3236}"/>
+                <a16:creationId xmlns:a16="http://schemas.microsoft.com/office/drawing/2014/main" id="{C319819E-0266-97DD-DFD1-BAAA06AE3236}"/>
               </a:ext>
             </a:extLst>
           </p:cNvPr>
@@ -10701,7 +10704,7 @@
           <a:p>
             <a:fld id="{D6D8061D-18C3-4F4F-85EF-561633F58754}" type="datetimeFigureOut">
               <a:rPr lang="en-US" smtClean="0"/>
-              <a:t>09/08/2026</a:t>
+              <a:t>8/12/2026</a:t>
             </a:fld>
             <a:endParaRPr lang="en-US" dirty="0"/>
           </a:p>
@@ -10712,7 +10715,7 @@
           <p:cNvPr id="5" name="Footer Placeholder 4">
             <a:extLst>
               <a:ext uri="{FF2B5EF4-FFF2-40B4-BE49-F238E27FC236}">
-                <a16:creationId xmlns="" xmlns:a16="http://schemas.microsoft.com/office/drawing/2014/main" id="{2BFD19C9-01CE-9E2A-CDA5-C15940F055F7}"/>
+                <a16:creationId xmlns:a16="http://schemas.microsoft.com/office/drawing/2014/main" id="{2BFD19C9-01CE-9E2A-CDA5-C15940F055F7}"/>
               </a:ext>
             </a:extLst>
           </p:cNvPr>
@@ -10755,7 +10758,7 @@
           <p:cNvPr id="6" name="Slide Number Placeholder 5">
             <a:extLst>
               <a:ext uri="{FF2B5EF4-FFF2-40B4-BE49-F238E27FC236}">
-                <a16:creationId xmlns="" xmlns:a16="http://schemas.microsoft.com/office/drawing/2014/main" id="{A1801085-7B28-048D-E3D3-9C3614268DA7}"/>
+                <a16:creationId xmlns:a16="http://schemas.microsoft.com/office/drawing/2014/main" id="{A1801085-7B28-048D-E3D3-9C3614268DA7}"/>
               </a:ext>
             </a:extLst>
           </p:cNvPr>
@@ -11124,7 +11127,7 @@
           <p:cNvPr id="4" name="Title 3">
             <a:extLst>
               <a:ext uri="{FF2B5EF4-FFF2-40B4-BE49-F238E27FC236}">
-                <a16:creationId xmlns="" xmlns:a16="http://schemas.microsoft.com/office/drawing/2014/main" id="{10047101-8D42-6100-9CEA-AEC0FAEAB606}"/>
+                <a16:creationId xmlns:a16="http://schemas.microsoft.com/office/drawing/2014/main" id="{10047101-8D42-6100-9CEA-AEC0FAEAB606}"/>
               </a:ext>
             </a:extLst>
           </p:cNvPr>
@@ -11150,56 +11153,32 @@
           <a:p>
             <a:r>
               <a:rPr lang="en-US" dirty="0"/>
-              <a:t>[</a:t>
-            </a:r>
-            <a:r>
-              <a:rPr lang="en-US" dirty="0" smtClean="0"/>
-              <a:t>20260812] </a:t>
-            </a:r>
-            <a:r>
-              <a:rPr lang="en-US" dirty="0"/>
-              <a:t/>
+              <a:t>[20260812] </a:t>
             </a:r>
             <a:br>
               <a:rPr lang="en-US" dirty="0"/>
             </a:br>
             <a:r>
               <a:rPr lang="en-US" dirty="0"/>
-              <a:t>PCCP Topic </a:t>
-            </a:r>
-            <a:r>
-              <a:rPr lang="en-US" dirty="0" smtClean="0"/>
-              <a:t>#2</a:t>
-            </a:r>
-            <a:r>
-              <a:rPr lang="en-US" dirty="0"/>
-              <a:t/>
-            </a:r>
-            <a:br>
-              <a:rPr lang="en-US" dirty="0"/>
-            </a:br>
-            <a:r>
-              <a:rPr lang="en-US" dirty="0" smtClean="0"/>
-              <a:t>Greedy </a:t>
-            </a:r>
-            <a:br>
-              <a:rPr lang="en-US" dirty="0" smtClean="0"/>
-            </a:br>
-            <a:r>
-              <a:rPr lang="en-US" dirty="0" smtClean="0"/>
-              <a:t>Dynamic Programming</a:t>
-            </a:r>
-            <a:r>
-              <a:rPr lang="en-US" dirty="0"/>
-              <a:t/>
+              <a:t>PCCP Topic #2</a:t>
             </a:r>
             <a:br>
               <a:rPr lang="en-US" dirty="0"/>
             </a:br>
             <a:r>
               <a:rPr lang="en-US" dirty="0"/>
-              <a:t/>
+              <a:t>Greedy </a:t>
             </a:r>
+            <a:br>
+              <a:rPr lang="en-US" dirty="0"/>
+            </a:br>
+            <a:r>
+              <a:rPr lang="en-US" dirty="0"/>
+              <a:t>Dynamic Programming</a:t>
+            </a:r>
+            <a:br>
+              <a:rPr lang="en-US" dirty="0"/>
+            </a:br>
             <a:br>
               <a:rPr lang="en-US" dirty="0"/>
             </a:br>
@@ -11235,10 +11214,573 @@
   <p:cSld>
     <p:spTree>
       <p:nvGrpSpPr>
+        <p:cNvPr id="1" name=""/>
+        <p:cNvGrpSpPr/>
+        <p:nvPr/>
+      </p:nvGrpSpPr>
+      <p:grpSpPr>
+        <a:xfrm>
+          <a:off x="0" y="0"/>
+          <a:ext cx="0" cy="0"/>
+          <a:chOff x="0" y="0"/>
+          <a:chExt cx="0" cy="0"/>
+        </a:xfrm>
+      </p:grpSpPr>
+      <p:sp>
+        <p:nvSpPr>
+          <p:cNvPr id="5" name="Picture Placeholder 4">
+            <a:extLst>
+              <a:ext uri="{FF2B5EF4-FFF2-40B4-BE49-F238E27FC236}">
+                <a16:creationId xmlns:a16="http://schemas.microsoft.com/office/drawing/2014/main" id="{0103C39C-4BAC-4FDE-81AE-2CD3FF5092E7}"/>
+              </a:ext>
+            </a:extLst>
+          </p:cNvPr>
+          <p:cNvSpPr>
+            <a:spLocks noGrp="1"/>
+          </p:cNvSpPr>
+          <p:nvPr>
+            <p:ph type="pic" sz="quarter" idx="13"/>
+          </p:nvPr>
+        </p:nvSpPr>
+        <p:spPr/>
+        <p:txBody>
+          <a:bodyPr/>
+          <a:lstStyle/>
+          <a:p>
+            <a:endParaRPr lang="ko-KR" altLang="en-US" dirty="0"/>
+          </a:p>
+        </p:txBody>
+      </p:sp>
+      <p:pic>
+        <p:nvPicPr>
+          <p:cNvPr id="6" name="Picture 5">
+            <a:extLst>
+              <a:ext uri="{FF2B5EF4-FFF2-40B4-BE49-F238E27FC236}">
+                <a16:creationId xmlns:a16="http://schemas.microsoft.com/office/drawing/2014/main" id="{D6AA967D-A62A-4B7E-8A7D-BD6190A7F53B}"/>
+              </a:ext>
+            </a:extLst>
+          </p:cNvPr>
+          <p:cNvPicPr>
+            <a:picLocks noChangeAspect="1"/>
+          </p:cNvPicPr>
+          <p:nvPr/>
+        </p:nvPicPr>
+        <p:blipFill>
+          <a:blip r:embed="rId3"/>
+          <a:stretch>
+            <a:fillRect/>
+          </a:stretch>
+        </p:blipFill>
+        <p:spPr>
+          <a:xfrm>
+            <a:off x="7047220" y="1136132"/>
+            <a:ext cx="4876800" cy="4876800"/>
+          </a:xfrm>
+          <a:prstGeom prst="rect">
+            <a:avLst/>
+          </a:prstGeom>
+        </p:spPr>
+      </p:pic>
+      <p:sp>
+        <p:nvSpPr>
+          <p:cNvPr id="14" name="Content Placeholder 2">
+            <a:extLst>
+              <a:ext uri="{FF2B5EF4-FFF2-40B4-BE49-F238E27FC236}">
+                <a16:creationId xmlns:a16="http://schemas.microsoft.com/office/drawing/2014/main" id="{9CED9542-E80C-4BEB-8AF2-96515C5E8434}"/>
+              </a:ext>
+            </a:extLst>
+          </p:cNvPr>
+          <p:cNvSpPr>
+            <a:spLocks noGrp="1"/>
+          </p:cNvSpPr>
+          <p:nvPr>
+            <p:ph sz="half" idx="1"/>
+          </p:nvPr>
+        </p:nvSpPr>
+        <p:spPr>
+          <a:xfrm>
+            <a:off x="863724" y="1197472"/>
+            <a:ext cx="5232276" cy="2094368"/>
+          </a:xfrm>
+          <a:noFill/>
+        </p:spPr>
+        <p:txBody>
+          <a:bodyPr>
+            <a:normAutofit lnSpcReduction="10000"/>
+          </a:bodyPr>
+          <a:lstStyle/>
+          <a:p>
+            <a:r>
+              <a:rPr lang="en-US" b="1" dirty="0"/>
+              <a:t>Dynamic Programming Algorithm Definition</a:t>
+            </a:r>
+          </a:p>
+          <a:p>
+            <a:pPr lvl="1"/>
+            <a:r>
+              <a:rPr lang="en-US" dirty="0"/>
+              <a:t>Solution is determined based on solving successively similar but smaller problems.</a:t>
+            </a:r>
+          </a:p>
+          <a:p>
+            <a:pPr lvl="1"/>
+            <a:r>
+              <a:rPr lang="en-US" dirty="0"/>
+              <a:t>Bigger problem is relatively easy to find, if we have solutions for its sub-problems.</a:t>
+            </a:r>
+          </a:p>
+          <a:p>
+            <a:pPr lvl="1"/>
+            <a:r>
+              <a:rPr lang="en-US" dirty="0"/>
+              <a:t>Use memory for caching</a:t>
+            </a:r>
+          </a:p>
+        </p:txBody>
+      </p:sp>
+    </p:spTree>
+    <p:extLst>
+      <p:ext uri="{BB962C8B-B14F-4D97-AF65-F5344CB8AC3E}">
+        <p14:creationId xmlns:p14="http://schemas.microsoft.com/office/powerpoint/2010/main" val="2680463825"/>
+      </p:ext>
+    </p:extLst>
+  </p:cSld>
+  <p:clrMapOvr>
+    <a:masterClrMapping/>
+  </p:clrMapOvr>
+</p:sld>
+</file>
+
+<file path=ppt/slides/slide11.xml><?xml version="1.0" encoding="utf-8"?>
+<p:sld xmlns:a="http://schemas.openxmlformats.org/drawingml/2006/main" xmlns:r="http://schemas.openxmlformats.org/officeDocument/2006/relationships" xmlns:p="http://schemas.openxmlformats.org/presentationml/2006/main">
+  <p:cSld>
+    <p:spTree>
+      <p:nvGrpSpPr>
         <p:cNvPr id="1" name="">
           <a:extLst>
             <a:ext uri="{FF2B5EF4-FFF2-40B4-BE49-F238E27FC236}">
-              <a16:creationId xmlns="" xmlns:a16="http://schemas.microsoft.com/office/drawing/2014/main" id="{A378321A-BF11-5B5F-80FD-1E9B8BB22EC2}"/>
+              <a16:creationId xmlns:a16="http://schemas.microsoft.com/office/drawing/2014/main" id="{F77B354F-3ECC-178D-F1BD-778FFE785C7C}"/>
+            </a:ext>
+          </a:extLst>
+        </p:cNvPr>
+        <p:cNvGrpSpPr/>
+        <p:nvPr/>
+      </p:nvGrpSpPr>
+      <p:grpSpPr>
+        <a:xfrm>
+          <a:off x="0" y="0"/>
+          <a:ext cx="0" cy="0"/>
+          <a:chOff x="0" y="0"/>
+          <a:chExt cx="0" cy="0"/>
+        </a:xfrm>
+      </p:grpSpPr>
+      <p:sp>
+        <p:nvSpPr>
+          <p:cNvPr id="5" name="Title 1">
+            <a:extLst>
+              <a:ext uri="{FF2B5EF4-FFF2-40B4-BE49-F238E27FC236}">
+                <a16:creationId xmlns:a16="http://schemas.microsoft.com/office/drawing/2014/main" id="{E2A1B276-F1A4-E3D0-759A-8DEE08AD96E8}"/>
+              </a:ext>
+            </a:extLst>
+          </p:cNvPr>
+          <p:cNvSpPr txBox="1">
+            <a:spLocks/>
+          </p:cNvSpPr>
+          <p:nvPr/>
+        </p:nvSpPr>
+        <p:spPr>
+          <a:xfrm>
+            <a:off x="609957" y="1119031"/>
+            <a:ext cx="4384736" cy="4619938"/>
+          </a:xfrm>
+          <a:prstGeom prst="rect">
+            <a:avLst/>
+          </a:prstGeom>
+        </p:spPr>
+        <p:txBody>
+          <a:bodyPr vert="horz" lIns="91440" tIns="45720" rIns="91440" bIns="45720" rtlCol="0" anchor="ctr" anchorCtr="0">
+            <a:normAutofit/>
+          </a:bodyPr>
+          <a:lstStyle>
+            <a:lvl1pPr algn="l" defTabSz="914400" rtl="0" eaLnBrk="1" latinLnBrk="0" hangingPunct="1">
+              <a:lnSpc>
+                <a:spcPct val="90000"/>
+              </a:lnSpc>
+              <a:spcBef>
+                <a:spcPct val="0"/>
+              </a:spcBef>
+              <a:buNone/>
+              <a:defRPr sz="4400" kern="1200">
+                <a:solidFill>
+                  <a:schemeClr val="tx1"/>
+                </a:solidFill>
+                <a:latin typeface="+mj-lt"/>
+                <a:ea typeface="+mj-ea"/>
+                <a:cs typeface="+mj-cs"/>
+              </a:defRPr>
+            </a:lvl1pPr>
+          </a:lstStyle>
+          <a:p>
+            <a:pPr algn="ctr">
+              <a:spcAft>
+                <a:spcPts val="600"/>
+              </a:spcAft>
+            </a:pPr>
+            <a:r>
+              <a:rPr lang="en-US" kern="1200" dirty="0">
+                <a:solidFill>
+                  <a:schemeClr val="bg1"/>
+                </a:solidFill>
+                <a:latin typeface="+mj-lt"/>
+                <a:ea typeface="+mj-ea"/>
+                <a:cs typeface="+mj-cs"/>
+              </a:rPr>
+              <a:t>Steps</a:t>
+            </a:r>
+          </a:p>
+        </p:txBody>
+      </p:sp>
+      <p:sp>
+        <p:nvSpPr>
+          <p:cNvPr id="8" name="AutoShape 2" descr="Why CAE Stock Popped 9% After Earnings | The Motley Fool Canada">
+            <a:extLst>
+              <a:ext uri="{FF2B5EF4-FFF2-40B4-BE49-F238E27FC236}">
+                <a16:creationId xmlns:a16="http://schemas.microsoft.com/office/drawing/2014/main" id="{C9CB5BE1-21A1-04E6-C196-3FB7A8F607E7}"/>
+              </a:ext>
+            </a:extLst>
+          </p:cNvPr>
+          <p:cNvSpPr>
+            <a:spLocks noChangeAspect="1" noChangeArrowheads="1"/>
+          </p:cNvSpPr>
+          <p:nvPr/>
+        </p:nvSpPr>
+        <p:spPr bwMode="auto">
+          <a:xfrm>
+            <a:off x="5943600" y="3276600"/>
+            <a:ext cx="304800" cy="304800"/>
+          </a:xfrm>
+          <a:prstGeom prst="rect">
+            <a:avLst/>
+          </a:prstGeom>
+          <a:noFill/>
+          <a:extLst>
+            <a:ext uri="{909E8E84-426E-40DD-AFC4-6F175D3DCCD1}">
+              <a14:hiddenFill xmlns:a14="http://schemas.microsoft.com/office/drawing/2010/main">
+                <a:solidFill>
+                  <a:srgbClr val="FFFFFF"/>
+                </a:solidFill>
+              </a14:hiddenFill>
+            </a:ext>
+          </a:extLst>
+        </p:spPr>
+        <p:txBody>
+          <a:bodyPr vert="horz" wrap="square" lIns="91440" tIns="45720" rIns="91440" bIns="45720" numCol="1" anchor="t" anchorCtr="0" compatLnSpc="1">
+            <a:prstTxWarp prst="textNoShape">
+              <a:avLst/>
+            </a:prstTxWarp>
+          </a:bodyPr>
+          <a:lstStyle/>
+          <a:p>
+            <a:endParaRPr lang="ko-KR" altLang="en-US"/>
+          </a:p>
+        </p:txBody>
+      </p:sp>
+      <p:sp>
+        <p:nvSpPr>
+          <p:cNvPr id="2" name="Content Placeholder 2">
+            <a:extLst>
+              <a:ext uri="{FF2B5EF4-FFF2-40B4-BE49-F238E27FC236}">
+                <a16:creationId xmlns:a16="http://schemas.microsoft.com/office/drawing/2014/main" id="{06B0E630-7177-9344-9313-DB3709AC3F29}"/>
+              </a:ext>
+            </a:extLst>
+          </p:cNvPr>
+          <p:cNvSpPr txBox="1">
+            <a:spLocks/>
+          </p:cNvSpPr>
+          <p:nvPr/>
+        </p:nvSpPr>
+        <p:spPr>
+          <a:xfrm>
+            <a:off x="5107919" y="1359510"/>
+            <a:ext cx="6250290" cy="4754123"/>
+          </a:xfrm>
+          <a:prstGeom prst="rect">
+            <a:avLst/>
+          </a:prstGeom>
+          <a:noFill/>
+        </p:spPr>
+        <p:txBody>
+          <a:bodyPr vert="horz" lIns="91440" tIns="45720" rIns="91440" bIns="45720" rtlCol="0">
+            <a:normAutofit/>
+          </a:bodyPr>
+          <a:lstStyle>
+            <a:lvl1pPr marL="0" indent="0" algn="l" defTabSz="914400" rtl="0" eaLnBrk="1" latinLnBrk="0" hangingPunct="1">
+              <a:lnSpc>
+                <a:spcPct val="90000"/>
+              </a:lnSpc>
+              <a:spcBef>
+                <a:spcPts val="1000"/>
+              </a:spcBef>
+              <a:spcAft>
+                <a:spcPts val="800"/>
+              </a:spcAft>
+              <a:buFont typeface="Arial" panose="020B0604020202020204" pitchFamily="34" charset="0"/>
+              <a:buNone/>
+              <a:defRPr sz="1800" kern="1200">
+                <a:solidFill>
+                  <a:schemeClr val="tx1"/>
+                </a:solidFill>
+                <a:latin typeface="+mn-lt"/>
+                <a:ea typeface="+mn-ea"/>
+                <a:cs typeface="+mn-cs"/>
+              </a:defRPr>
+            </a:lvl1pPr>
+            <a:lvl2pPr marL="742950" indent="-285750" algn="l" defTabSz="914400" rtl="0" eaLnBrk="1" latinLnBrk="0" hangingPunct="1">
+              <a:lnSpc>
+                <a:spcPct val="90000"/>
+              </a:lnSpc>
+              <a:spcBef>
+                <a:spcPts val="1000"/>
+              </a:spcBef>
+              <a:spcAft>
+                <a:spcPts val="800"/>
+              </a:spcAft>
+              <a:buClr>
+                <a:schemeClr val="accent2"/>
+              </a:buClr>
+              <a:buFont typeface="Arial" panose="020B0604020202020204" pitchFamily="34" charset="0"/>
+              <a:buChar char="•"/>
+              <a:defRPr sz="1600" kern="1200">
+                <a:solidFill>
+                  <a:schemeClr val="tx1"/>
+                </a:solidFill>
+                <a:latin typeface="+mn-lt"/>
+                <a:ea typeface="+mn-ea"/>
+                <a:cs typeface="+mn-cs"/>
+              </a:defRPr>
+            </a:lvl2pPr>
+            <a:lvl3pPr marL="1200150" indent="-285750" algn="l" defTabSz="914400" rtl="0" eaLnBrk="1" latinLnBrk="0" hangingPunct="1">
+              <a:lnSpc>
+                <a:spcPct val="90000"/>
+              </a:lnSpc>
+              <a:spcBef>
+                <a:spcPts val="1000"/>
+              </a:spcBef>
+              <a:spcAft>
+                <a:spcPts val="800"/>
+              </a:spcAft>
+              <a:buClr>
+                <a:schemeClr val="accent2"/>
+              </a:buClr>
+              <a:buFont typeface="Arial" panose="020B0604020202020204" pitchFamily="34" charset="0"/>
+              <a:buChar char="•"/>
+              <a:defRPr sz="1400" kern="1200">
+                <a:solidFill>
+                  <a:schemeClr val="tx1"/>
+                </a:solidFill>
+                <a:latin typeface="+mn-lt"/>
+                <a:ea typeface="+mn-ea"/>
+                <a:cs typeface="+mn-cs"/>
+              </a:defRPr>
+            </a:lvl3pPr>
+            <a:lvl4pPr marL="1543050" indent="-171450" algn="l" defTabSz="914400" rtl="0" eaLnBrk="1" latinLnBrk="0" hangingPunct="1">
+              <a:lnSpc>
+                <a:spcPct val="90000"/>
+              </a:lnSpc>
+              <a:spcBef>
+                <a:spcPts val="1000"/>
+              </a:spcBef>
+              <a:spcAft>
+                <a:spcPts val="800"/>
+              </a:spcAft>
+              <a:buClr>
+                <a:schemeClr val="accent2"/>
+              </a:buClr>
+              <a:buFont typeface="Arial" panose="020B0604020202020204" pitchFamily="34" charset="0"/>
+              <a:buChar char="•"/>
+              <a:defRPr sz="1200" kern="1200">
+                <a:solidFill>
+                  <a:schemeClr val="tx1"/>
+                </a:solidFill>
+                <a:latin typeface="+mn-lt"/>
+                <a:ea typeface="+mn-ea"/>
+                <a:cs typeface="+mn-cs"/>
+              </a:defRPr>
+            </a:lvl4pPr>
+            <a:lvl5pPr marL="2000250" indent="-171450" algn="l" defTabSz="914400" rtl="0" eaLnBrk="1" latinLnBrk="0" hangingPunct="1">
+              <a:lnSpc>
+                <a:spcPct val="90000"/>
+              </a:lnSpc>
+              <a:spcBef>
+                <a:spcPts val="1000"/>
+              </a:spcBef>
+              <a:spcAft>
+                <a:spcPts val="800"/>
+              </a:spcAft>
+              <a:buClr>
+                <a:schemeClr val="accent2"/>
+              </a:buClr>
+              <a:buFont typeface="Arial" panose="020B0604020202020204" pitchFamily="34" charset="0"/>
+              <a:buChar char="•"/>
+              <a:defRPr sz="1200" kern="1200">
+                <a:solidFill>
+                  <a:schemeClr val="tx1"/>
+                </a:solidFill>
+                <a:latin typeface="+mn-lt"/>
+                <a:ea typeface="+mn-ea"/>
+                <a:cs typeface="+mn-cs"/>
+              </a:defRPr>
+            </a:lvl5pPr>
+            <a:lvl6pPr marL="2514600" indent="-228600" algn="l" defTabSz="914400" rtl="0" eaLnBrk="1" latinLnBrk="0" hangingPunct="1">
+              <a:lnSpc>
+                <a:spcPct val="90000"/>
+              </a:lnSpc>
+              <a:spcBef>
+                <a:spcPts val="500"/>
+              </a:spcBef>
+              <a:buFont typeface="Arial" panose="020B0604020202020204" pitchFamily="34" charset="0"/>
+              <a:buChar char="•"/>
+              <a:defRPr sz="1800" kern="1200">
+                <a:solidFill>
+                  <a:schemeClr val="tx1"/>
+                </a:solidFill>
+                <a:latin typeface="+mn-lt"/>
+                <a:ea typeface="+mn-ea"/>
+                <a:cs typeface="+mn-cs"/>
+              </a:defRPr>
+            </a:lvl6pPr>
+            <a:lvl7pPr marL="2971800" indent="-228600" algn="l" defTabSz="914400" rtl="0" eaLnBrk="1" latinLnBrk="0" hangingPunct="1">
+              <a:lnSpc>
+                <a:spcPct val="90000"/>
+              </a:lnSpc>
+              <a:spcBef>
+                <a:spcPts val="500"/>
+              </a:spcBef>
+              <a:buFont typeface="Arial" panose="020B0604020202020204" pitchFamily="34" charset="0"/>
+              <a:buChar char="•"/>
+              <a:defRPr sz="1800" kern="1200">
+                <a:solidFill>
+                  <a:schemeClr val="tx1"/>
+                </a:solidFill>
+                <a:latin typeface="+mn-lt"/>
+                <a:ea typeface="+mn-ea"/>
+                <a:cs typeface="+mn-cs"/>
+              </a:defRPr>
+            </a:lvl7pPr>
+            <a:lvl8pPr marL="3429000" indent="-228600" algn="l" defTabSz="914400" rtl="0" eaLnBrk="1" latinLnBrk="0" hangingPunct="1">
+              <a:lnSpc>
+                <a:spcPct val="90000"/>
+              </a:lnSpc>
+              <a:spcBef>
+                <a:spcPts val="500"/>
+              </a:spcBef>
+              <a:buFont typeface="Arial" panose="020B0604020202020204" pitchFamily="34" charset="0"/>
+              <a:buChar char="•"/>
+              <a:defRPr sz="1800" kern="1200">
+                <a:solidFill>
+                  <a:schemeClr val="tx1"/>
+                </a:solidFill>
+                <a:latin typeface="+mn-lt"/>
+                <a:ea typeface="+mn-ea"/>
+                <a:cs typeface="+mn-cs"/>
+              </a:defRPr>
+            </a:lvl8pPr>
+            <a:lvl9pPr marL="3886200" indent="-228600" algn="l" defTabSz="914400" rtl="0" eaLnBrk="1" latinLnBrk="0" hangingPunct="1">
+              <a:lnSpc>
+                <a:spcPct val="90000"/>
+              </a:lnSpc>
+              <a:spcBef>
+                <a:spcPts val="500"/>
+              </a:spcBef>
+              <a:buFont typeface="Arial" panose="020B0604020202020204" pitchFamily="34" charset="0"/>
+              <a:buChar char="•"/>
+              <a:defRPr sz="1800" kern="1200">
+                <a:solidFill>
+                  <a:schemeClr val="tx1"/>
+                </a:solidFill>
+                <a:latin typeface="+mn-lt"/>
+                <a:ea typeface="+mn-ea"/>
+                <a:cs typeface="+mn-cs"/>
+              </a:defRPr>
+            </a:lvl9pPr>
+          </a:lstStyle>
+          <a:p>
+            <a:pPr lvl="1"/>
+            <a:r>
+              <a:rPr lang="en-US" altLang="ko-KR" sz="2800" b="1" dirty="0"/>
+              <a:t>Identify the Problem :</a:t>
+            </a:r>
+          </a:p>
+          <a:p>
+            <a:pPr lvl="2"/>
+            <a:r>
+              <a:rPr lang="en-US" altLang="ko-KR" sz="2800" b="1" dirty="0"/>
+              <a:t>overlapping subproblems</a:t>
+            </a:r>
+          </a:p>
+          <a:p>
+            <a:pPr lvl="2"/>
+            <a:r>
+              <a:rPr lang="en-US" altLang="ko-KR" sz="2800" b="1" dirty="0"/>
+              <a:t>optimal substructure</a:t>
+            </a:r>
+          </a:p>
+          <a:p>
+            <a:pPr lvl="1"/>
+            <a:r>
+              <a:rPr lang="en-US" sz="2800" dirty="0"/>
+              <a:t>Define states (1D, 2D mem..)</a:t>
+            </a:r>
+          </a:p>
+          <a:p>
+            <a:pPr lvl="1"/>
+            <a:r>
+              <a:rPr lang="en-US" sz="2800" dirty="0"/>
+              <a:t>Find the relationships (formula)</a:t>
+            </a:r>
+          </a:p>
+          <a:p>
+            <a:pPr lvl="1"/>
+            <a:r>
+              <a:rPr lang="en-US" sz="2800" dirty="0"/>
+              <a:t>Base Cases : Simplest Version </a:t>
+            </a:r>
+          </a:p>
+          <a:p>
+            <a:pPr lvl="1"/>
+            <a:r>
+              <a:rPr lang="en-US" sz="2800" dirty="0"/>
+              <a:t>Choose top-down or bottom-up</a:t>
+            </a:r>
+          </a:p>
+          <a:p>
+            <a:pPr lvl="1"/>
+            <a:endParaRPr lang="en-US" sz="2800" dirty="0"/>
+          </a:p>
+        </p:txBody>
+      </p:sp>
+    </p:spTree>
+    <p:extLst>
+      <p:ext uri="{BB962C8B-B14F-4D97-AF65-F5344CB8AC3E}">
+        <p14:creationId xmlns:p14="http://schemas.microsoft.com/office/powerpoint/2010/main" val="884201888"/>
+      </p:ext>
+    </p:extLst>
+  </p:cSld>
+  <p:clrMapOvr>
+    <a:masterClrMapping/>
+  </p:clrMapOvr>
+</p:sld>
+</file>
+
+<file path=ppt/slides/slide12.xml><?xml version="1.0" encoding="utf-8"?>
+<p:sld xmlns:a="http://schemas.openxmlformats.org/drawingml/2006/main" xmlns:r="http://schemas.openxmlformats.org/officeDocument/2006/relationships" xmlns:p="http://schemas.openxmlformats.org/presentationml/2006/main">
+  <p:cSld>
+    <p:spTree>
+      <p:nvGrpSpPr>
+        <p:cNvPr id="1" name="">
+          <a:extLst>
+            <a:ext uri="{FF2B5EF4-FFF2-40B4-BE49-F238E27FC236}">
+              <a16:creationId xmlns:a16="http://schemas.microsoft.com/office/drawing/2014/main" id="{A378321A-BF11-5B5F-80FD-1E9B8BB22EC2}"/>
             </a:ext>
           </a:extLst>
         </p:cNvPr>
@@ -11258,7 +11800,7 @@
           <p:cNvPr id="2" name="Title 1">
             <a:extLst>
               <a:ext uri="{FF2B5EF4-FFF2-40B4-BE49-F238E27FC236}">
-                <a16:creationId xmlns="" xmlns:a16="http://schemas.microsoft.com/office/drawing/2014/main" id="{CF6D7973-2A7A-69A4-1427-C428EC5D87C9}"/>
+                <a16:creationId xmlns:a16="http://schemas.microsoft.com/office/drawing/2014/main" id="{CF6D7973-2A7A-69A4-1427-C428EC5D87C9}"/>
               </a:ext>
             </a:extLst>
           </p:cNvPr>
@@ -11281,10 +11823,9 @@
           <a:lstStyle/>
           <a:p>
             <a:r>
-              <a:rPr lang="en-US" dirty="0" smtClean="0"/>
+              <a:rPr lang="en-US" dirty="0"/>
               <a:t>Fibonacci</a:t>
             </a:r>
-            <a:endParaRPr lang="en-US" dirty="0"/>
           </a:p>
         </p:txBody>
       </p:sp>
@@ -11293,7 +11834,7 @@
           <p:cNvPr id="14" name="Title 1">
             <a:extLst>
               <a:ext uri="{FF2B5EF4-FFF2-40B4-BE49-F238E27FC236}">
-                <a16:creationId xmlns="" xmlns:a16="http://schemas.microsoft.com/office/drawing/2014/main" id="{B7545968-70F7-0180-6448-3547E442EF4A}"/>
+                <a16:creationId xmlns:a16="http://schemas.microsoft.com/office/drawing/2014/main" id="{B7545968-70F7-0180-6448-3547E442EF4A}"/>
               </a:ext>
             </a:extLst>
           </p:cNvPr>
@@ -11337,16 +11878,15 @@
           </a:lstStyle>
           <a:p>
             <a:r>
-              <a:rPr lang="en-US" dirty="0" smtClean="0"/>
+              <a:rPr lang="en-US" dirty="0"/>
               <a:t>0  1  1   2  3  5  8  13  15  28  43  …</a:t>
             </a:r>
           </a:p>
           <a:p>
             <a:r>
-              <a:rPr lang="en-US" dirty="0" smtClean="0"/>
+              <a:rPr lang="en-US" dirty="0"/>
               <a:t>0  1   2  3  4  5  6    7    8    9  10</a:t>
             </a:r>
-            <a:endParaRPr lang="en-US" dirty="0"/>
           </a:p>
         </p:txBody>
       </p:sp>
@@ -11363,7 +11903,7 @@
 </p:sld>
 </file>
 
-<file path=ppt/slides/slide11.xml><?xml version="1.0" encoding="utf-8"?>
+<file path=ppt/slides/slide13.xml><?xml version="1.0" encoding="utf-8"?>
 <p:sld xmlns:a="http://schemas.openxmlformats.org/drawingml/2006/main" xmlns:r="http://schemas.openxmlformats.org/officeDocument/2006/relationships" xmlns:p="http://schemas.openxmlformats.org/presentationml/2006/main">
   <p:cSld>
     <p:spTree>
@@ -11371,7 +11911,7 @@
         <p:cNvPr id="1" name="">
           <a:extLst>
             <a:ext uri="{FF2B5EF4-FFF2-40B4-BE49-F238E27FC236}">
-              <a16:creationId xmlns="" xmlns:a16="http://schemas.microsoft.com/office/drawing/2014/main" id="{A378321A-BF11-5B5F-80FD-1E9B8BB22EC2}"/>
+              <a16:creationId xmlns:a16="http://schemas.microsoft.com/office/drawing/2014/main" id="{A378321A-BF11-5B5F-80FD-1E9B8BB22EC2}"/>
             </a:ext>
           </a:extLst>
         </p:cNvPr>
@@ -11391,7 +11931,7 @@
           <p:cNvPr id="2" name="Title 1">
             <a:extLst>
               <a:ext uri="{FF2B5EF4-FFF2-40B4-BE49-F238E27FC236}">
-                <a16:creationId xmlns="" xmlns:a16="http://schemas.microsoft.com/office/drawing/2014/main" id="{CF6D7973-2A7A-69A4-1427-C428EC5D87C9}"/>
+                <a16:creationId xmlns:a16="http://schemas.microsoft.com/office/drawing/2014/main" id="{CF6D7973-2A7A-69A4-1427-C428EC5D87C9}"/>
               </a:ext>
             </a:extLst>
           </p:cNvPr>
@@ -11414,10 +11954,9 @@
           <a:lstStyle/>
           <a:p>
             <a:r>
-              <a:rPr lang="en-US" dirty="0" smtClean="0"/>
+              <a:rPr lang="en-US" dirty="0"/>
               <a:t>Coin Change</a:t>
             </a:r>
-            <a:endParaRPr lang="en-US" dirty="0"/>
           </a:p>
         </p:txBody>
       </p:sp>
@@ -11522,7 +12061,7 @@
           <p:cNvPr id="10" name="Title 1">
             <a:extLst>
               <a:ext uri="{FF2B5EF4-FFF2-40B4-BE49-F238E27FC236}">
-                <a16:creationId xmlns="" xmlns:a16="http://schemas.microsoft.com/office/drawing/2014/main" id="{B7545968-70F7-0180-6448-3547E442EF4A}"/>
+                <a16:creationId xmlns:a16="http://schemas.microsoft.com/office/drawing/2014/main" id="{B7545968-70F7-0180-6448-3547E442EF4A}"/>
               </a:ext>
             </a:extLst>
           </p:cNvPr>
@@ -11566,10 +12105,9 @@
           </a:lstStyle>
           <a:p>
             <a:r>
-              <a:rPr lang="en-US" dirty="0" smtClean="0"/>
+              <a:rPr lang="en-US" dirty="0"/>
               <a:t>6</a:t>
             </a:r>
-            <a:endParaRPr lang="en-US" dirty="0"/>
           </a:p>
         </p:txBody>
       </p:sp>
@@ -11602,7 +12140,7 @@
           <p:cNvPr id="11" name="Title 1">
             <a:extLst>
               <a:ext uri="{FF2B5EF4-FFF2-40B4-BE49-F238E27FC236}">
-                <a16:creationId xmlns="" xmlns:a16="http://schemas.microsoft.com/office/drawing/2014/main" id="{B7545968-70F7-0180-6448-3547E442EF4A}"/>
+                <a16:creationId xmlns:a16="http://schemas.microsoft.com/office/drawing/2014/main" id="{B7545968-70F7-0180-6448-3547E442EF4A}"/>
               </a:ext>
             </a:extLst>
           </p:cNvPr>
@@ -11646,10 +12184,9 @@
           </a:lstStyle>
           <a:p>
             <a:r>
-              <a:rPr lang="en-US" dirty="0" smtClean="0"/>
+              <a:rPr lang="en-US" dirty="0"/>
               <a:t>1</a:t>
             </a:r>
-            <a:endParaRPr lang="en-US" dirty="0"/>
           </a:p>
         </p:txBody>
       </p:sp>
@@ -11658,7 +12195,7 @@
           <p:cNvPr id="12" name="Title 1">
             <a:extLst>
               <a:ext uri="{FF2B5EF4-FFF2-40B4-BE49-F238E27FC236}">
-                <a16:creationId xmlns="" xmlns:a16="http://schemas.microsoft.com/office/drawing/2014/main" id="{B7545968-70F7-0180-6448-3547E442EF4A}"/>
+                <a16:creationId xmlns:a16="http://schemas.microsoft.com/office/drawing/2014/main" id="{B7545968-70F7-0180-6448-3547E442EF4A}"/>
               </a:ext>
             </a:extLst>
           </p:cNvPr>
@@ -11702,10 +12239,9 @@
           </a:lstStyle>
           <a:p>
             <a:r>
-              <a:rPr lang="en-US" dirty="0" smtClean="0"/>
+              <a:rPr lang="en-US" dirty="0"/>
               <a:t>3</a:t>
             </a:r>
-            <a:endParaRPr lang="en-US" dirty="0"/>
           </a:p>
         </p:txBody>
       </p:sp>
@@ -11714,7 +12250,7 @@
           <p:cNvPr id="13" name="Title 1">
             <a:extLst>
               <a:ext uri="{FF2B5EF4-FFF2-40B4-BE49-F238E27FC236}">
-                <a16:creationId xmlns="" xmlns:a16="http://schemas.microsoft.com/office/drawing/2014/main" id="{B7545968-70F7-0180-6448-3547E442EF4A}"/>
+                <a16:creationId xmlns:a16="http://schemas.microsoft.com/office/drawing/2014/main" id="{B7545968-70F7-0180-6448-3547E442EF4A}"/>
               </a:ext>
             </a:extLst>
           </p:cNvPr>
@@ -11758,10 +12294,9 @@
           </a:lstStyle>
           <a:p>
             <a:r>
-              <a:rPr lang="en-US" dirty="0" smtClean="0"/>
+              <a:rPr lang="en-US" dirty="0"/>
               <a:t>4</a:t>
             </a:r>
-            <a:endParaRPr lang="en-US" dirty="0"/>
           </a:p>
         </p:txBody>
       </p:sp>
@@ -11778,7 +12313,7 @@
 </p:sld>
 </file>
 
-<file path=ppt/slides/slide12.xml><?xml version="1.0" encoding="utf-8"?>
+<file path=ppt/slides/slide14.xml><?xml version="1.0" encoding="utf-8"?>
 <p:sld xmlns:a="http://schemas.openxmlformats.org/drawingml/2006/main" xmlns:r="http://schemas.openxmlformats.org/officeDocument/2006/relationships" xmlns:p="http://schemas.openxmlformats.org/presentationml/2006/main">
   <p:cSld>
     <p:spTree>
@@ -11800,7 +12335,7 @@
           <p:cNvPr id="2" name="Title 1">
             <a:extLst>
               <a:ext uri="{FF2B5EF4-FFF2-40B4-BE49-F238E27FC236}">
-                <a16:creationId xmlns="" xmlns:a16="http://schemas.microsoft.com/office/drawing/2014/main" id="{28BAC361-0D7A-DC05-86B5-6DD77D322F5B}"/>
+                <a16:creationId xmlns:a16="http://schemas.microsoft.com/office/drawing/2014/main" id="{28BAC361-0D7A-DC05-86B5-6DD77D322F5B}"/>
               </a:ext>
             </a:extLst>
           </p:cNvPr>
@@ -11834,7 +12369,7 @@
           <p:cNvPr id="3" name="Content Placeholder 2">
             <a:extLst>
               <a:ext uri="{FF2B5EF4-FFF2-40B4-BE49-F238E27FC236}">
-                <a16:creationId xmlns="" xmlns:a16="http://schemas.microsoft.com/office/drawing/2014/main" id="{1BE98EFF-197D-3136-70B9-7BBD30A48931}"/>
+                <a16:creationId xmlns:a16="http://schemas.microsoft.com/office/drawing/2014/main" id="{1BE98EFF-197D-3136-70B9-7BBD30A48931}"/>
               </a:ext>
             </a:extLst>
           </p:cNvPr>
@@ -11881,6 +12416,91 @@
     <p:extLst>
       <p:ext uri="{BB962C8B-B14F-4D97-AF65-F5344CB8AC3E}">
         <p14:creationId xmlns:p14="http://schemas.microsoft.com/office/powerpoint/2010/main" val="1562484837"/>
+      </p:ext>
+    </p:extLst>
+  </p:cSld>
+  <p:clrMapOvr>
+    <a:masterClrMapping/>
+  </p:clrMapOvr>
+</p:sld>
+</file>
+
+<file path=ppt/slides/slide15.xml><?xml version="1.0" encoding="utf-8"?>
+<p:sld xmlns:a="http://schemas.openxmlformats.org/drawingml/2006/main" xmlns:r="http://schemas.openxmlformats.org/officeDocument/2006/relationships" xmlns:p="http://schemas.openxmlformats.org/presentationml/2006/main">
+  <p:cSld>
+    <p:spTree>
+      <p:nvGrpSpPr>
+        <p:cNvPr id="1" name=""/>
+        <p:cNvGrpSpPr/>
+        <p:nvPr/>
+      </p:nvGrpSpPr>
+      <p:grpSpPr>
+        <a:xfrm>
+          <a:off x="0" y="0"/>
+          <a:ext cx="0" cy="0"/>
+          <a:chOff x="0" y="0"/>
+          <a:chExt cx="0" cy="0"/>
+        </a:xfrm>
+      </p:grpSpPr>
+      <p:sp>
+        <p:nvSpPr>
+          <p:cNvPr id="3" name="내용 개체 틀 2">
+            <a:extLst>
+              <a:ext uri="{FF2B5EF4-FFF2-40B4-BE49-F238E27FC236}">
+                <a16:creationId xmlns:a16="http://schemas.microsoft.com/office/drawing/2014/main" id="{6FFBE9EF-E078-347B-9685-1BB7DDCD5B32}"/>
+              </a:ext>
+            </a:extLst>
+          </p:cNvPr>
+          <p:cNvSpPr>
+            <a:spLocks noGrp="1"/>
+          </p:cNvSpPr>
+          <p:nvPr>
+            <p:ph idx="1"/>
+          </p:nvPr>
+        </p:nvSpPr>
+        <p:spPr/>
+        <p:txBody>
+          <a:bodyPr/>
+          <a:lstStyle/>
+          <a:p>
+            <a:endParaRPr lang="ko-KR" altLang="en-US"/>
+          </a:p>
+        </p:txBody>
+      </p:sp>
+      <p:pic>
+        <p:nvPicPr>
+          <p:cNvPr id="5" name="그림 4">
+            <a:extLst>
+              <a:ext uri="{FF2B5EF4-FFF2-40B4-BE49-F238E27FC236}">
+                <a16:creationId xmlns:a16="http://schemas.microsoft.com/office/drawing/2014/main" id="{C0202969-F1E3-3B50-E391-8094A0BA4533}"/>
+              </a:ext>
+            </a:extLst>
+          </p:cNvPr>
+          <p:cNvPicPr>
+            <a:picLocks noChangeAspect="1"/>
+          </p:cNvPicPr>
+          <p:nvPr/>
+        </p:nvPicPr>
+        <p:blipFill>
+          <a:blip r:embed="rId2"/>
+          <a:stretch>
+            <a:fillRect/>
+          </a:stretch>
+        </p:blipFill>
+        <p:spPr>
+          <a:xfrm>
+            <a:off x="3782292" y="1228725"/>
+            <a:ext cx="7620000" cy="4400550"/>
+          </a:xfrm>
+          <a:prstGeom prst="rect">
+            <a:avLst/>
+          </a:prstGeom>
+        </p:spPr>
+      </p:pic>
+    </p:spTree>
+    <p:extLst>
+      <p:ext uri="{BB962C8B-B14F-4D97-AF65-F5344CB8AC3E}">
+        <p14:creationId xmlns:p14="http://schemas.microsoft.com/office/powerpoint/2010/main" val="4238907645"/>
       </p:ext>
     </p:extLst>
   </p:cSld>
@@ -11912,7 +12532,7 @@
           <p:cNvPr id="2" name="Title 1">
             <a:extLst>
               <a:ext uri="{FF2B5EF4-FFF2-40B4-BE49-F238E27FC236}">
-                <a16:creationId xmlns="" xmlns:a16="http://schemas.microsoft.com/office/drawing/2014/main" id="{BF463CB3-2956-E8D2-C23D-A3BAA7295DEC}"/>
+                <a16:creationId xmlns:a16="http://schemas.microsoft.com/office/drawing/2014/main" id="{BF463CB3-2956-E8D2-C23D-A3BAA7295DEC}"/>
               </a:ext>
             </a:extLst>
           </p:cNvPr>
@@ -11935,10 +12555,9 @@
           <a:lstStyle/>
           <a:p>
             <a:r>
-              <a:rPr lang="en-US" altLang="ko-KR" dirty="0" smtClean="0"/>
+              <a:rPr lang="en-US" altLang="ko-KR" dirty="0"/>
               <a:t>Greedy</a:t>
             </a:r>
-            <a:endParaRPr lang="en-US" altLang="ko-KR" dirty="0"/>
           </a:p>
         </p:txBody>
       </p:sp>
@@ -11977,7 +12596,7 @@
           <p:cNvPr id="5" name="Picture Placeholder 4">
             <a:extLst>
               <a:ext uri="{FF2B5EF4-FFF2-40B4-BE49-F238E27FC236}">
-                <a16:creationId xmlns="" xmlns:a16="http://schemas.microsoft.com/office/drawing/2014/main" id="{0103C39C-4BAC-4FDE-81AE-2CD3FF5092E7}"/>
+                <a16:creationId xmlns:a16="http://schemas.microsoft.com/office/drawing/2014/main" id="{0103C39C-4BAC-4FDE-81AE-2CD3FF5092E7}"/>
               </a:ext>
             </a:extLst>
           </p:cNvPr>
@@ -12002,7 +12621,7 @@
           <p:cNvPr id="6" name="Picture 5">
             <a:extLst>
               <a:ext uri="{FF2B5EF4-FFF2-40B4-BE49-F238E27FC236}">
-                <a16:creationId xmlns="" xmlns:a16="http://schemas.microsoft.com/office/drawing/2014/main" id="{D6AA967D-A62A-4B7E-8A7D-BD6190A7F53B}"/>
+                <a16:creationId xmlns:a16="http://schemas.microsoft.com/office/drawing/2014/main" id="{D6AA967D-A62A-4B7E-8A7D-BD6190A7F53B}"/>
               </a:ext>
             </a:extLst>
           </p:cNvPr>
@@ -12032,7 +12651,7 @@
           <p:cNvPr id="14" name="Content Placeholder 2">
             <a:extLst>
               <a:ext uri="{FF2B5EF4-FFF2-40B4-BE49-F238E27FC236}">
-                <a16:creationId xmlns="" xmlns:a16="http://schemas.microsoft.com/office/drawing/2014/main" id="{9CED9542-E80C-4BEB-8AF2-96515C5E8434}"/>
+                <a16:creationId xmlns:a16="http://schemas.microsoft.com/office/drawing/2014/main" id="{9CED9542-E80C-4BEB-8AF2-96515C5E8434}"/>
               </a:ext>
             </a:extLst>
           </p:cNvPr>
@@ -12057,19 +12676,15 @@
           <a:lstStyle/>
           <a:p>
             <a:r>
-              <a:rPr lang="en-US" b="1" dirty="0" smtClean="0"/>
+              <a:rPr lang="en-US" b="1" dirty="0"/>
               <a:t>Greedy Algorithm Definition</a:t>
             </a:r>
           </a:p>
           <a:p>
             <a:pPr lvl="1"/>
             <a:r>
-              <a:rPr lang="en-US" dirty="0" smtClean="0"/>
-              <a:t>Solution </a:t>
-            </a:r>
-            <a:r>
               <a:rPr lang="en-US" dirty="0"/>
-              <a:t>is determined based on making the locally optimal choice at any given moment. In other words, we choose the best decision from the viewpoint of the current stage of the solution.</a:t>
+              <a:t>Solution is determined based on making the locally optimal choice at any given moment. In other words, we choose the best decision from the viewpoint of the current stage of the solution.</a:t>
             </a:r>
           </a:p>
         </p:txBody>
@@ -12079,7 +12694,7 @@
           <p:cNvPr id="15" name="Content Placeholder 2">
             <a:extLst>
               <a:ext uri="{FF2B5EF4-FFF2-40B4-BE49-F238E27FC236}">
-                <a16:creationId xmlns="" xmlns:a16="http://schemas.microsoft.com/office/drawing/2014/main" id="{176E4F11-9C99-45D1-9FB3-4DDF3111628C}"/>
+                <a16:creationId xmlns:a16="http://schemas.microsoft.com/office/drawing/2014/main" id="{176E4F11-9C99-45D1-9FB3-4DDF3111628C}"/>
               </a:ext>
             </a:extLst>
           </p:cNvPr>
@@ -12295,10 +12910,9 @@
           </a:lstStyle>
           <a:p>
             <a:r>
-              <a:rPr lang="en-US" b="1" dirty="0" smtClean="0"/>
+              <a:rPr lang="en-US" b="1" dirty="0"/>
               <a:t>Trade off</a:t>
             </a:r>
-            <a:endParaRPr lang="en-US" b="1" dirty="0"/>
           </a:p>
           <a:p>
             <a:pPr lvl="1"/>
@@ -12306,7 +12920,6 @@
               <a:rPr lang="en-US" dirty="0"/>
               <a:t>If it is not the best approach, then it often returns a result which is approximately correct but suboptimal. </a:t>
             </a:r>
-            <a:endParaRPr lang="en-US" dirty="0" smtClean="0"/>
           </a:p>
           <a:p>
             <a:pPr lvl="1"/>
@@ -12352,330 +12965,7 @@
           <p:cNvPr id="2" name="Title 1">
             <a:extLst>
               <a:ext uri="{FF2B5EF4-FFF2-40B4-BE49-F238E27FC236}">
-                <a16:creationId xmlns="" xmlns:a16="http://schemas.microsoft.com/office/drawing/2014/main" id="{B7545968-70F7-0180-6448-3547E442EF4A}"/>
-              </a:ext>
-            </a:extLst>
-          </p:cNvPr>
-          <p:cNvSpPr>
-            <a:spLocks noGrp="1"/>
-          </p:cNvSpPr>
-          <p:nvPr>
-            <p:ph type="title"/>
-          </p:nvPr>
-        </p:nvSpPr>
-        <p:spPr>
-          <a:xfrm>
-            <a:off x="838200" y="365125"/>
-            <a:ext cx="10515600" cy="1325563"/>
-          </a:xfrm>
-          <a:noFill/>
-        </p:spPr>
-        <p:txBody>
-          <a:bodyPr anchor="ctr">
-            <a:noAutofit/>
-          </a:bodyPr>
-          <a:lstStyle/>
-          <a:p>
-            <a:r>
-              <a:rPr lang="en-US" dirty="0" err="1" smtClean="0"/>
-              <a:t>Canoist</a:t>
-            </a:r>
-            <a:endParaRPr lang="en-US" dirty="0"/>
-          </a:p>
-        </p:txBody>
-      </p:sp>
-      <p:pic>
-        <p:nvPicPr>
-          <p:cNvPr id="3" name="Picture 2"/>
-          <p:cNvPicPr>
-            <a:picLocks noChangeAspect="1"/>
-          </p:cNvPicPr>
-          <p:nvPr/>
-        </p:nvPicPr>
-        <p:blipFill>
-          <a:blip r:embed="rId3"/>
-          <a:stretch>
-            <a:fillRect/>
-          </a:stretch>
-        </p:blipFill>
-        <p:spPr>
-          <a:xfrm>
-            <a:off x="1021404" y="1690688"/>
-            <a:ext cx="1324583" cy="1324583"/>
-          </a:xfrm>
-          <a:prstGeom prst="rect">
-            <a:avLst/>
-          </a:prstGeom>
-        </p:spPr>
-      </p:pic>
-      <p:pic>
-        <p:nvPicPr>
-          <p:cNvPr id="5" name="Picture 4"/>
-          <p:cNvPicPr>
-            <a:picLocks noChangeAspect="1"/>
-          </p:cNvPicPr>
-          <p:nvPr/>
-        </p:nvPicPr>
-        <p:blipFill>
-          <a:blip r:embed="rId3"/>
-          <a:stretch>
-            <a:fillRect/>
-          </a:stretch>
-        </p:blipFill>
-        <p:spPr>
-          <a:xfrm>
-            <a:off x="2529191" y="1690688"/>
-            <a:ext cx="1324583" cy="1324583"/>
-          </a:xfrm>
-          <a:prstGeom prst="rect">
-            <a:avLst/>
-          </a:prstGeom>
-        </p:spPr>
-      </p:pic>
-      <p:pic>
-        <p:nvPicPr>
-          <p:cNvPr id="6" name="Picture 5"/>
-          <p:cNvPicPr>
-            <a:picLocks noChangeAspect="1"/>
-          </p:cNvPicPr>
-          <p:nvPr/>
-        </p:nvPicPr>
-        <p:blipFill>
-          <a:blip r:embed="rId3"/>
-          <a:stretch>
-            <a:fillRect/>
-          </a:stretch>
-        </p:blipFill>
-        <p:spPr>
-          <a:xfrm>
-            <a:off x="4109125" y="1690688"/>
-            <a:ext cx="1324583" cy="1324583"/>
-          </a:xfrm>
-          <a:prstGeom prst="rect">
-            <a:avLst/>
-          </a:prstGeom>
-        </p:spPr>
-      </p:pic>
-      <p:pic>
-        <p:nvPicPr>
-          <p:cNvPr id="7" name="Picture 6"/>
-          <p:cNvPicPr>
-            <a:picLocks noChangeAspect="1"/>
-          </p:cNvPicPr>
-          <p:nvPr/>
-        </p:nvPicPr>
-        <p:blipFill>
-          <a:blip r:embed="rId3"/>
-          <a:stretch>
-            <a:fillRect/>
-          </a:stretch>
-        </p:blipFill>
-        <p:spPr>
-          <a:xfrm>
-            <a:off x="5689059" y="1690687"/>
-            <a:ext cx="1324583" cy="1324583"/>
-          </a:xfrm>
-          <a:prstGeom prst="rect">
-            <a:avLst/>
-          </a:prstGeom>
-        </p:spPr>
-      </p:pic>
-      <p:pic>
-        <p:nvPicPr>
-          <p:cNvPr id="8" name="Picture 7"/>
-          <p:cNvPicPr>
-            <a:picLocks noChangeAspect="1"/>
-          </p:cNvPicPr>
-          <p:nvPr/>
-        </p:nvPicPr>
-        <p:blipFill>
-          <a:blip r:embed="rId3"/>
-          <a:stretch>
-            <a:fillRect/>
-          </a:stretch>
-        </p:blipFill>
-        <p:spPr>
-          <a:xfrm>
-            <a:off x="7311954" y="1690686"/>
-            <a:ext cx="1324583" cy="1324583"/>
-          </a:xfrm>
-          <a:prstGeom prst="rect">
-            <a:avLst/>
-          </a:prstGeom>
-        </p:spPr>
-      </p:pic>
-      <p:pic>
-        <p:nvPicPr>
-          <p:cNvPr id="4" name="Picture 3"/>
-          <p:cNvPicPr>
-            <a:picLocks noChangeAspect="1"/>
-          </p:cNvPicPr>
-          <p:nvPr/>
-        </p:nvPicPr>
-        <p:blipFill>
-          <a:blip r:embed="rId4"/>
-          <a:stretch>
-            <a:fillRect/>
-          </a:stretch>
-        </p:blipFill>
-        <p:spPr>
-          <a:xfrm>
-            <a:off x="2679159" y="3715660"/>
-            <a:ext cx="2859931" cy="2859931"/>
-          </a:xfrm>
-          <a:prstGeom prst="rect">
-            <a:avLst/>
-          </a:prstGeom>
-        </p:spPr>
-      </p:pic>
-      <p:sp>
-        <p:nvSpPr>
-          <p:cNvPr id="13" name="Title 1">
-            <a:extLst>
-              <a:ext uri="{FF2B5EF4-FFF2-40B4-BE49-F238E27FC236}">
-                <a16:creationId xmlns="" xmlns:a16="http://schemas.microsoft.com/office/drawing/2014/main" id="{B7545968-70F7-0180-6448-3547E442EF4A}"/>
-              </a:ext>
-            </a:extLst>
-          </p:cNvPr>
-          <p:cNvSpPr txBox="1">
-            <a:spLocks/>
-          </p:cNvSpPr>
-          <p:nvPr/>
-        </p:nvSpPr>
-        <p:spPr>
-          <a:xfrm>
-            <a:off x="1093550" y="2702682"/>
-            <a:ext cx="10515600" cy="1325563"/>
-          </a:xfrm>
-          <a:prstGeom prst="rect">
-            <a:avLst/>
-          </a:prstGeom>
-          <a:noFill/>
-        </p:spPr>
-        <p:txBody>
-          <a:bodyPr vert="horz" lIns="91440" tIns="45720" rIns="91440" bIns="45720" rtlCol="0" anchor="ctr" anchorCtr="0">
-            <a:noAutofit/>
-          </a:bodyPr>
-          <a:lstStyle>
-            <a:lvl1pPr algn="l" defTabSz="914400" rtl="0" eaLnBrk="1" latinLnBrk="0" hangingPunct="1">
-              <a:lnSpc>
-                <a:spcPct val="90000"/>
-              </a:lnSpc>
-              <a:spcBef>
-                <a:spcPct val="0"/>
-              </a:spcBef>
-              <a:buNone/>
-              <a:defRPr sz="4400" kern="1200">
-                <a:solidFill>
-                  <a:schemeClr val="tx1"/>
-                </a:solidFill>
-                <a:latin typeface="+mj-lt"/>
-                <a:ea typeface="+mj-ea"/>
-                <a:cs typeface="+mj-cs"/>
-              </a:defRPr>
-            </a:lvl1pPr>
-          </a:lstStyle>
-          <a:p>
-            <a:r>
-              <a:rPr lang="en-US" dirty="0" smtClean="0"/>
-              <a:t>1        2        3        4        5</a:t>
-            </a:r>
-            <a:endParaRPr lang="en-US" dirty="0"/>
-          </a:p>
-        </p:txBody>
-      </p:sp>
-      <p:sp>
-        <p:nvSpPr>
-          <p:cNvPr id="14" name="Title 1">
-            <a:extLst>
-              <a:ext uri="{FF2B5EF4-FFF2-40B4-BE49-F238E27FC236}">
-                <a16:creationId xmlns="" xmlns:a16="http://schemas.microsoft.com/office/drawing/2014/main" id="{B7545968-70F7-0180-6448-3547E442EF4A}"/>
-              </a:ext>
-            </a:extLst>
-          </p:cNvPr>
-          <p:cNvSpPr txBox="1">
-            <a:spLocks/>
-          </p:cNvSpPr>
-          <p:nvPr/>
-        </p:nvSpPr>
-        <p:spPr>
-          <a:xfrm>
-            <a:off x="5941979" y="4807423"/>
-            <a:ext cx="2521085" cy="1325563"/>
-          </a:xfrm>
-          <a:prstGeom prst="rect">
-            <a:avLst/>
-          </a:prstGeom>
-          <a:noFill/>
-        </p:spPr>
-        <p:txBody>
-          <a:bodyPr vert="horz" lIns="91440" tIns="45720" rIns="91440" bIns="45720" rtlCol="0" anchor="ctr" anchorCtr="0">
-            <a:noAutofit/>
-          </a:bodyPr>
-          <a:lstStyle>
-            <a:lvl1pPr algn="l" defTabSz="914400" rtl="0" eaLnBrk="1" latinLnBrk="0" hangingPunct="1">
-              <a:lnSpc>
-                <a:spcPct val="90000"/>
-              </a:lnSpc>
-              <a:spcBef>
-                <a:spcPct val="0"/>
-              </a:spcBef>
-              <a:buNone/>
-              <a:defRPr sz="4400" kern="1200">
-                <a:solidFill>
-                  <a:schemeClr val="tx1"/>
-                </a:solidFill>
-                <a:latin typeface="+mj-lt"/>
-                <a:ea typeface="+mj-ea"/>
-                <a:cs typeface="+mj-cs"/>
-              </a:defRPr>
-            </a:lvl1pPr>
-          </a:lstStyle>
-          <a:p>
-            <a:r>
-              <a:rPr lang="en-US" dirty="0" smtClean="0"/>
-              <a:t>K = 6</a:t>
-            </a:r>
-            <a:endParaRPr lang="en-US" dirty="0"/>
-          </a:p>
-        </p:txBody>
-      </p:sp>
-    </p:spTree>
-    <p:extLst>
-      <p:ext uri="{BB962C8B-B14F-4D97-AF65-F5344CB8AC3E}">
-        <p14:creationId xmlns:p14="http://schemas.microsoft.com/office/powerpoint/2010/main" val="4259977132"/>
-      </p:ext>
-    </p:extLst>
-  </p:cSld>
-  <p:clrMapOvr>
-    <a:masterClrMapping/>
-  </p:clrMapOvr>
-</p:sld>
-</file>
-
-<file path=ppt/slides/slide5.xml><?xml version="1.0" encoding="utf-8"?>
-<p:sld xmlns:a="http://schemas.openxmlformats.org/drawingml/2006/main" xmlns:r="http://schemas.openxmlformats.org/officeDocument/2006/relationships" xmlns:p="http://schemas.openxmlformats.org/presentationml/2006/main">
-  <p:cSld>
-    <p:spTree>
-      <p:nvGrpSpPr>
-        <p:cNvPr id="1" name=""/>
-        <p:cNvGrpSpPr/>
-        <p:nvPr/>
-      </p:nvGrpSpPr>
-      <p:grpSpPr>
-        <a:xfrm>
-          <a:off x="0" y="0"/>
-          <a:ext cx="0" cy="0"/>
-          <a:chOff x="0" y="0"/>
-          <a:chExt cx="0" cy="0"/>
-        </a:xfrm>
-      </p:grpSpPr>
-      <p:sp>
-        <p:nvSpPr>
-          <p:cNvPr id="2" name="Title 1">
-            <a:extLst>
-              <a:ext uri="{FF2B5EF4-FFF2-40B4-BE49-F238E27FC236}">
-                <a16:creationId xmlns="" xmlns:a16="http://schemas.microsoft.com/office/drawing/2014/main" id="{5D030A76-B788-B363-104E-266B7C7F7208}"/>
+                <a16:creationId xmlns:a16="http://schemas.microsoft.com/office/drawing/2014/main" id="{5D030A76-B788-B363-104E-266B7C7F7208}"/>
               </a:ext>
             </a:extLst>
           </p:cNvPr>
@@ -12698,10 +12988,9 @@
           <a:lstStyle/>
           <a:p>
             <a:r>
-              <a:rPr lang="en-US" dirty="0" smtClean="0"/>
+              <a:rPr lang="en-US" dirty="0"/>
               <a:t>Assign Candy</a:t>
             </a:r>
-            <a:endParaRPr lang="en-US" dirty="0"/>
           </a:p>
         </p:txBody>
       </p:sp>
@@ -12974,7 +13263,7 @@
           <p:cNvPr id="17" name="Title 1">
             <a:extLst>
               <a:ext uri="{FF2B5EF4-FFF2-40B4-BE49-F238E27FC236}">
-                <a16:creationId xmlns="" xmlns:a16="http://schemas.microsoft.com/office/drawing/2014/main" id="{B7545968-70F7-0180-6448-3547E442EF4A}"/>
+                <a16:creationId xmlns:a16="http://schemas.microsoft.com/office/drawing/2014/main" id="{B7545968-70F7-0180-6448-3547E442EF4A}"/>
               </a:ext>
             </a:extLst>
           </p:cNvPr>
@@ -13018,14 +13307,9 @@
           </a:lstStyle>
           <a:p>
             <a:r>
-              <a:rPr lang="en-US" dirty="0" smtClean="0"/>
-              <a:t>3</a:t>
+              <a:rPr lang="en-US" dirty="0"/>
+              <a:t>3        3        4        5        8</a:t>
             </a:r>
-            <a:r>
-              <a:rPr lang="en-US" dirty="0" smtClean="0"/>
-              <a:t>        3        4        5        8</a:t>
-            </a:r>
-            <a:endParaRPr lang="en-US" dirty="0"/>
           </a:p>
         </p:txBody>
       </p:sp>
@@ -13034,7 +13318,7 @@
           <p:cNvPr id="18" name="Title 1">
             <a:extLst>
               <a:ext uri="{FF2B5EF4-FFF2-40B4-BE49-F238E27FC236}">
-                <a16:creationId xmlns="" xmlns:a16="http://schemas.microsoft.com/office/drawing/2014/main" id="{B7545968-70F7-0180-6448-3547E442EF4A}"/>
+                <a16:creationId xmlns:a16="http://schemas.microsoft.com/office/drawing/2014/main" id="{B7545968-70F7-0180-6448-3547E442EF4A}"/>
               </a:ext>
             </a:extLst>
           </p:cNvPr>
@@ -13078,14 +13362,9 @@
           </a:lstStyle>
           <a:p>
             <a:r>
-              <a:rPr lang="en-US" dirty="0" smtClean="0"/>
-              <a:t>1</a:t>
+              <a:rPr lang="en-US" dirty="0"/>
+              <a:t>1        1        2        4        4       10</a:t>
             </a:r>
-            <a:r>
-              <a:rPr lang="en-US" dirty="0" smtClean="0"/>
-              <a:t>        1        2        4        4       10</a:t>
-            </a:r>
-            <a:endParaRPr lang="en-US" dirty="0"/>
           </a:p>
         </p:txBody>
       </p:sp>
@@ -13102,7 +13381,499 @@
 </p:sld>
 </file>
 
+<file path=ppt/slides/slide5.xml><?xml version="1.0" encoding="utf-8"?>
+<p:sld xmlns:a="http://schemas.openxmlformats.org/drawingml/2006/main" xmlns:r="http://schemas.openxmlformats.org/officeDocument/2006/relationships" xmlns:p="http://schemas.openxmlformats.org/presentationml/2006/main">
+  <p:cSld>
+    <p:spTree>
+      <p:nvGrpSpPr>
+        <p:cNvPr id="1" name=""/>
+        <p:cNvGrpSpPr/>
+        <p:nvPr/>
+      </p:nvGrpSpPr>
+      <p:grpSpPr>
+        <a:xfrm>
+          <a:off x="0" y="0"/>
+          <a:ext cx="0" cy="0"/>
+          <a:chOff x="0" y="0"/>
+          <a:chExt cx="0" cy="0"/>
+        </a:xfrm>
+      </p:grpSpPr>
+      <p:sp>
+        <p:nvSpPr>
+          <p:cNvPr id="5" name="Title 1">
+            <a:extLst>
+              <a:ext uri="{FF2B5EF4-FFF2-40B4-BE49-F238E27FC236}">
+                <a16:creationId xmlns:a16="http://schemas.microsoft.com/office/drawing/2014/main" id="{E179B7D6-6ED1-575F-CF0E-901670A0D2ED}"/>
+              </a:ext>
+            </a:extLst>
+          </p:cNvPr>
+          <p:cNvSpPr txBox="1">
+            <a:spLocks/>
+          </p:cNvSpPr>
+          <p:nvPr/>
+        </p:nvSpPr>
+        <p:spPr>
+          <a:xfrm>
+            <a:off x="609957" y="1119031"/>
+            <a:ext cx="4384736" cy="4619938"/>
+          </a:xfrm>
+          <a:prstGeom prst="rect">
+            <a:avLst/>
+          </a:prstGeom>
+        </p:spPr>
+        <p:txBody>
+          <a:bodyPr vert="horz" lIns="91440" tIns="45720" rIns="91440" bIns="45720" rtlCol="0" anchor="ctr" anchorCtr="0">
+            <a:normAutofit/>
+          </a:bodyPr>
+          <a:lstStyle>
+            <a:lvl1pPr algn="l" defTabSz="914400" rtl="0" eaLnBrk="1" latinLnBrk="0" hangingPunct="1">
+              <a:lnSpc>
+                <a:spcPct val="90000"/>
+              </a:lnSpc>
+              <a:spcBef>
+                <a:spcPct val="0"/>
+              </a:spcBef>
+              <a:buNone/>
+              <a:defRPr sz="4400" kern="1200">
+                <a:solidFill>
+                  <a:schemeClr val="tx1"/>
+                </a:solidFill>
+                <a:latin typeface="+mj-lt"/>
+                <a:ea typeface="+mj-ea"/>
+                <a:cs typeface="+mj-cs"/>
+              </a:defRPr>
+            </a:lvl1pPr>
+          </a:lstStyle>
+          <a:p>
+            <a:pPr algn="ctr">
+              <a:spcAft>
+                <a:spcPts val="600"/>
+              </a:spcAft>
+            </a:pPr>
+            <a:r>
+              <a:rPr lang="en-US" kern="1200">
+                <a:solidFill>
+                  <a:schemeClr val="bg1"/>
+                </a:solidFill>
+                <a:latin typeface="+mj-lt"/>
+                <a:ea typeface="+mj-ea"/>
+                <a:cs typeface="+mj-cs"/>
+              </a:rPr>
+              <a:t>Best time to buy and sell stock</a:t>
+            </a:r>
+          </a:p>
+        </p:txBody>
+      </p:sp>
+      <p:pic>
+        <p:nvPicPr>
+          <p:cNvPr id="10" name="그림 9" descr="스크린샷, 그린이(가) 표시된 사진&#10;&#10;AI 생성 콘텐츠는 정확하지 않을 수 있습니다.">
+            <a:extLst>
+              <a:ext uri="{FF2B5EF4-FFF2-40B4-BE49-F238E27FC236}">
+                <a16:creationId xmlns:a16="http://schemas.microsoft.com/office/drawing/2014/main" id="{34FA0BB1-A1FF-BCAE-CE5A-9CCFF97316DD}"/>
+              </a:ext>
+            </a:extLst>
+          </p:cNvPr>
+          <p:cNvPicPr>
+            <a:picLocks noChangeAspect="1"/>
+          </p:cNvPicPr>
+          <p:nvPr/>
+        </p:nvPicPr>
+        <p:blipFill>
+          <a:blip r:embed="rId2"/>
+          <a:stretch>
+            <a:fillRect/>
+          </a:stretch>
+        </p:blipFill>
+        <p:spPr>
+          <a:xfrm>
+            <a:off x="5801708" y="1863646"/>
+            <a:ext cx="5552091" cy="3150811"/>
+          </a:xfrm>
+          <a:prstGeom prst="rect">
+            <a:avLst/>
+          </a:prstGeom>
+          <a:noFill/>
+        </p:spPr>
+      </p:pic>
+      <p:sp>
+        <p:nvSpPr>
+          <p:cNvPr id="8" name="AutoShape 2" descr="Why CAE Stock Popped 9% After Earnings | The Motley Fool Canada">
+            <a:extLst>
+              <a:ext uri="{FF2B5EF4-FFF2-40B4-BE49-F238E27FC236}">
+                <a16:creationId xmlns:a16="http://schemas.microsoft.com/office/drawing/2014/main" id="{392E1C53-3565-9FB9-0B3D-F27D9CD5F909}"/>
+              </a:ext>
+            </a:extLst>
+          </p:cNvPr>
+          <p:cNvSpPr>
+            <a:spLocks noChangeAspect="1" noChangeArrowheads="1"/>
+          </p:cNvSpPr>
+          <p:nvPr/>
+        </p:nvSpPr>
+        <p:spPr bwMode="auto">
+          <a:xfrm>
+            <a:off x="5943600" y="3276600"/>
+            <a:ext cx="304800" cy="304800"/>
+          </a:xfrm>
+          <a:prstGeom prst="rect">
+            <a:avLst/>
+          </a:prstGeom>
+          <a:noFill/>
+          <a:extLst>
+            <a:ext uri="{909E8E84-426E-40DD-AFC4-6F175D3DCCD1}">
+              <a14:hiddenFill xmlns:a14="http://schemas.microsoft.com/office/drawing/2010/main">
+                <a:solidFill>
+                  <a:srgbClr val="FFFFFF"/>
+                </a:solidFill>
+              </a14:hiddenFill>
+            </a:ext>
+          </a:extLst>
+        </p:spPr>
+        <p:txBody>
+          <a:bodyPr vert="horz" wrap="square" lIns="91440" tIns="45720" rIns="91440" bIns="45720" numCol="1" anchor="t" anchorCtr="0" compatLnSpc="1">
+            <a:prstTxWarp prst="textNoShape">
+              <a:avLst/>
+            </a:prstTxWarp>
+          </a:bodyPr>
+          <a:lstStyle/>
+          <a:p>
+            <a:endParaRPr lang="ko-KR" altLang="en-US"/>
+          </a:p>
+        </p:txBody>
+      </p:sp>
+    </p:spTree>
+    <p:extLst>
+      <p:ext uri="{BB962C8B-B14F-4D97-AF65-F5344CB8AC3E}">
+        <p14:creationId xmlns:p14="http://schemas.microsoft.com/office/powerpoint/2010/main" val="1441609754"/>
+      </p:ext>
+    </p:extLst>
+  </p:cSld>
+  <p:clrMapOvr>
+    <a:masterClrMapping/>
+  </p:clrMapOvr>
+</p:sld>
+</file>
+
 <file path=ppt/slides/slide6.xml><?xml version="1.0" encoding="utf-8"?>
+<p:sld xmlns:a="http://schemas.openxmlformats.org/drawingml/2006/main" xmlns:r="http://schemas.openxmlformats.org/officeDocument/2006/relationships" xmlns:p="http://schemas.openxmlformats.org/presentationml/2006/main">
+  <p:cSld>
+    <p:spTree>
+      <p:nvGrpSpPr>
+        <p:cNvPr id="1" name=""/>
+        <p:cNvGrpSpPr/>
+        <p:nvPr/>
+      </p:nvGrpSpPr>
+      <p:grpSpPr>
+        <a:xfrm>
+          <a:off x="0" y="0"/>
+          <a:ext cx="0" cy="0"/>
+          <a:chOff x="0" y="0"/>
+          <a:chExt cx="0" cy="0"/>
+        </a:xfrm>
+      </p:grpSpPr>
+      <p:sp>
+        <p:nvSpPr>
+          <p:cNvPr id="2" name="Title 1">
+            <a:extLst>
+              <a:ext uri="{FF2B5EF4-FFF2-40B4-BE49-F238E27FC236}">
+                <a16:creationId xmlns:a16="http://schemas.microsoft.com/office/drawing/2014/main" id="{B7545968-70F7-0180-6448-3547E442EF4A}"/>
+              </a:ext>
+            </a:extLst>
+          </p:cNvPr>
+          <p:cNvSpPr>
+            <a:spLocks noGrp="1"/>
+          </p:cNvSpPr>
+          <p:nvPr>
+            <p:ph type="title"/>
+          </p:nvPr>
+        </p:nvSpPr>
+        <p:spPr>
+          <a:xfrm>
+            <a:off x="838200" y="365125"/>
+            <a:ext cx="10515600" cy="1325563"/>
+          </a:xfrm>
+          <a:noFill/>
+        </p:spPr>
+        <p:txBody>
+          <a:bodyPr anchor="ctr">
+            <a:noAutofit/>
+          </a:bodyPr>
+          <a:lstStyle/>
+          <a:p>
+            <a:r>
+              <a:rPr lang="en-US" dirty="0"/>
+              <a:t>Canoeist</a:t>
+            </a:r>
+          </a:p>
+        </p:txBody>
+      </p:sp>
+      <p:pic>
+        <p:nvPicPr>
+          <p:cNvPr id="3" name="Picture 2"/>
+          <p:cNvPicPr>
+            <a:picLocks noChangeAspect="1"/>
+          </p:cNvPicPr>
+          <p:nvPr/>
+        </p:nvPicPr>
+        <p:blipFill>
+          <a:blip r:embed="rId3"/>
+          <a:stretch>
+            <a:fillRect/>
+          </a:stretch>
+        </p:blipFill>
+        <p:spPr>
+          <a:xfrm>
+            <a:off x="1021404" y="1690688"/>
+            <a:ext cx="1324583" cy="1324583"/>
+          </a:xfrm>
+          <a:prstGeom prst="rect">
+            <a:avLst/>
+          </a:prstGeom>
+        </p:spPr>
+      </p:pic>
+      <p:pic>
+        <p:nvPicPr>
+          <p:cNvPr id="5" name="Picture 4"/>
+          <p:cNvPicPr>
+            <a:picLocks noChangeAspect="1"/>
+          </p:cNvPicPr>
+          <p:nvPr/>
+        </p:nvPicPr>
+        <p:blipFill>
+          <a:blip r:embed="rId3"/>
+          <a:stretch>
+            <a:fillRect/>
+          </a:stretch>
+        </p:blipFill>
+        <p:spPr>
+          <a:xfrm>
+            <a:off x="2529191" y="1690688"/>
+            <a:ext cx="1324583" cy="1324583"/>
+          </a:xfrm>
+          <a:prstGeom prst="rect">
+            <a:avLst/>
+          </a:prstGeom>
+        </p:spPr>
+      </p:pic>
+      <p:pic>
+        <p:nvPicPr>
+          <p:cNvPr id="6" name="Picture 5"/>
+          <p:cNvPicPr>
+            <a:picLocks noChangeAspect="1"/>
+          </p:cNvPicPr>
+          <p:nvPr/>
+        </p:nvPicPr>
+        <p:blipFill>
+          <a:blip r:embed="rId3"/>
+          <a:stretch>
+            <a:fillRect/>
+          </a:stretch>
+        </p:blipFill>
+        <p:spPr>
+          <a:xfrm>
+            <a:off x="4109125" y="1690688"/>
+            <a:ext cx="1324583" cy="1324583"/>
+          </a:xfrm>
+          <a:prstGeom prst="rect">
+            <a:avLst/>
+          </a:prstGeom>
+        </p:spPr>
+      </p:pic>
+      <p:pic>
+        <p:nvPicPr>
+          <p:cNvPr id="7" name="Picture 6"/>
+          <p:cNvPicPr>
+            <a:picLocks noChangeAspect="1"/>
+          </p:cNvPicPr>
+          <p:nvPr/>
+        </p:nvPicPr>
+        <p:blipFill>
+          <a:blip r:embed="rId3"/>
+          <a:stretch>
+            <a:fillRect/>
+          </a:stretch>
+        </p:blipFill>
+        <p:spPr>
+          <a:xfrm>
+            <a:off x="5689059" y="1690687"/>
+            <a:ext cx="1324583" cy="1324583"/>
+          </a:xfrm>
+          <a:prstGeom prst="rect">
+            <a:avLst/>
+          </a:prstGeom>
+        </p:spPr>
+      </p:pic>
+      <p:pic>
+        <p:nvPicPr>
+          <p:cNvPr id="8" name="Picture 7"/>
+          <p:cNvPicPr>
+            <a:picLocks noChangeAspect="1"/>
+          </p:cNvPicPr>
+          <p:nvPr/>
+        </p:nvPicPr>
+        <p:blipFill>
+          <a:blip r:embed="rId3"/>
+          <a:stretch>
+            <a:fillRect/>
+          </a:stretch>
+        </p:blipFill>
+        <p:spPr>
+          <a:xfrm>
+            <a:off x="7311954" y="1690686"/>
+            <a:ext cx="1324583" cy="1324583"/>
+          </a:xfrm>
+          <a:prstGeom prst="rect">
+            <a:avLst/>
+          </a:prstGeom>
+        </p:spPr>
+      </p:pic>
+      <p:pic>
+        <p:nvPicPr>
+          <p:cNvPr id="4" name="Picture 3"/>
+          <p:cNvPicPr>
+            <a:picLocks noChangeAspect="1"/>
+          </p:cNvPicPr>
+          <p:nvPr/>
+        </p:nvPicPr>
+        <p:blipFill>
+          <a:blip r:embed="rId4"/>
+          <a:stretch>
+            <a:fillRect/>
+          </a:stretch>
+        </p:blipFill>
+        <p:spPr>
+          <a:xfrm>
+            <a:off x="2679159" y="3715660"/>
+            <a:ext cx="2859931" cy="2859931"/>
+          </a:xfrm>
+          <a:prstGeom prst="rect">
+            <a:avLst/>
+          </a:prstGeom>
+        </p:spPr>
+      </p:pic>
+      <p:sp>
+        <p:nvSpPr>
+          <p:cNvPr id="13" name="Title 1">
+            <a:extLst>
+              <a:ext uri="{FF2B5EF4-FFF2-40B4-BE49-F238E27FC236}">
+                <a16:creationId xmlns:a16="http://schemas.microsoft.com/office/drawing/2014/main" id="{B7545968-70F7-0180-6448-3547E442EF4A}"/>
+              </a:ext>
+            </a:extLst>
+          </p:cNvPr>
+          <p:cNvSpPr txBox="1">
+            <a:spLocks/>
+          </p:cNvSpPr>
+          <p:nvPr/>
+        </p:nvSpPr>
+        <p:spPr>
+          <a:xfrm>
+            <a:off x="1093550" y="2702682"/>
+            <a:ext cx="10515600" cy="1325563"/>
+          </a:xfrm>
+          <a:prstGeom prst="rect">
+            <a:avLst/>
+          </a:prstGeom>
+          <a:noFill/>
+        </p:spPr>
+        <p:txBody>
+          <a:bodyPr vert="horz" lIns="91440" tIns="45720" rIns="91440" bIns="45720" rtlCol="0" anchor="ctr" anchorCtr="0">
+            <a:noAutofit/>
+          </a:bodyPr>
+          <a:lstStyle>
+            <a:lvl1pPr algn="l" defTabSz="914400" rtl="0" eaLnBrk="1" latinLnBrk="0" hangingPunct="1">
+              <a:lnSpc>
+                <a:spcPct val="90000"/>
+              </a:lnSpc>
+              <a:spcBef>
+                <a:spcPct val="0"/>
+              </a:spcBef>
+              <a:buNone/>
+              <a:defRPr sz="4400" kern="1200">
+                <a:solidFill>
+                  <a:schemeClr val="tx1"/>
+                </a:solidFill>
+                <a:latin typeface="+mj-lt"/>
+                <a:ea typeface="+mj-ea"/>
+                <a:cs typeface="+mj-cs"/>
+              </a:defRPr>
+            </a:lvl1pPr>
+          </a:lstStyle>
+          <a:p>
+            <a:r>
+              <a:rPr lang="en-US" dirty="0"/>
+              <a:t>1        2        3        4        5</a:t>
+            </a:r>
+          </a:p>
+        </p:txBody>
+      </p:sp>
+      <p:sp>
+        <p:nvSpPr>
+          <p:cNvPr id="14" name="Title 1">
+            <a:extLst>
+              <a:ext uri="{FF2B5EF4-FFF2-40B4-BE49-F238E27FC236}">
+                <a16:creationId xmlns:a16="http://schemas.microsoft.com/office/drawing/2014/main" id="{B7545968-70F7-0180-6448-3547E442EF4A}"/>
+              </a:ext>
+            </a:extLst>
+          </p:cNvPr>
+          <p:cNvSpPr txBox="1">
+            <a:spLocks/>
+          </p:cNvSpPr>
+          <p:nvPr/>
+        </p:nvSpPr>
+        <p:spPr>
+          <a:xfrm>
+            <a:off x="5941979" y="4807423"/>
+            <a:ext cx="2521085" cy="1325563"/>
+          </a:xfrm>
+          <a:prstGeom prst="rect">
+            <a:avLst/>
+          </a:prstGeom>
+          <a:noFill/>
+        </p:spPr>
+        <p:txBody>
+          <a:bodyPr vert="horz" lIns="91440" tIns="45720" rIns="91440" bIns="45720" rtlCol="0" anchor="ctr" anchorCtr="0">
+            <a:noAutofit/>
+          </a:bodyPr>
+          <a:lstStyle>
+            <a:lvl1pPr algn="l" defTabSz="914400" rtl="0" eaLnBrk="1" latinLnBrk="0" hangingPunct="1">
+              <a:lnSpc>
+                <a:spcPct val="90000"/>
+              </a:lnSpc>
+              <a:spcBef>
+                <a:spcPct val="0"/>
+              </a:spcBef>
+              <a:buNone/>
+              <a:defRPr sz="4400" kern="1200">
+                <a:solidFill>
+                  <a:schemeClr val="tx1"/>
+                </a:solidFill>
+                <a:latin typeface="+mj-lt"/>
+                <a:ea typeface="+mj-ea"/>
+                <a:cs typeface="+mj-cs"/>
+              </a:defRPr>
+            </a:lvl1pPr>
+          </a:lstStyle>
+          <a:p>
+            <a:r>
+              <a:rPr lang="en-US" dirty="0"/>
+              <a:t>K = 6</a:t>
+            </a:r>
+          </a:p>
+        </p:txBody>
+      </p:sp>
+    </p:spTree>
+    <p:extLst>
+      <p:ext uri="{BB962C8B-B14F-4D97-AF65-F5344CB8AC3E}">
+        <p14:creationId xmlns:p14="http://schemas.microsoft.com/office/powerpoint/2010/main" val="4259977132"/>
+      </p:ext>
+    </p:extLst>
+  </p:cSld>
+  <p:clrMapOvr>
+    <a:masterClrMapping/>
+  </p:clrMapOvr>
+</p:sld>
+</file>
+
+<file path=ppt/slides/slide7.xml><?xml version="1.0" encoding="utf-8"?>
 <p:sld xmlns:a="http://schemas.openxmlformats.org/drawingml/2006/main" xmlns:r="http://schemas.openxmlformats.org/officeDocument/2006/relationships" xmlns:p="http://schemas.openxmlformats.org/presentationml/2006/main">
   <p:cSld>
     <p:spTree>
@@ -13110,7 +13881,7 @@
         <p:cNvPr id="1" name="">
           <a:extLst>
             <a:ext uri="{FF2B5EF4-FFF2-40B4-BE49-F238E27FC236}">
-              <a16:creationId xmlns="" xmlns:a16="http://schemas.microsoft.com/office/drawing/2014/main" id="{A378321A-BF11-5B5F-80FD-1E9B8BB22EC2}"/>
+              <a16:creationId xmlns:a16="http://schemas.microsoft.com/office/drawing/2014/main" id="{A378321A-BF11-5B5F-80FD-1E9B8BB22EC2}"/>
             </a:ext>
           </a:extLst>
         </p:cNvPr>
@@ -13130,7 +13901,7 @@
           <p:cNvPr id="2" name="Title 1">
             <a:extLst>
               <a:ext uri="{FF2B5EF4-FFF2-40B4-BE49-F238E27FC236}">
-                <a16:creationId xmlns="" xmlns:a16="http://schemas.microsoft.com/office/drawing/2014/main" id="{CF6D7973-2A7A-69A4-1427-C428EC5D87C9}"/>
+                <a16:creationId xmlns:a16="http://schemas.microsoft.com/office/drawing/2014/main" id="{CF6D7973-2A7A-69A4-1427-C428EC5D87C9}"/>
               </a:ext>
             </a:extLst>
           </p:cNvPr>
@@ -13153,10 +13924,9 @@
           <a:lstStyle/>
           <a:p>
             <a:r>
-              <a:rPr lang="en-US" dirty="0" smtClean="0"/>
+              <a:rPr lang="en-US" dirty="0"/>
               <a:t>Coin Change</a:t>
             </a:r>
-            <a:endParaRPr lang="en-US" dirty="0"/>
           </a:p>
         </p:txBody>
       </p:sp>
@@ -13261,7 +14031,7 @@
           <p:cNvPr id="9" name="Title 1">
             <a:extLst>
               <a:ext uri="{FF2B5EF4-FFF2-40B4-BE49-F238E27FC236}">
-                <a16:creationId xmlns="" xmlns:a16="http://schemas.microsoft.com/office/drawing/2014/main" id="{B7545968-70F7-0180-6448-3547E442EF4A}"/>
+                <a16:creationId xmlns:a16="http://schemas.microsoft.com/office/drawing/2014/main" id="{B7545968-70F7-0180-6448-3547E442EF4A}"/>
               </a:ext>
             </a:extLst>
           </p:cNvPr>
@@ -13305,14 +14075,9 @@
           </a:lstStyle>
           <a:p>
             <a:r>
-              <a:rPr lang="en-US" dirty="0" smtClean="0"/>
-              <a:t>1        2        </a:t>
+              <a:rPr lang="en-US" dirty="0"/>
+              <a:t>1        2           5</a:t>
             </a:r>
-            <a:r>
-              <a:rPr lang="en-US" dirty="0" smtClean="0"/>
-              <a:t>   5</a:t>
-            </a:r>
-            <a:endParaRPr lang="en-US" dirty="0"/>
           </a:p>
         </p:txBody>
       </p:sp>
@@ -13321,7 +14086,7 @@
           <p:cNvPr id="10" name="Title 1">
             <a:extLst>
               <a:ext uri="{FF2B5EF4-FFF2-40B4-BE49-F238E27FC236}">
-                <a16:creationId xmlns="" xmlns:a16="http://schemas.microsoft.com/office/drawing/2014/main" id="{B7545968-70F7-0180-6448-3547E442EF4A}"/>
+                <a16:creationId xmlns:a16="http://schemas.microsoft.com/office/drawing/2014/main" id="{B7545968-70F7-0180-6448-3547E442EF4A}"/>
               </a:ext>
             </a:extLst>
           </p:cNvPr>
@@ -13365,10 +14130,9 @@
           </a:lstStyle>
           <a:p>
             <a:r>
-              <a:rPr lang="en-US" dirty="0" smtClean="0"/>
+              <a:rPr lang="en-US" dirty="0"/>
               <a:t>13</a:t>
             </a:r>
-            <a:endParaRPr lang="en-US" dirty="0"/>
           </a:p>
         </p:txBody>
       </p:sp>
@@ -13385,7 +14149,7 @@
 </p:sld>
 </file>
 
-<file path=ppt/slides/slide7.xml><?xml version="1.0" encoding="utf-8"?>
+<file path=ppt/slides/slide8.xml><?xml version="1.0" encoding="utf-8"?>
 <p:sld xmlns:a="http://schemas.openxmlformats.org/drawingml/2006/main" xmlns:r="http://schemas.openxmlformats.org/officeDocument/2006/relationships" xmlns:p="http://schemas.openxmlformats.org/presentationml/2006/main">
   <p:cSld>
     <p:spTree>
@@ -13393,7 +14157,7 @@
         <p:cNvPr id="1" name="">
           <a:extLst>
             <a:ext uri="{FF2B5EF4-FFF2-40B4-BE49-F238E27FC236}">
-              <a16:creationId xmlns="" xmlns:a16="http://schemas.microsoft.com/office/drawing/2014/main" id="{A378321A-BF11-5B5F-80FD-1E9B8BB22EC2}"/>
+              <a16:creationId xmlns:a16="http://schemas.microsoft.com/office/drawing/2014/main" id="{A378321A-BF11-5B5F-80FD-1E9B8BB22EC2}"/>
             </a:ext>
           </a:extLst>
         </p:cNvPr>
@@ -13413,7 +14177,7 @@
           <p:cNvPr id="2" name="Title 1">
             <a:extLst>
               <a:ext uri="{FF2B5EF4-FFF2-40B4-BE49-F238E27FC236}">
-                <a16:creationId xmlns="" xmlns:a16="http://schemas.microsoft.com/office/drawing/2014/main" id="{CF6D7973-2A7A-69A4-1427-C428EC5D87C9}"/>
+                <a16:creationId xmlns:a16="http://schemas.microsoft.com/office/drawing/2014/main" id="{CF6D7973-2A7A-69A4-1427-C428EC5D87C9}"/>
               </a:ext>
             </a:extLst>
           </p:cNvPr>
@@ -13436,10 +14200,9 @@
           <a:lstStyle/>
           <a:p>
             <a:r>
-              <a:rPr lang="en-US" dirty="0" smtClean="0"/>
+              <a:rPr lang="en-US" dirty="0"/>
               <a:t>Coin Change</a:t>
             </a:r>
-            <a:endParaRPr lang="en-US" dirty="0"/>
           </a:p>
         </p:txBody>
       </p:sp>
@@ -13544,7 +14307,7 @@
           <p:cNvPr id="9" name="Title 1">
             <a:extLst>
               <a:ext uri="{FF2B5EF4-FFF2-40B4-BE49-F238E27FC236}">
-                <a16:creationId xmlns="" xmlns:a16="http://schemas.microsoft.com/office/drawing/2014/main" id="{B7545968-70F7-0180-6448-3547E442EF4A}"/>
+                <a16:creationId xmlns:a16="http://schemas.microsoft.com/office/drawing/2014/main" id="{B7545968-70F7-0180-6448-3547E442EF4A}"/>
               </a:ext>
             </a:extLst>
           </p:cNvPr>
@@ -13588,14 +14351,9 @@
           </a:lstStyle>
           <a:p>
             <a:r>
-              <a:rPr lang="en-US" dirty="0" smtClean="0"/>
-              <a:t>1        3           </a:t>
+              <a:rPr lang="en-US" dirty="0"/>
+              <a:t>1        3           4</a:t>
             </a:r>
-            <a:r>
-              <a:rPr lang="en-US" dirty="0"/>
-              <a:t>4</a:t>
-            </a:r>
-            <a:endParaRPr lang="en-US" dirty="0"/>
           </a:p>
         </p:txBody>
       </p:sp>
@@ -13604,7 +14362,7 @@
           <p:cNvPr id="10" name="Title 1">
             <a:extLst>
               <a:ext uri="{FF2B5EF4-FFF2-40B4-BE49-F238E27FC236}">
-                <a16:creationId xmlns="" xmlns:a16="http://schemas.microsoft.com/office/drawing/2014/main" id="{B7545968-70F7-0180-6448-3547E442EF4A}"/>
+                <a16:creationId xmlns:a16="http://schemas.microsoft.com/office/drawing/2014/main" id="{B7545968-70F7-0180-6448-3547E442EF4A}"/>
               </a:ext>
             </a:extLst>
           </p:cNvPr>
@@ -13648,10 +14406,9 @@
           </a:lstStyle>
           <a:p>
             <a:r>
-              <a:rPr lang="en-US" dirty="0" smtClean="0"/>
+              <a:rPr lang="en-US" dirty="0"/>
               <a:t>6</a:t>
             </a:r>
-            <a:endParaRPr lang="en-US" dirty="0"/>
           </a:p>
         </p:txBody>
       </p:sp>
@@ -13659,71 +14416,6 @@
     <p:extLst>
       <p:ext uri="{BB962C8B-B14F-4D97-AF65-F5344CB8AC3E}">
         <p14:creationId xmlns:p14="http://schemas.microsoft.com/office/powerpoint/2010/main" val="157325058"/>
-      </p:ext>
-    </p:extLst>
-  </p:cSld>
-  <p:clrMapOvr>
-    <a:masterClrMapping/>
-  </p:clrMapOvr>
-</p:sld>
-</file>
-
-<file path=ppt/slides/slide8.xml><?xml version="1.0" encoding="utf-8"?>
-<p:sld xmlns:a="http://schemas.openxmlformats.org/drawingml/2006/main" xmlns:r="http://schemas.openxmlformats.org/officeDocument/2006/relationships" xmlns:p="http://schemas.openxmlformats.org/presentationml/2006/main">
-  <p:cSld>
-    <p:spTree>
-      <p:nvGrpSpPr>
-        <p:cNvPr id="1" name=""/>
-        <p:cNvGrpSpPr/>
-        <p:nvPr/>
-      </p:nvGrpSpPr>
-      <p:grpSpPr>
-        <a:xfrm>
-          <a:off x="0" y="0"/>
-          <a:ext cx="0" cy="0"/>
-          <a:chOff x="0" y="0"/>
-          <a:chExt cx="0" cy="0"/>
-        </a:xfrm>
-      </p:grpSpPr>
-      <p:sp>
-        <p:nvSpPr>
-          <p:cNvPr id="2" name="Title 1">
-            <a:extLst>
-              <a:ext uri="{FF2B5EF4-FFF2-40B4-BE49-F238E27FC236}">
-                <a16:creationId xmlns="" xmlns:a16="http://schemas.microsoft.com/office/drawing/2014/main" id="{BF463CB3-2956-E8D2-C23D-A3BAA7295DEC}"/>
-              </a:ext>
-            </a:extLst>
-          </p:cNvPr>
-          <p:cNvSpPr>
-            <a:spLocks noGrp="1"/>
-          </p:cNvSpPr>
-          <p:nvPr>
-            <p:ph type="ctrTitle"/>
-          </p:nvPr>
-        </p:nvSpPr>
-        <p:spPr>
-          <a:xfrm>
-            <a:off x="2815929" y="2001832"/>
-            <a:ext cx="6560142" cy="3063149"/>
-          </a:xfrm>
-          <a:noFill/>
-        </p:spPr>
-        <p:txBody>
-          <a:bodyPr/>
-          <a:lstStyle/>
-          <a:p>
-            <a:r>
-              <a:rPr lang="en-US" dirty="0" smtClean="0"/>
-              <a:t>Dynamic Programming</a:t>
-            </a:r>
-            <a:endParaRPr lang="en-US" dirty="0"/>
-          </a:p>
-        </p:txBody>
-      </p:sp>
-    </p:spTree>
-    <p:extLst>
-      <p:ext uri="{BB962C8B-B14F-4D97-AF65-F5344CB8AC3E}">
-        <p14:creationId xmlns:p14="http://schemas.microsoft.com/office/powerpoint/2010/main" val="363098972"/>
       </p:ext>
     </p:extLst>
   </p:cSld>
@@ -13752,10 +14444,10 @@
       </p:grpSpPr>
       <p:sp>
         <p:nvSpPr>
-          <p:cNvPr id="5" name="Picture Placeholder 4">
+          <p:cNvPr id="2" name="Title 1">
             <a:extLst>
               <a:ext uri="{FF2B5EF4-FFF2-40B4-BE49-F238E27FC236}">
-                <a16:creationId xmlns="" xmlns:a16="http://schemas.microsoft.com/office/drawing/2014/main" id="{0103C39C-4BAC-4FDE-81AE-2CD3FF5092E7}"/>
+                <a16:creationId xmlns:a16="http://schemas.microsoft.com/office/drawing/2014/main" id="{BF463CB3-2956-E8D2-C23D-A3BAA7295DEC}"/>
               </a:ext>
             </a:extLst>
           </p:cNvPr>
@@ -13763,373 +14455,31 @@
             <a:spLocks noGrp="1"/>
           </p:cNvSpPr>
           <p:nvPr>
-            <p:ph type="pic" sz="quarter" idx="13"/>
-          </p:nvPr>
-        </p:nvSpPr>
-        <p:spPr/>
-        <p:txBody>
-          <a:bodyPr/>
-          <a:lstStyle/>
-          <a:p>
-            <a:endParaRPr lang="ko-KR" altLang="en-US" dirty="0"/>
-          </a:p>
-        </p:txBody>
-      </p:sp>
-      <p:pic>
-        <p:nvPicPr>
-          <p:cNvPr id="6" name="Picture 5">
-            <a:extLst>
-              <a:ext uri="{FF2B5EF4-FFF2-40B4-BE49-F238E27FC236}">
-                <a16:creationId xmlns="" xmlns:a16="http://schemas.microsoft.com/office/drawing/2014/main" id="{D6AA967D-A62A-4B7E-8A7D-BD6190A7F53B}"/>
-              </a:ext>
-            </a:extLst>
-          </p:cNvPr>
-          <p:cNvPicPr>
-            <a:picLocks noChangeAspect="1"/>
-          </p:cNvPicPr>
-          <p:nvPr/>
-        </p:nvPicPr>
-        <p:blipFill>
-          <a:blip r:embed="rId3"/>
-          <a:stretch>
-            <a:fillRect/>
-          </a:stretch>
-        </p:blipFill>
-        <p:spPr>
-          <a:xfrm>
-            <a:off x="7047220" y="1136132"/>
-            <a:ext cx="4876800" cy="4876800"/>
-          </a:xfrm>
-          <a:prstGeom prst="rect">
-            <a:avLst/>
-          </a:prstGeom>
-        </p:spPr>
-      </p:pic>
-      <p:sp>
-        <p:nvSpPr>
-          <p:cNvPr id="14" name="Content Placeholder 2">
-            <a:extLst>
-              <a:ext uri="{FF2B5EF4-FFF2-40B4-BE49-F238E27FC236}">
-                <a16:creationId xmlns="" xmlns:a16="http://schemas.microsoft.com/office/drawing/2014/main" id="{9CED9542-E80C-4BEB-8AF2-96515C5E8434}"/>
-              </a:ext>
-            </a:extLst>
-          </p:cNvPr>
-          <p:cNvSpPr>
-            <a:spLocks noGrp="1"/>
-          </p:cNvSpPr>
-          <p:nvPr>
-            <p:ph sz="half" idx="1"/>
+            <p:ph type="ctrTitle"/>
           </p:nvPr>
         </p:nvSpPr>
         <p:spPr>
           <a:xfrm>
-            <a:off x="863724" y="1197472"/>
-            <a:ext cx="5232276" cy="2094368"/>
+            <a:off x="2815929" y="2001832"/>
+            <a:ext cx="6560142" cy="3063149"/>
           </a:xfrm>
           <a:noFill/>
         </p:spPr>
         <p:txBody>
-          <a:bodyPr>
-            <a:normAutofit lnSpcReduction="10000"/>
-          </a:bodyPr>
+          <a:bodyPr/>
           <a:lstStyle/>
           <a:p>
-            <a:r>
-              <a:rPr lang="en-US" b="1" dirty="0" smtClean="0"/>
-              <a:t>Dynamic Programming </a:t>
-            </a:r>
-            <a:r>
-              <a:rPr lang="en-US" b="1" dirty="0" smtClean="0"/>
-              <a:t>Algorithm Definition</a:t>
-            </a:r>
-          </a:p>
-          <a:p>
-            <a:pPr lvl="1"/>
-            <a:r>
-              <a:rPr lang="en-US" dirty="0" smtClean="0"/>
-              <a:t>Solution </a:t>
-            </a:r>
             <a:r>
               <a:rPr lang="en-US" dirty="0"/>
-              <a:t>is determined based on solving successively similar but smaller problems</a:t>
+              <a:t>Dynamic Programming</a:t>
             </a:r>
-            <a:r>
-              <a:rPr lang="en-US" dirty="0" smtClean="0"/>
-              <a:t>.</a:t>
-            </a:r>
-          </a:p>
-          <a:p>
-            <a:pPr lvl="1"/>
-            <a:r>
-              <a:rPr lang="en-US" dirty="0" smtClean="0"/>
-              <a:t>Bigger </a:t>
-            </a:r>
-            <a:r>
-              <a:rPr lang="en-US" dirty="0"/>
-              <a:t>problem is relatively easy to find, if we have solutions for its sub-problems</a:t>
-            </a:r>
-            <a:r>
-              <a:rPr lang="en-US" dirty="0" smtClean="0"/>
-              <a:t>.</a:t>
-            </a:r>
-          </a:p>
-          <a:p>
-            <a:pPr lvl="1"/>
-            <a:r>
-              <a:rPr lang="en-US" dirty="0" smtClean="0"/>
-              <a:t>Use memory for caching</a:t>
-            </a:r>
-            <a:endParaRPr lang="en-US" dirty="0"/>
-          </a:p>
-        </p:txBody>
-      </p:sp>
-      <p:sp>
-        <p:nvSpPr>
-          <p:cNvPr id="15" name="Content Placeholder 2">
-            <a:extLst>
-              <a:ext uri="{FF2B5EF4-FFF2-40B4-BE49-F238E27FC236}">
-                <a16:creationId xmlns="" xmlns:a16="http://schemas.microsoft.com/office/drawing/2014/main" id="{176E4F11-9C99-45D1-9FB3-4DDF3111628C}"/>
-              </a:ext>
-            </a:extLst>
-          </p:cNvPr>
-          <p:cNvSpPr txBox="1">
-            <a:spLocks/>
-          </p:cNvSpPr>
-          <p:nvPr/>
-        </p:nvSpPr>
-        <p:spPr>
-          <a:xfrm>
-            <a:off x="838199" y="3566161"/>
-            <a:ext cx="4915163" cy="2472699"/>
-          </a:xfrm>
-          <a:prstGeom prst="rect">
-            <a:avLst/>
-          </a:prstGeom>
-          <a:noFill/>
-        </p:spPr>
-        <p:txBody>
-          <a:bodyPr vert="horz" lIns="91440" tIns="45720" rIns="91440" bIns="45720" rtlCol="0">
-            <a:normAutofit/>
-          </a:bodyPr>
-          <a:lstStyle>
-            <a:lvl1pPr marL="0" indent="0" algn="l" defTabSz="914400" rtl="0" eaLnBrk="1" latinLnBrk="0" hangingPunct="1">
-              <a:lnSpc>
-                <a:spcPct val="90000"/>
-              </a:lnSpc>
-              <a:spcBef>
-                <a:spcPts val="1000"/>
-              </a:spcBef>
-              <a:spcAft>
-                <a:spcPts val="800"/>
-              </a:spcAft>
-              <a:buFont typeface="Arial" panose="020B0604020202020204" pitchFamily="34" charset="0"/>
-              <a:buNone/>
-              <a:defRPr sz="1800" kern="1200">
-                <a:solidFill>
-                  <a:schemeClr val="tx1"/>
-                </a:solidFill>
-                <a:latin typeface="+mn-lt"/>
-                <a:ea typeface="+mn-ea"/>
-                <a:cs typeface="+mn-cs"/>
-              </a:defRPr>
-            </a:lvl1pPr>
-            <a:lvl2pPr marL="742950" indent="-285750" algn="l" defTabSz="914400" rtl="0" eaLnBrk="1" latinLnBrk="0" hangingPunct="1">
-              <a:lnSpc>
-                <a:spcPct val="90000"/>
-              </a:lnSpc>
-              <a:spcBef>
-                <a:spcPts val="1000"/>
-              </a:spcBef>
-              <a:spcAft>
-                <a:spcPts val="800"/>
-              </a:spcAft>
-              <a:buClr>
-                <a:schemeClr val="accent2"/>
-              </a:buClr>
-              <a:buFont typeface="Arial" panose="020B0604020202020204" pitchFamily="34" charset="0"/>
-              <a:buChar char="•"/>
-              <a:defRPr sz="1600" kern="1200">
-                <a:solidFill>
-                  <a:schemeClr val="tx1"/>
-                </a:solidFill>
-                <a:latin typeface="+mn-lt"/>
-                <a:ea typeface="+mn-ea"/>
-                <a:cs typeface="+mn-cs"/>
-              </a:defRPr>
-            </a:lvl2pPr>
-            <a:lvl3pPr marL="1200150" indent="-285750" algn="l" defTabSz="914400" rtl="0" eaLnBrk="1" latinLnBrk="0" hangingPunct="1">
-              <a:lnSpc>
-                <a:spcPct val="90000"/>
-              </a:lnSpc>
-              <a:spcBef>
-                <a:spcPts val="1000"/>
-              </a:spcBef>
-              <a:spcAft>
-                <a:spcPts val="800"/>
-              </a:spcAft>
-              <a:buClr>
-                <a:schemeClr val="accent2"/>
-              </a:buClr>
-              <a:buFont typeface="Arial" panose="020B0604020202020204" pitchFamily="34" charset="0"/>
-              <a:buChar char="•"/>
-              <a:defRPr sz="1400" kern="1200">
-                <a:solidFill>
-                  <a:schemeClr val="tx1"/>
-                </a:solidFill>
-                <a:latin typeface="+mn-lt"/>
-                <a:ea typeface="+mn-ea"/>
-                <a:cs typeface="+mn-cs"/>
-              </a:defRPr>
-            </a:lvl3pPr>
-            <a:lvl4pPr marL="1543050" indent="-171450" algn="l" defTabSz="914400" rtl="0" eaLnBrk="1" latinLnBrk="0" hangingPunct="1">
-              <a:lnSpc>
-                <a:spcPct val="90000"/>
-              </a:lnSpc>
-              <a:spcBef>
-                <a:spcPts val="1000"/>
-              </a:spcBef>
-              <a:spcAft>
-                <a:spcPts val="800"/>
-              </a:spcAft>
-              <a:buClr>
-                <a:schemeClr val="accent2"/>
-              </a:buClr>
-              <a:buFont typeface="Arial" panose="020B0604020202020204" pitchFamily="34" charset="0"/>
-              <a:buChar char="•"/>
-              <a:defRPr sz="1200" kern="1200">
-                <a:solidFill>
-                  <a:schemeClr val="tx1"/>
-                </a:solidFill>
-                <a:latin typeface="+mn-lt"/>
-                <a:ea typeface="+mn-ea"/>
-                <a:cs typeface="+mn-cs"/>
-              </a:defRPr>
-            </a:lvl4pPr>
-            <a:lvl5pPr marL="2000250" indent="-171450" algn="l" defTabSz="914400" rtl="0" eaLnBrk="1" latinLnBrk="0" hangingPunct="1">
-              <a:lnSpc>
-                <a:spcPct val="90000"/>
-              </a:lnSpc>
-              <a:spcBef>
-                <a:spcPts val="1000"/>
-              </a:spcBef>
-              <a:spcAft>
-                <a:spcPts val="800"/>
-              </a:spcAft>
-              <a:buClr>
-                <a:schemeClr val="accent2"/>
-              </a:buClr>
-              <a:buFont typeface="Arial" panose="020B0604020202020204" pitchFamily="34" charset="0"/>
-              <a:buChar char="•"/>
-              <a:defRPr sz="1200" kern="1200">
-                <a:solidFill>
-                  <a:schemeClr val="tx1"/>
-                </a:solidFill>
-                <a:latin typeface="+mn-lt"/>
-                <a:ea typeface="+mn-ea"/>
-                <a:cs typeface="+mn-cs"/>
-              </a:defRPr>
-            </a:lvl5pPr>
-            <a:lvl6pPr marL="2514600" indent="-228600" algn="l" defTabSz="914400" rtl="0" eaLnBrk="1" latinLnBrk="0" hangingPunct="1">
-              <a:lnSpc>
-                <a:spcPct val="90000"/>
-              </a:lnSpc>
-              <a:spcBef>
-                <a:spcPts val="500"/>
-              </a:spcBef>
-              <a:buFont typeface="Arial" panose="020B0604020202020204" pitchFamily="34" charset="0"/>
-              <a:buChar char="•"/>
-              <a:defRPr sz="1800" kern="1200">
-                <a:solidFill>
-                  <a:schemeClr val="tx1"/>
-                </a:solidFill>
-                <a:latin typeface="+mn-lt"/>
-                <a:ea typeface="+mn-ea"/>
-                <a:cs typeface="+mn-cs"/>
-              </a:defRPr>
-            </a:lvl6pPr>
-            <a:lvl7pPr marL="2971800" indent="-228600" algn="l" defTabSz="914400" rtl="0" eaLnBrk="1" latinLnBrk="0" hangingPunct="1">
-              <a:lnSpc>
-                <a:spcPct val="90000"/>
-              </a:lnSpc>
-              <a:spcBef>
-                <a:spcPts val="500"/>
-              </a:spcBef>
-              <a:buFont typeface="Arial" panose="020B0604020202020204" pitchFamily="34" charset="0"/>
-              <a:buChar char="•"/>
-              <a:defRPr sz="1800" kern="1200">
-                <a:solidFill>
-                  <a:schemeClr val="tx1"/>
-                </a:solidFill>
-                <a:latin typeface="+mn-lt"/>
-                <a:ea typeface="+mn-ea"/>
-                <a:cs typeface="+mn-cs"/>
-              </a:defRPr>
-            </a:lvl7pPr>
-            <a:lvl8pPr marL="3429000" indent="-228600" algn="l" defTabSz="914400" rtl="0" eaLnBrk="1" latinLnBrk="0" hangingPunct="1">
-              <a:lnSpc>
-                <a:spcPct val="90000"/>
-              </a:lnSpc>
-              <a:spcBef>
-                <a:spcPts val="500"/>
-              </a:spcBef>
-              <a:buFont typeface="Arial" panose="020B0604020202020204" pitchFamily="34" charset="0"/>
-              <a:buChar char="•"/>
-              <a:defRPr sz="1800" kern="1200">
-                <a:solidFill>
-                  <a:schemeClr val="tx1"/>
-                </a:solidFill>
-                <a:latin typeface="+mn-lt"/>
-                <a:ea typeface="+mn-ea"/>
-                <a:cs typeface="+mn-cs"/>
-              </a:defRPr>
-            </a:lvl8pPr>
-            <a:lvl9pPr marL="3886200" indent="-228600" algn="l" defTabSz="914400" rtl="0" eaLnBrk="1" latinLnBrk="0" hangingPunct="1">
-              <a:lnSpc>
-                <a:spcPct val="90000"/>
-              </a:lnSpc>
-              <a:spcBef>
-                <a:spcPts val="500"/>
-              </a:spcBef>
-              <a:buFont typeface="Arial" panose="020B0604020202020204" pitchFamily="34" charset="0"/>
-              <a:buChar char="•"/>
-              <a:defRPr sz="1800" kern="1200">
-                <a:solidFill>
-                  <a:schemeClr val="tx1"/>
-                </a:solidFill>
-                <a:latin typeface="+mn-lt"/>
-                <a:ea typeface="+mn-ea"/>
-                <a:cs typeface="+mn-cs"/>
-              </a:defRPr>
-            </a:lvl9pPr>
-          </a:lstStyle>
-          <a:p>
-            <a:r>
-              <a:rPr lang="en-US" b="1" dirty="0" smtClean="0"/>
-              <a:t>Types</a:t>
-            </a:r>
-            <a:endParaRPr lang="en-US" b="1" dirty="0"/>
-          </a:p>
-          <a:p>
-            <a:pPr lvl="1"/>
-            <a:r>
-              <a:rPr lang="en-US" dirty="0" smtClean="0"/>
-              <a:t>Top down</a:t>
-            </a:r>
-          </a:p>
-          <a:p>
-            <a:pPr lvl="1"/>
-            <a:r>
-              <a:rPr lang="en-US" dirty="0" smtClean="0"/>
-              <a:t>Bottom up</a:t>
-            </a:r>
-            <a:endParaRPr lang="en-US" dirty="0"/>
           </a:p>
         </p:txBody>
       </p:sp>
     </p:spTree>
     <p:extLst>
       <p:ext uri="{BB962C8B-B14F-4D97-AF65-F5344CB8AC3E}">
-        <p14:creationId xmlns:p14="http://schemas.microsoft.com/office/powerpoint/2010/main" val="2680463825"/>
+        <p14:creationId xmlns:p14="http://schemas.microsoft.com/office/powerpoint/2010/main" val="363098972"/>
       </p:ext>
     </p:extLst>
   </p:cSld>
@@ -14971,6 +15321,15 @@
 </file>
 
 <file path=customXml/item1.xml><?xml version="1.0" encoding="utf-8"?>
+<?mso-contentType ?>
+<FormTemplates xmlns="http://schemas.microsoft.com/sharepoint/v3/contenttype/forms">
+  <Display>DocumentLibraryForm</Display>
+  <Edit>DocumentLibraryForm</Edit>
+  <New>DocumentLibraryForm</New>
+</FormTemplates>
+</file>
+
+<file path=customXml/item2.xml><?xml version="1.0" encoding="utf-8"?>
 <p:properties xmlns:p="http://schemas.microsoft.com/office/2006/metadata/properties" xmlns:xsi="http://www.w3.org/2001/XMLSchema-instance" xmlns:pc="http://schemas.microsoft.com/office/infopath/2007/PartnerControls">
   <documentManagement>
     <_ip_UnifiedCompliancePolicyUIAction xmlns="http://schemas.microsoft.com/sharepoint/v3" xsi:nil="true"/>
@@ -14988,15 +15347,6 @@
     <MediaServiceKeyPoints xmlns="71af3243-3dd4-4a8d-8c0d-dd76da1f02a5" xsi:nil="true"/>
   </documentManagement>
 </p:properties>
-</file>
-
-<file path=customXml/item2.xml><?xml version="1.0" encoding="utf-8"?>
-<?mso-contentType ?>
-<FormTemplates xmlns="http://schemas.microsoft.com/sharepoint/v3/contenttype/forms">
-  <Display>DocumentLibraryForm</Display>
-  <Edit>DocumentLibraryForm</Edit>
-  <New>DocumentLibraryForm</New>
-</FormTemplates>
 </file>
 
 <file path=customXml/item3.xml><?xml version="1.0" encoding="utf-8"?>
@@ -15312,6 +15662,14 @@
 </file>
 
 <file path=customXml/itemProps1.xml><?xml version="1.0" encoding="utf-8"?>
+<ds:datastoreItem xmlns:ds="http://schemas.openxmlformats.org/officeDocument/2006/customXml" ds:itemID="{67FFD73E-D96B-4428-99CD-717A4897D3B4}">
+  <ds:schemaRefs>
+    <ds:schemaRef ds:uri="http://schemas.microsoft.com/sharepoint/v3/contenttype/forms"/>
+  </ds:schemaRefs>
+</ds:datastoreItem>
+</file>
+
+<file path=customXml/itemProps2.xml><?xml version="1.0" encoding="utf-8"?>
 <ds:datastoreItem xmlns:ds="http://schemas.openxmlformats.org/officeDocument/2006/customXml" ds:itemID="{A3165DE6-2DCE-44FC-94B7-A499559DBF88}">
   <ds:schemaRefs>
     <ds:schemaRef ds:uri="http://schemas.microsoft.com/office/infopath/2007/PartnerControls"/>
@@ -15326,14 +15684,6 @@
     <ds:schemaRef ds:uri="http://www.w3.org/XML/1998/namespace"/>
     <ds:schemaRef ds:uri="http://purl.org/dc/dcmitype/"/>
     <ds:schemaRef ds:uri="http://purl.org/dc/terms/"/>
-  </ds:schemaRefs>
-</ds:datastoreItem>
-</file>
-
-<file path=customXml/itemProps2.xml><?xml version="1.0" encoding="utf-8"?>
-<ds:datastoreItem xmlns:ds="http://schemas.openxmlformats.org/officeDocument/2006/customXml" ds:itemID="{67FFD73E-D96B-4428-99CD-717A4897D3B4}">
-  <ds:schemaRefs>
-    <ds:schemaRef ds:uri="http://schemas.microsoft.com/sharepoint/v3/contenttype/forms"/>
   </ds:schemaRefs>
 </ds:datastoreItem>
 </file>
